--- a/test-data/test.pptx
+++ b/test-data/test.pptx
@@ -6,28 +6,27 @@
     <p:sldMasterId id="2147483659" r:id="rId2"/>
   </p:sldMasterIdLst>
   <p:notesMasterIdLst>
-    <p:notesMasterId r:id="rId9"/>
+    <p:notesMasterId r:id="rId8"/>
   </p:notesMasterIdLst>
   <p:handoutMasterIdLst>
-    <p:handoutMasterId r:id="rId10"/>
+    <p:handoutMasterId r:id="rId9"/>
   </p:handoutMasterIdLst>
   <p:sldIdLst>
     <p:sldId id="471" r:id="rId3"/>
     <p:sldId id="324" r:id="rId4"/>
-    <p:sldId id="332" r:id="rId5"/>
-    <p:sldId id="389" r:id="rId6"/>
-    <p:sldId id="822" r:id="rId7"/>
-    <p:sldId id="1090" r:id="rId8"/>
+    <p:sldId id="389" r:id="rId5"/>
+    <p:sldId id="1090" r:id="rId6"/>
+    <p:sldId id="1130" r:id="rId7"/>
   </p:sldIdLst>
   <p:sldSz cx="9144000" cy="6858000" type="screen4x3"/>
   <p:notesSz cx="6858000" cy="9144000"/>
   <p:embeddedFontLst>
     <p:embeddedFont>
       <p:font typeface="Verdana" panose="020B0604030504040204" pitchFamily="34" charset="0"/>
-      <p:regular r:id="rId11"/>
-      <p:bold r:id="rId12"/>
-      <p:italic r:id="rId13"/>
-      <p:boldItalic r:id="rId14"/>
+      <p:regular r:id="rId10"/>
+      <p:bold r:id="rId11"/>
+      <p:italic r:id="rId12"/>
+      <p:boldItalic r:id="rId13"/>
     </p:embeddedFont>
   </p:embeddedFontLst>
   <p:defaultTextStyle>
@@ -1400,7 +1399,7 @@
           <a:p>
             <a:fld id="{2885CB01-6679-D646-ACB3-8B04B786C15F}" type="datetimeFigureOut">
               <a:rPr lang="en-US" smtClean="0"/>
-              <a:t>2026-10-13</a:t>
+              <a:t>2026-10-15</a:t>
             </a:fld>
             <a:endParaRPr lang="en-US"/>
           </a:p>
@@ -1481,6 +1480,1525 @@
   </p:cSld>
   <p:clrMap bg1="lt1" tx1="dk1" bg2="lt2" tx2="dk2" accent1="accent1" accent2="accent2" accent3="accent3" accent4="accent4" accent5="accent5" accent6="accent6" hlink="hlink" folHlink="folHlink"/>
 </p:handoutMaster>
+</file>
+
+<file path=ppt/ink/ink1.xml><?xml version="1.0" encoding="utf-8"?>
+<inkml:ink xmlns:inkml="http://www.w3.org/2003/InkML">
+  <inkml:definitions>
+    <inkml:context xml:id="ctx0">
+      <inkml:inkSource xml:id="inkSrc0">
+        <inkml:traceFormat>
+          <inkml:channel name="X" type="integer" min="-2.14748E9" max="2.14748E9" units="cm"/>
+          <inkml:channel name="Y" type="integer" min="-2.14748E9" max="2.14748E9" units="cm"/>
+          <inkml:channel name="F" type="integer" max="32767" units="dev"/>
+          <inkml:channel name="OA" type="integer" max="360" units="deg"/>
+          <inkml:channel name="OE" type="integer" max="90" units="deg"/>
+        </inkml:traceFormat>
+        <inkml:channelProperties>
+          <inkml:channelProperty channel="X" name="resolution" value="1000" units="1/cm"/>
+          <inkml:channelProperty channel="Y" name="resolution" value="1000" units="1/cm"/>
+          <inkml:channelProperty channel="F" name="resolution" value="0" units="1/dev"/>
+          <inkml:channelProperty channel="OA" name="resolution" value="1000" units="1/deg"/>
+          <inkml:channelProperty channel="OE" name="resolution" value="1000" units="1/deg"/>
+        </inkml:channelProperties>
+      </inkml:inkSource>
+      <inkml:timestamp xml:id="ts0" timeString="2026-10-04T03:50:43.972"/>
+    </inkml:context>
+    <inkml:brush xml:id="br0">
+      <inkml:brushProperty name="width" value="0.1" units="cm"/>
+      <inkml:brushProperty name="height" value="0.1" units="cm"/>
+    </inkml:brush>
+  </inkml:definitions>
+  <inkml:trace contextRef="#ctx0" brushRef="#br0">677 1 252 0 0,'-6'13'419'0'0,"1"0"0"0"0,0 1 0 0 0,1 0 0 0 0,-5 26 1 0 0,5-20-231 0 0,-9 29 0 0 0,-56 113 570 0 0,-12 36-540 0 0,-161 404-218 0 0,152-412-4 0 0,39-87 2 0 0,31-69 48 0 0,19-33-34 0 0,0 1 1 0 0,0-1-1 0 0,0 0 1 0 0,0 0-1 0 0,1 0 0 0 0,-1 0 1 0 0,-1 0-1 0 0,1 0 0 0 0,0 0 1 0 0,0-1-1 0 0,0 1 1 0 0,0 0-1 0 0,-1 0 0 0 0,1-1 1 0 0,0 1-1 0 0,-1-1 0 0 0,1 1 1 0 0,0-1-1 0 0,-1 0 1 0 0,1 1-1 0 0,0-1 0 0 0,-1 0 1 0 0,-2 0-1 0 0,2-1-9 0 0,1 0 1 0 0,0 0-1 0 0,-1 0 1 0 0,1 0-1 0 0,0 0 1 0 0,-1 0-1 0 0,1 0 0 0 0,0 0 1 0 0,0 0-1 0 0,0-1 1 0 0,0 1-1 0 0,0 0 1 0 0,0-1-1 0 0,1 1 0 0 0,-1-1 1 0 0,0 1-1 0 0,1-1 1 0 0,-1 1-1 0 0,1-1 0 0 0,-1 0 1 0 0,1-1-1 0 0,-6-40-11 0 0,5 31 16 0 0,-1-18-10 0 0,2-37 0 0 0,1 22-1 0 0,6-42-33 0 0,-16 130 36 0 0,2 1-1 0 0,2 0 1 0 0,1 0-1 0 0,5 76 1 0 0,-1-118-1 0 0,1 1 0 0 0,-1-1 1 0 0,0 0-1 0 0,1 0 1 0 0,-1 0-1 0 0,1 0 0 0 0,-1 0 1 0 0,1-1-1 0 0,0 1 1 0 0,0 0-1 0 0,0 0 0 0 0,0 0 1 0 0,0-1-1 0 0,0 1 1 0 0,1 0-1 0 0,-1-1 0 0 0,0 1 1 0 0,1-1-1 0 0,0 0 1 0 0,-1 1-1 0 0,1-1 0 0 0,0 0 1 0 0,-1 0-1 0 0,1 0 0 0 0,0 0 1 0 0,0 0-1 0 0,0 0 1 0 0,0-1-1 0 0,0 1 0 0 0,0-1 1 0 0,0 1-1 0 0,0-1 1 0 0,0 0-1 0 0,0 0 0 0 0,0 0 1 0 0,0 0-1 0 0,0 0 1 0 0,2-1-1 0 0,5 0-54 0 0,0 0-1 0 0,-1-1 1 0 0,1-1 0 0 0,-1 1 0 0 0,1-2-1 0 0,-1 1 1 0 0,13-8 0 0 0,10-8-879 0 0,-2-1 1 0 0,30-26-1 0 0,-31 21 102 0 0</inkml:trace>
+</inkml:ink>
+</file>
+
+<file path=ppt/ink/ink10.xml><?xml version="1.0" encoding="utf-8"?>
+<inkml:ink xmlns:inkml="http://www.w3.org/2003/InkML">
+  <inkml:definitions>
+    <inkml:context xml:id="ctx0">
+      <inkml:inkSource xml:id="inkSrc0">
+        <inkml:traceFormat>
+          <inkml:channel name="X" type="integer" min="-2.14748E9" max="2.14748E9" units="cm"/>
+          <inkml:channel name="Y" type="integer" min="-2.14748E9" max="2.14748E9" units="cm"/>
+          <inkml:channel name="F" type="integer" max="32767" units="dev"/>
+          <inkml:channel name="OA" type="integer" max="360" units="deg"/>
+          <inkml:channel name="OE" type="integer" max="90" units="deg"/>
+        </inkml:traceFormat>
+        <inkml:channelProperties>
+          <inkml:channelProperty channel="X" name="resolution" value="1000" units="1/cm"/>
+          <inkml:channelProperty channel="Y" name="resolution" value="1000" units="1/cm"/>
+          <inkml:channelProperty channel="F" name="resolution" value="0" units="1/dev"/>
+          <inkml:channelProperty channel="OA" name="resolution" value="1000" units="1/deg"/>
+          <inkml:channelProperty channel="OE" name="resolution" value="1000" units="1/deg"/>
+        </inkml:channelProperties>
+      </inkml:inkSource>
+      <inkml:timestamp xml:id="ts0" timeString="2026-10-04T03:50:47.540"/>
+    </inkml:context>
+    <inkml:brush xml:id="br0">
+      <inkml:brushProperty name="width" value="0.1" units="cm"/>
+      <inkml:brushProperty name="height" value="0.1" units="cm"/>
+    </inkml:brush>
+  </inkml:definitions>
+  <inkml:trace contextRef="#ctx0" brushRef="#br0">1 159 316 0 0,'3'-32'852'0'0,"-3"7"60"0"0,0 3-200 0 0,0 3-208 0 0,0 3-200 0 0,4 3-180 0 0,-4 4-180 0 0,3 3-168 0 0,1-1-148 0 0,-1 1-188 0 0,4 3-164 0 0,0 3-40 0 0,0 3 28 0 0</inkml:trace>
+</inkml:ink>
+</file>
+
+<file path=ppt/ink/ink11.xml><?xml version="1.0" encoding="utf-8"?>
+<inkml:ink xmlns:inkml="http://www.w3.org/2003/InkML">
+  <inkml:definitions>
+    <inkml:context xml:id="ctx0">
+      <inkml:inkSource xml:id="inkSrc0">
+        <inkml:traceFormat>
+          <inkml:channel name="X" type="integer" min="-2.14748E9" max="2.14748E9" units="cm"/>
+          <inkml:channel name="Y" type="integer" min="-2.14748E9" max="2.14748E9" units="cm"/>
+          <inkml:channel name="F" type="integer" max="32767" units="dev"/>
+          <inkml:channel name="OA" type="integer" max="360" units="deg"/>
+          <inkml:channel name="OE" type="integer" max="90" units="deg"/>
+        </inkml:traceFormat>
+        <inkml:channelProperties>
+          <inkml:channelProperty channel="X" name="resolution" value="1000" units="1/cm"/>
+          <inkml:channelProperty channel="Y" name="resolution" value="1000" units="1/cm"/>
+          <inkml:channelProperty channel="F" name="resolution" value="0" units="1/dev"/>
+          <inkml:channelProperty channel="OA" name="resolution" value="1000" units="1/deg"/>
+          <inkml:channelProperty channel="OE" name="resolution" value="1000" units="1/deg"/>
+        </inkml:channelProperties>
+      </inkml:inkSource>
+      <inkml:timestamp xml:id="ts0" timeString="2026-10-04T03:50:47.840"/>
+    </inkml:context>
+    <inkml:brush xml:id="br0">
+      <inkml:brushProperty name="width" value="0.1" units="cm"/>
+      <inkml:brushProperty name="height" value="0.1" units="cm"/>
+    </inkml:brush>
+  </inkml:definitions>
+  <inkml:trace contextRef="#ctx0" brushRef="#br0">0 0 332 0 0,'6'101'1536'0'0,"-4"-48"-521"0"0,2-2-1 0 0,16 75 0 0 0,-20-125-967 0 0,0 0 0 0 0,0-1 0 0 0,0 1 0 0 0,0 0 1 0 0,0 0-1 0 0,0 0 0 0 0,1 0 0 0 0,-1 0 0 0 0,0 0 0 0 0,1-1 0 0 0,-1 1 0 0 0,1 0 0 0 0,-1 0 0 0 0,1-1 0 0 0,-1 1 0 0 0,1 0 1 0 0,-1-1-1 0 0,1 1 0 0 0,0 0 0 0 0,-1-1 0 0 0,1 1 0 0 0,0-1 0 0 0,0 1 0 0 0,-1-1 0 0 0,1 1 0 0 0,0-1 0 0 0,0 0 0 0 0,1 1 1 0 0,0-1 42 0 0,-1-1 1 0 0,0 1 0 0 0,1 0 0 0 0,-1-1 0 0 0,0 1 0 0 0,1-1 0 0 0,-1 0 0 0 0,0 0-1 0 0,0 1 1 0 0,0-1 0 0 0,1 0 0 0 0,-1 0 0 0 0,0 0 0 0 0,0 0 0 0 0,1-2 0 0 0,5-6 501 0 0,0-1 1 0 0,0 1-1 0 0,6-14 1 0 0,6-19 1009 0 0,-11 23-143 0 0,20-33 0 0 0,-28 52-1449 0 0,1-1 1 0 0,-1 1 0 0 0,0 0 0 0 0,0-1 0 0 0,1 1 0 0 0,-1 0-1 0 0,0-1 1 0 0,1 1 0 0 0,-1 0 0 0 0,0 0 0 0 0,1-1-1 0 0,-1 1 1 0 0,0 0 0 0 0,1 0 0 0 0,-1 0 0 0 0,1-1-1 0 0,-1 1 1 0 0,0 0 0 0 0,1 0 0 0 0,-1 0 0 0 0,1 0 0 0 0,-1 0-1 0 0,1 0 1 0 0,-1 0 0 0 0,0 0 0 0 0,1 0 0 0 0,-1 0-1 0 0,1 0 1 0 0,-1 0 0 0 0,1 0 0 0 0,-1 0 0 0 0,0 0-1 0 0,1 1 1 0 0,-1-1 0 0 0,1 0 0 0 0,-1 0 0 0 0,0 0 0 0 0,1 1-1 0 0,-1-1 1 0 0,0 0 0 0 0,1 0 0 0 0,-1 1 0 0 0,0-1-1 0 0,1 0 1 0 0,-1 1 0 0 0,0-1 0 0 0,0 0 0 0 0,1 1-1 0 0,-1-1 1 0 0,0 1 0 0 0,0-1 0 0 0,0 0 0 0 0,1 1-1 0 0,-1 0 1 0 0,14 29-66 0 0,-11-23 26 0 0,0-1-466 0 0,0 1 0 0 0,0-1 0 0 0,0 0 0 0 0,1-1 0 0 0,0 1-1 0 0,1-1 1 0 0,-1 0 0 0 0,7 6 0 0 0,-9-10 159 0 0,0 1 0 0 0,1-1-1 0 0,-1 1 1 0 0,1-1-1 0 0,0 0 1 0 0,-1 0 0 0 0,1 0-1 0 0,0-1 1 0 0,0 1-1 0 0,-1 0 1 0 0,1-1 0 0 0,0 0-1 0 0,0 0 1 0 0,0 0-1 0 0,0 0 1 0 0,0 0 0 0 0,-1-1-1 0 0,1 1 1 0 0,0-1-1 0 0,0 0 1 0 0,0 1 0 0 0,2-3-1 0 0,19-6-1393 0 0</inkml:trace>
+</inkml:ink>
+</file>
+
+<file path=ppt/ink/ink12.xml><?xml version="1.0" encoding="utf-8"?>
+<inkml:ink xmlns:inkml="http://www.w3.org/2003/InkML">
+  <inkml:definitions>
+    <inkml:context xml:id="ctx0">
+      <inkml:inkSource xml:id="inkSrc0">
+        <inkml:traceFormat>
+          <inkml:channel name="X" type="integer" min="-2.14748E9" max="2.14748E9" units="cm"/>
+          <inkml:channel name="Y" type="integer" min="-2.14748E9" max="2.14748E9" units="cm"/>
+          <inkml:channel name="F" type="integer" max="32767" units="dev"/>
+          <inkml:channel name="OA" type="integer" max="360" units="deg"/>
+          <inkml:channel name="OE" type="integer" max="90" units="deg"/>
+        </inkml:traceFormat>
+        <inkml:channelProperties>
+          <inkml:channelProperty channel="X" name="resolution" value="1000" units="1/cm"/>
+          <inkml:channelProperty channel="Y" name="resolution" value="1000" units="1/cm"/>
+          <inkml:channelProperty channel="F" name="resolution" value="0" units="1/dev"/>
+          <inkml:channelProperty channel="OA" name="resolution" value="1000" units="1/deg"/>
+          <inkml:channelProperty channel="OE" name="resolution" value="1000" units="1/deg"/>
+        </inkml:channelProperties>
+      </inkml:inkSource>
+      <inkml:timestamp xml:id="ts0" timeString="2026-10-04T03:50:48.096"/>
+    </inkml:context>
+    <inkml:brush xml:id="br0">
+      <inkml:brushProperty name="width" value="0.1" units="cm"/>
+      <inkml:brushProperty name="height" value="0.1" units="cm"/>
+    </inkml:brush>
+  </inkml:definitions>
+  <inkml:trace contextRef="#ctx0" brushRef="#br0">148 57 88 0 0,'0'-3'296'0'0,"1"0"0"0"0,-1 1 0 0 0,1-1 0 0 0,-1 0 0 0 0,0 0 0 0 0,0 0 0 0 0,0 0 0 0 0,0 0 0 0 0,-1 0 0 0 0,1 0 0 0 0,-1 0 0 0 0,0 1 0 0 0,-1-5 0 0 0,1 6-138 0 0,0 0-1 0 0,0 0 1 0 0,0 0 0 0 0,0 0 0 0 0,0 0 0 0 0,0 0-1 0 0,0 0 1 0 0,0 1 0 0 0,-1-1 0 0 0,1 0 0 0 0,0 1 0 0 0,0-1-1 0 0,-1 1 1 0 0,1-1 0 0 0,0 1 0 0 0,-1 0 0 0 0,1 0-1 0 0,-1-1 1 0 0,1 1 0 0 0,0 0 0 0 0,-1 0 0 0 0,1 0-1 0 0,-1 0 1 0 0,1 1 0 0 0,0-1 0 0 0,-1 0 0 0 0,1 1 0 0 0,0-1-1 0 0,-3 1 1 0 0,2 0-28 0 0,-1-1 1 0 0,1 1-1 0 0,0-1 0 0 0,-1 1 0 0 0,1 0 1 0 0,0 0-1 0 0,0 0 0 0 0,-1 0 0 0 0,1 0 0 0 0,0 0 1 0 0,0 1-1 0 0,0-1 0 0 0,0 1 0 0 0,1 0 1 0 0,-1-1-1 0 0,0 1 0 0 0,1 0 0 0 0,-1 0 0 0 0,1 0 1 0 0,-1 0-1 0 0,1 0 0 0 0,0 0 0 0 0,0 0 1 0 0,0 1-1 0 0,0-1 0 0 0,1 0 0 0 0,-1 0 0 0 0,0 1 1 0 0,1-1-1 0 0,0 1 0 0 0,-1-1 0 0 0,1 1 1 0 0,0-1-1 0 0,0 0 0 0 0,1 3 0 0 0,0 2-61 0 0,1-1-1 0 0,0 0 1 0 0,0 1-1 0 0,0-1 1 0 0,1-1 0 0 0,0 1-1 0 0,0 0 1 0 0,1-1-1 0 0,-1 1 1 0 0,1-1-1 0 0,0 0 1 0 0,7 6-1 0 0,27 23 15 0 0,-27-26-49 0 0,-1 1-1 0 0,-1 0 1 0 0,1 1-1 0 0,11 15 1 0 0,-19-21-26 0 0,1 0 0 0 0,-1 1-1 0 0,0 0 1 0 0,0-1 0 0 0,0 1 0 0 0,0 0 0 0 0,-1 0 0 0 0,0 0-1 0 0,0 0 1 0 0,0 0 0 0 0,-1 0 0 0 0,0 0 0 0 0,0 0 0 0 0,0 0 0 0 0,-1 9-1 0 0,-1-5-116 0 0,-1 0 0 0 0,0 0 0 0 0,0 0 0 0 0,-1 0-1 0 0,0-1 1 0 0,0 1 0 0 0,-1-1 0 0 0,0 0 0 0 0,0-1-1 0 0,-1 1 1 0 0,0-1 0 0 0,-1 0 0 0 0,-7 7 0 0 0,10-10-391 0 0,-1 0 1 0 0,1-1 0 0 0,-1 1 0 0 0,1-1 0 0 0,-1 0-1 0 0,0 0 1 0 0,0 0 0 0 0,0-1 0 0 0,-1 0 0 0 0,1 0 0 0 0,0 0-1 0 0,-1-1 1 0 0,0 0 0 0 0,1 0 0 0 0,-1 0 0 0 0,0 0 0 0 0,1-1-1 0 0,-1 0 1 0 0,0 0 0 0 0,1-1 0 0 0,-1 0 0 0 0,-9-2 0 0 0,0-6-1085 0 0</inkml:trace>
+</inkml:ink>
+</file>
+
+<file path=ppt/ink/ink13.xml><?xml version="1.0" encoding="utf-8"?>
+<inkml:ink xmlns:inkml="http://www.w3.org/2003/InkML">
+  <inkml:definitions>
+    <inkml:context xml:id="ctx0">
+      <inkml:inkSource xml:id="inkSrc0">
+        <inkml:traceFormat>
+          <inkml:channel name="X" type="integer" min="-2.14748E9" max="2.14748E9" units="cm"/>
+          <inkml:channel name="Y" type="integer" min="-2.14748E9" max="2.14748E9" units="cm"/>
+          <inkml:channel name="F" type="integer" max="32767" units="dev"/>
+          <inkml:channel name="OA" type="integer" max="360" units="deg"/>
+          <inkml:channel name="OE" type="integer" max="90" units="deg"/>
+        </inkml:traceFormat>
+        <inkml:channelProperties>
+          <inkml:channelProperty channel="X" name="resolution" value="1000" units="1/cm"/>
+          <inkml:channelProperty channel="Y" name="resolution" value="1000" units="1/cm"/>
+          <inkml:channelProperty channel="F" name="resolution" value="0" units="1/dev"/>
+          <inkml:channelProperty channel="OA" name="resolution" value="1000" units="1/deg"/>
+          <inkml:channelProperty channel="OE" name="resolution" value="1000" units="1/deg"/>
+        </inkml:channelProperties>
+      </inkml:inkSource>
+      <inkml:timestamp xml:id="ts0" timeString="2026-10-04T03:50:48.508"/>
+    </inkml:context>
+    <inkml:brush xml:id="br0">
+      <inkml:brushProperty name="width" value="0.1" units="cm"/>
+      <inkml:brushProperty name="height" value="0.1" units="cm"/>
+    </inkml:brush>
+  </inkml:definitions>
+  <inkml:trace contextRef="#ctx0" brushRef="#br0">0 466 84 0 0,'9'31'1709'0'0,"4"40"1"0"0,4 14-731 0 0,47 121-658 0 0,1 3-294 0 0,-61-193 2 0 0,0-1 0 0 0,-1 1 1 0 0,1 25-1 0 0,-4-41-27 0 0,0 0 1 0 0,0 0-1 0 0,0 0 0 0 0,0 0 0 0 0,0 0 1 0 0,0 0-1 0 0,0 0 0 0 0,0 1 0 0 0,0-1 1 0 0,0 0-1 0 0,0 0 0 0 0,0 0 0 0 0,0 0 1 0 0,0 0-1 0 0,0 0 0 0 0,0 0 1 0 0,0 0-1 0 0,0 1 0 0 0,0-1 0 0 0,0 0 1 0 0,0 0-1 0 0,0 0 0 0 0,0 0 0 0 0,0 0 1 0 0,0 0-1 0 0,0 0 0 0 0,0 0 0 0 0,0 0 1 0 0,0 1-1 0 0,0-1 0 0 0,0 0 0 0 0,0 0 1 0 0,0 0-1 0 0,0 0 0 0 0,0 0 0 0 0,0 0 1 0 0,0 0-1 0 0,0 0 0 0 0,0 0 0 0 0,0 0 1 0 0,-1 0-1 0 0,1 1 0 0 0,0-1 1 0 0,0 0-1 0 0,0 0 0 0 0,0 0 0 0 0,0 0 1 0 0,0 0-1 0 0,0 0 0 0 0,0 0 0 0 0,0 0 1 0 0,-1 0-1 0 0,1 0 0 0 0,0 0 0 0 0,0 0 1 0 0,0 0-1 0 0,0 0 0 0 0,0 0 0 0 0,0 0 1 0 0,0 0-1 0 0,0 0 0 0 0,-1 0 0 0 0,1 0 1 0 0,0 0-1 0 0,0 0 0 0 0,0 0 0 0 0,0 0 1 0 0,0 0-1 0 0,0-1 0 0 0,-7-8 154 0 0,-5-17 172 0 0,-6-32 575 0 0,2-1-1 0 0,2 0 0 0 0,-7-86 1 0 0,16 82-700 0 0,3 1 0 0 0,2-1 0 0 0,3 0 1 0 0,3 1-1 0 0,28-119 0 0 0,-23 138 59 0 0,2 0-1 0 0,2 1 0 0 0,1 0 0 0 0,30-51 0 0 0,-43 88-165 0 0,0 1 0 0 0,0-1 0 0 0,0 1-1 0 0,1 0 1 0 0,0 0 0 0 0,0 0-1 0 0,0 1 1 0 0,5-4 0 0 0,-8 6-68 0 0,0 0 0 0 0,0 1 1 0 0,0-1-1 0 0,0 1 1 0 0,0-1-1 0 0,0 1 0 0 0,0-1 1 0 0,0 1-1 0 0,0 0 1 0 0,1 0-1 0 0,-1 0 0 0 0,0-1 1 0 0,0 1-1 0 0,0 0 1 0 0,0 0-1 0 0,1 1 0 0 0,-1-1 1 0 0,0 0-1 0 0,0 0 1 0 0,0 0-1 0 0,0 1 0 0 0,0-1 1 0 0,0 1-1 0 0,1-1 1 0 0,-1 1-1 0 0,0-1 0 0 0,0 1 1 0 0,0 0-1 0 0,-1-1 0 0 0,1 1 1 0 0,0 0-1 0 0,0 0 1 0 0,0 0-1 0 0,0-1 0 0 0,-1 1 1 0 0,1 0-1 0 0,0 0 1 0 0,-1 0-1 0 0,1 0 0 0 0,-1 0 1 0 0,1 0-1 0 0,0 2 1 0 0,2 6 60 0 0,1 0 0 0 0,-1 1 0 0 0,-1-1 0 0 0,1 0 0 0 0,-2 1 0 0 0,1 0 0 0 0,-1 11 0 0 0,0 9 8 0 0,-4 31 0 0 0,0-26-31 0 0,-1-1-1 0 0,-15 55 0 0 0,14-73-263 0 0,-1 1 0 0 0,0-1 0 0 0,-1 0 0 0 0,-1-1 0 0 0,0 0 0 0 0,-1 0 0 0 0,-13 16 0 0 0,20-28-134 0 0,-1 0 0 0 0,1 0 0 0 0,0 0 1 0 0,-1-1-1 0 0,0 1 0 0 0,1-1 0 0 0,-1 1 1 0 0,0-1-1 0 0,0 0 0 0 0,0 0 0 0 0,-1-1 1 0 0,1 1-1 0 0,0-1 0 0 0,-1 1 0 0 0,1-1 1 0 0,-1 0-1 0 0,1 0 0 0 0,-1-1 0 0 0,1 1 1 0 0,-1-1-1 0 0,0 1 0 0 0,1-1 0 0 0,-1 0 1 0 0,0-1-1 0 0,1 1 0 0 0,-1-1 0 0 0,1 1 1 0 0,-1-1-1 0 0,1 0 0 0 0,-6-3 0 0 0,-12-7-1536 0 0</inkml:trace>
+</inkml:ink>
+</file>
+
+<file path=ppt/ink/ink14.xml><?xml version="1.0" encoding="utf-8"?>
+<inkml:ink xmlns:inkml="http://www.w3.org/2003/InkML">
+  <inkml:definitions>
+    <inkml:context xml:id="ctx0">
+      <inkml:inkSource xml:id="inkSrc0">
+        <inkml:traceFormat>
+          <inkml:channel name="X" type="integer" min="-2.14748E9" max="2.14748E9" units="cm"/>
+          <inkml:channel name="Y" type="integer" min="-2.14748E9" max="2.14748E9" units="cm"/>
+          <inkml:channel name="F" type="integer" max="32767" units="dev"/>
+          <inkml:channel name="OA" type="integer" max="360" units="deg"/>
+          <inkml:channel name="OE" type="integer" max="90" units="deg"/>
+        </inkml:traceFormat>
+        <inkml:channelProperties>
+          <inkml:channelProperty channel="X" name="resolution" value="1000" units="1/cm"/>
+          <inkml:channelProperty channel="Y" name="resolution" value="1000" units="1/cm"/>
+          <inkml:channelProperty channel="F" name="resolution" value="0" units="1/dev"/>
+          <inkml:channelProperty channel="OA" name="resolution" value="1000" units="1/deg"/>
+          <inkml:channelProperty channel="OE" name="resolution" value="1000" units="1/deg"/>
+        </inkml:channelProperties>
+      </inkml:inkSource>
+      <inkml:timestamp xml:id="ts0" timeString="2026-10-04T03:50:48.715"/>
+    </inkml:context>
+    <inkml:brush xml:id="br0">
+      <inkml:brushProperty name="width" value="0.1" units="cm"/>
+      <inkml:brushProperty name="height" value="0.1" units="cm"/>
+    </inkml:brush>
+  </inkml:definitions>
+  <inkml:trace contextRef="#ctx0" brushRef="#br0">11 0 972 0 0,'7'16'1520'0'0,"-7"6"132"0"0,-4 0 93 0 0,1 3-417 0 0,-4 4-432 0 0,3-4-344 0 0,4 3-212 0 0,0-2-124 0 0,0-1-96 0 0,4 0-148 0 0,-1 0-288 0 0,1-3-324 0 0,-1 0-336 0 0,4-3-420 0 0,0-6-221 0 0,-3-4-23 0 0,-1-2 192 0 0</inkml:trace>
+</inkml:ink>
+</file>
+
+<file path=ppt/ink/ink15.xml><?xml version="1.0" encoding="utf-8"?>
+<inkml:ink xmlns:inkml="http://www.w3.org/2003/InkML">
+  <inkml:definitions>
+    <inkml:context xml:id="ctx0">
+      <inkml:inkSource xml:id="inkSrc0">
+        <inkml:traceFormat>
+          <inkml:channel name="X" type="integer" min="-2.14748E9" max="2.14748E9" units="cm"/>
+          <inkml:channel name="Y" type="integer" min="-2.14748E9" max="2.14748E9" units="cm"/>
+          <inkml:channel name="F" type="integer" max="32767" units="dev"/>
+          <inkml:channel name="OA" type="integer" max="360" units="deg"/>
+          <inkml:channel name="OE" type="integer" max="90" units="deg"/>
+        </inkml:traceFormat>
+        <inkml:channelProperties>
+          <inkml:channelProperty channel="X" name="resolution" value="1000" units="1/cm"/>
+          <inkml:channelProperty channel="Y" name="resolution" value="1000" units="1/cm"/>
+          <inkml:channelProperty channel="F" name="resolution" value="0" units="1/dev"/>
+          <inkml:channelProperty channel="OA" name="resolution" value="1000" units="1/deg"/>
+          <inkml:channelProperty channel="OE" name="resolution" value="1000" units="1/deg"/>
+        </inkml:channelProperties>
+      </inkml:inkSource>
+      <inkml:timestamp xml:id="ts0" timeString="2026-10-04T03:50:48.873"/>
+    </inkml:context>
+    <inkml:brush xml:id="br0">
+      <inkml:brushProperty name="width" value="0.1" units="cm"/>
+      <inkml:brushProperty name="height" value="0.1" units="cm"/>
+    </inkml:brush>
+  </inkml:definitions>
+  <inkml:trace contextRef="#ctx0" brushRef="#br0">63 200 92 0 0,'0'-32'1200'0'0,"-7"4"156"0"0,0 6 140 0 0,-3 3-115 0 0,3 3-401 0 0,-4 3-316 0 0,4 1-204 0 0,0 2-160 0 0,4 4-216 0 0,-1 0-240 0 0,4-1-244 0 0,7 1-224 0 0,0 3-244 0 0,7-3-273 0 0,0-1-171 0 0,0 4 28 0 0,4 0 128 0 0,-4 3 176 0 0</inkml:trace>
+</inkml:ink>
+</file>
+
+<file path=ppt/ink/ink16.xml><?xml version="1.0" encoding="utf-8"?>
+<inkml:ink xmlns:inkml="http://www.w3.org/2003/InkML">
+  <inkml:definitions>
+    <inkml:context xml:id="ctx0">
+      <inkml:inkSource xml:id="inkSrc0">
+        <inkml:traceFormat>
+          <inkml:channel name="X" type="integer" min="-2.14748E9" max="2.14748E9" units="cm"/>
+          <inkml:channel name="Y" type="integer" min="-2.14748E9" max="2.14748E9" units="cm"/>
+          <inkml:channel name="F" type="integer" max="32767" units="dev"/>
+          <inkml:channel name="OA" type="integer" max="360" units="deg"/>
+          <inkml:channel name="OE" type="integer" max="90" units="deg"/>
+        </inkml:traceFormat>
+        <inkml:channelProperties>
+          <inkml:channelProperty channel="X" name="resolution" value="1000" units="1/cm"/>
+          <inkml:channelProperty channel="Y" name="resolution" value="1000" units="1/cm"/>
+          <inkml:channelProperty channel="F" name="resolution" value="0" units="1/dev"/>
+          <inkml:channelProperty channel="OA" name="resolution" value="1000" units="1/deg"/>
+          <inkml:channelProperty channel="OE" name="resolution" value="1000" units="1/deg"/>
+        </inkml:channelProperties>
+      </inkml:inkSource>
+      <inkml:timestamp xml:id="ts0" timeString="2026-10-04T03:50:49.445"/>
+    </inkml:context>
+    <inkml:brush xml:id="br0">
+      <inkml:brushProperty name="width" value="0.1" units="cm"/>
+      <inkml:brushProperty name="height" value="0.1" units="cm"/>
+    </inkml:brush>
+  </inkml:definitions>
+  <inkml:trace contextRef="#ctx0" brushRef="#br0">0 181 628 0 0,'8'65'1040'0'0,"-6"-41"-430"0"0,1-1 1 0 0,1 1-1 0 0,1-1 0 0 0,15 44 0 0 0,-19-65-511 0 0,-1-1 0 0 0,1 0 0 0 0,-1 1 0 0 0,1-1 0 0 0,0 0 0 0 0,0 0 0 0 0,0 0 0 0 0,-1 0 0 0 0,1 1 0 0 0,0-1 0 0 0,0 0 0 0 0,1-1 0 0 0,1 3 0 0 0,-3-3-16 0 0,0 0 0 0 0,1 0 0 0 0,-1 0 0 0 0,1 0 0 0 0,-1 0 0 0 0,1 1 0 0 0,-1-1 0 0 0,1 0-1 0 0,-1 0 1 0 0,1 0 0 0 0,-1 0 0 0 0,1-1 0 0 0,-1 1 0 0 0,1 0 0 0 0,-1 0 0 0 0,1 0 0 0 0,-1 0 0 0 0,0 0-1 0 0,1-1 1 0 0,-1 1 0 0 0,1 0 0 0 0,-1 0 0 0 0,1-1 0 0 0,-1 1 0 0 0,0 0 0 0 0,1-1 0 0 0,1-1 230 0 0,0-1 1 0 0,0 1-1 0 0,0-1 1 0 0,-1 0-1 0 0,1 0 1 0 0,-1 0-1 0 0,0 0 1 0 0,0 0 0 0 0,2-5-1 0 0,6-37 1326 0 0,6-72 0 0 0,-12 78-1890 0 0,2-1 0 0 0,18-71-1 0 0,-22 109-36 0 0,1-1 0 0 0,-1 1 0 0 0,0 0 0 0 0,1 0 0 0 0,-1 0 0 0 0,1 0 0 0 0,0 1 0 0 0,-1-1 0 0 0,1 0 0 0 0,0 1 0 0 0,0-1 0 0 0,0 1 0 0 0,0-1 0 0 0,1 1 0 0 0,-1 0 0 0 0,0 0 0 0 0,0 0 0 0 0,1 0 0 0 0,-1 1 0 0 0,1-1 0 0 0,-1 1 0 0 0,4-1 0 0 0,2 0-354 0 0,0 0 0 0 0,0 0 1 0 0,1 1-1 0 0,-1 0 1 0 0,12 2-1 0 0,-10-1 491 0 0,0 2-1 0 0,0 0 1 0 0,-1 0 0 0 0,1 0 0 0 0,-1 1 0 0 0,0 1-1 0 0,0 0 1 0 0,9 6 0 0 0,-1 1 235 0 0,-1 1 0 0 0,-1 0 1 0 0,15 16-1 0 0,-25-23-87 0 0,-1-2 280 0 0,0 0 0 0 0,0 0 0 0 0,-1 0 0 0 0,0 0 0 0 0,0 1 0 0 0,4 6 0 0 0,-6-9-134 0 0,-1-1 1 0 0,0 1-1 0 0,1-1 0 0 0,-1 1 0 0 0,0-1 0 0 0,0 0 1 0 0,0 1-1 0 0,0-1 0 0 0,0 1 0 0 0,0-1 0 0 0,0 1 0 0 0,0-1 1 0 0,-1 1-1 0 0,1-1 0 0 0,0 1 0 0 0,-1-1 0 0 0,1 0 0 0 0,-1 1 1 0 0,0-1-1 0 0,1 0 0 0 0,-1 0 0 0 0,0 1 0 0 0,0-1 1 0 0,0 0-1 0 0,0 0 0 0 0,0 0 0 0 0,0 0 0 0 0,-2 2 0 0 0,-9 8 578 0 0,1 0 0 0 0,1 1 0 0 0,0 1 0 0 0,1 0 0 0 0,1 0-1 0 0,0 1 1 0 0,-11 25 0 0 0,18-38-707 0 0,1 0 0 0 0,-1 0 0 0 0,1 0 0 0 0,-1 0 0 0 0,1 1 0 0 0,0-1 0 0 0,-1 0 0 0 0,1 0 0 0 0,0 0 0 0 0,0 0 0 0 0,0 1 0 0 0,0-1 0 0 0,1 2 0 0 0,-1-3-10 0 0,0 1 0 0 0,0-1 0 0 0,0 0 0 0 0,0 1 0 0 0,1-1-1 0 0,-1 0 1 0 0,0 0 0 0 0,0 1 0 0 0,1-1 0 0 0,-1 0 0 0 0,0 0 0 0 0,0 1 0 0 0,1-1-1 0 0,-1 0 1 0 0,0 0 0 0 0,1 0 0 0 0,-1 0 0 0 0,0 1 0 0 0,0-1 0 0 0,1 0 0 0 0,-1 0-1 0 0,0 0 1 0 0,1 0 0 0 0,-1 0 0 0 0,1 0 0 0 0,-1 0 0 0 0,0 0 0 0 0,1 0 0 0 0,2 0 5 0 0,-1-1 0 0 0,0 1 0 0 0,0-1 0 0 0,1 0 0 0 0,-1 0 0 0 0,0 0 0 0 0,0 0 0 0 0,0 0 0 0 0,0 0 0 0 0,0-1 0 0 0,0 1 1 0 0,2-2-1 0 0,86-97 1199 0 0,-90 100-1196 0 0,1 0 0 0 0,-1 0 1 0 0,0 0-1 0 0,1 0 1 0 0,-1 0-1 0 0,0 0 0 0 0,1 0 1 0 0,-1 0-1 0 0,0 0 0 0 0,1 0 1 0 0,-1 0-1 0 0,0 0 0 0 0,1 0 1 0 0,-1 0-1 0 0,0 0 0 0 0,0 0 1 0 0,1 0-1 0 0,-1 0 0 0 0,0 0 1 0 0,1 0-1 0 0,-1 0 0 0 0,0 0 1 0 0,1 1-1 0 0,-1-1 0 0 0,0 0 1 0 0,0 0-1 0 0,1 0 0 0 0,-1 1 1 0 0,0-1-1 0 0,0 0 0 0 0,0 0 1 0 0,1 1-1 0 0,-1-1 0 0 0,0 0 1 0 0,0 0-1 0 0,0 1 0 0 0,0-1 1 0 0,1 0-1 0 0,-1 1 0 0 0,0-1 1 0 0,0 0-1 0 0,0 1 0 0 0,0-1 1 0 0,0 0-1 0 0,0 1 0 0 0,6 18 100 0 0,-5-17-83 0 0,4 16-128 0 0,1 6-213 0 0,11 25 0 0 0,-14-41-405 0 0,1-1 0 0 0,-1 0 0 0 0,2 0 1 0 0,5 8-1 0 0,-8-13 265 0 0,1 0 0 0 0,-1 0 1 0 0,1 0-1 0 0,0 0 0 0 0,0-1 1 0 0,0 1-1 0 0,0-1 0 0 0,0 0 1 0 0,0 0-1 0 0,0 0 0 0 0,0 0 1 0 0,1 0-1 0 0,-1-1 0 0 0,0 1 1 0 0,0-1-1 0 0,1 0 0 0 0,-1 0 1 0 0,0 0-1 0 0,1-1 0 0 0,-1 1 1 0 0,0-1-1 0 0,0 1 0 0 0,4-2 0 0 0,13-4-951 0 0</inkml:trace>
+</inkml:ink>
+</file>
+
+<file path=ppt/ink/ink17.xml><?xml version="1.0" encoding="utf-8"?>
+<inkml:ink xmlns:inkml="http://www.w3.org/2003/InkML">
+  <inkml:definitions>
+    <inkml:context xml:id="ctx0">
+      <inkml:inkSource xml:id="inkSrc0">
+        <inkml:traceFormat>
+          <inkml:channel name="X" type="integer" min="-2.14748E9" max="2.14748E9" units="cm"/>
+          <inkml:channel name="Y" type="integer" min="-2.14748E9" max="2.14748E9" units="cm"/>
+          <inkml:channel name="F" type="integer" max="32767" units="dev"/>
+          <inkml:channel name="OA" type="integer" max="360" units="deg"/>
+          <inkml:channel name="OE" type="integer" max="90" units="deg"/>
+        </inkml:traceFormat>
+        <inkml:channelProperties>
+          <inkml:channelProperty channel="X" name="resolution" value="1000" units="1/cm"/>
+          <inkml:channelProperty channel="Y" name="resolution" value="1000" units="1/cm"/>
+          <inkml:channelProperty channel="F" name="resolution" value="0" units="1/dev"/>
+          <inkml:channelProperty channel="OA" name="resolution" value="1000" units="1/deg"/>
+          <inkml:channelProperty channel="OE" name="resolution" value="1000" units="1/deg"/>
+        </inkml:channelProperties>
+      </inkml:inkSource>
+      <inkml:timestamp xml:id="ts0" timeString="2026-10-04T03:50:49.651"/>
+    </inkml:context>
+    <inkml:brush xml:id="br0">
+      <inkml:brushProperty name="width" value="0.1" units="cm"/>
+      <inkml:brushProperty name="height" value="0.1" units="cm"/>
+    </inkml:brush>
+  </inkml:definitions>
+  <inkml:trace contextRef="#ctx0" brushRef="#br0">35 308 308 0 0,'-4'-75'3380'0'0,"-21"-125"0"0"0,20 168-2306 0 0,31 184 253 0 0,16 98-1658 0 0,-6-42-2314 0 0,-8-52-1968 0 0,-24-126 3481 0 0</inkml:trace>
+</inkml:ink>
+</file>
+
+<file path=ppt/ink/ink18.xml><?xml version="1.0" encoding="utf-8"?>
+<inkml:ink xmlns:inkml="http://www.w3.org/2003/InkML">
+  <inkml:definitions>
+    <inkml:context xml:id="ctx0">
+      <inkml:inkSource xml:id="inkSrc0">
+        <inkml:traceFormat>
+          <inkml:channel name="X" type="integer" min="-2.14748E9" max="2.14748E9" units="cm"/>
+          <inkml:channel name="Y" type="integer" min="-2.14748E9" max="2.14748E9" units="cm"/>
+          <inkml:channel name="F" type="integer" max="32767" units="dev"/>
+          <inkml:channel name="OA" type="integer" max="360" units="deg"/>
+          <inkml:channel name="OE" type="integer" max="90" units="deg"/>
+        </inkml:traceFormat>
+        <inkml:channelProperties>
+          <inkml:channelProperty channel="X" name="resolution" value="1000" units="1/cm"/>
+          <inkml:channelProperty channel="Y" name="resolution" value="1000" units="1/cm"/>
+          <inkml:channelProperty channel="F" name="resolution" value="0" units="1/dev"/>
+          <inkml:channelProperty channel="OA" name="resolution" value="1000" units="1/deg"/>
+          <inkml:channelProperty channel="OE" name="resolution" value="1000" units="1/deg"/>
+        </inkml:channelProperties>
+      </inkml:inkSource>
+      <inkml:timestamp xml:id="ts0" timeString="2026-10-04T03:50:49.844"/>
+    </inkml:context>
+    <inkml:brush xml:id="br0">
+      <inkml:brushProperty name="width" value="0.1" units="cm"/>
+      <inkml:brushProperty name="height" value="0.1" units="cm"/>
+    </inkml:brush>
+  </inkml:definitions>
+  <inkml:trace contextRef="#ctx0" brushRef="#br0">90 155 136 0 0,'-5'-2'514'0'0,"0"1"0"0"0,0-1 0 0 0,0 1 0 0 0,0 1 0 0 0,0-1 0 0 0,0 1 0 0 0,0 0 0 0 0,0 0 0 0 0,0 0 0 0 0,0 1 0 0 0,-1-1 0 0 0,1 1 0 0 0,0 0 0 0 0,1 1 0 0 0,-1-1 0 0 0,-5 3 0 0 0,54-17 3 0 0,138-100-7341 0 0,-164 100 5926 0 0,10-6-315 0 0</inkml:trace>
+</inkml:ink>
+</file>
+
+<file path=ppt/ink/ink19.xml><?xml version="1.0" encoding="utf-8"?>
+<inkml:ink xmlns:inkml="http://www.w3.org/2003/InkML">
+  <inkml:definitions>
+    <inkml:context xml:id="ctx0">
+      <inkml:inkSource xml:id="inkSrc0">
+        <inkml:traceFormat>
+          <inkml:channel name="X" type="integer" min="-2.14748E9" max="2.14748E9" units="cm"/>
+          <inkml:channel name="Y" type="integer" min="-2.14748E9" max="2.14748E9" units="cm"/>
+          <inkml:channel name="F" type="integer" max="32767" units="dev"/>
+          <inkml:channel name="OA" type="integer" max="360" units="deg"/>
+          <inkml:channel name="OE" type="integer" max="90" units="deg"/>
+        </inkml:traceFormat>
+        <inkml:channelProperties>
+          <inkml:channelProperty channel="X" name="resolution" value="1000" units="1/cm"/>
+          <inkml:channelProperty channel="Y" name="resolution" value="1000" units="1/cm"/>
+          <inkml:channelProperty channel="F" name="resolution" value="0" units="1/dev"/>
+          <inkml:channelProperty channel="OA" name="resolution" value="1000" units="1/deg"/>
+          <inkml:channelProperty channel="OE" name="resolution" value="1000" units="1/deg"/>
+        </inkml:channelProperties>
+      </inkml:inkSource>
+      <inkml:timestamp xml:id="ts0" timeString="2026-10-04T03:50:49.953"/>
+    </inkml:context>
+    <inkml:brush xml:id="br0">
+      <inkml:brushProperty name="width" value="0.1" units="cm"/>
+      <inkml:brushProperty name="height" value="0.1" units="cm"/>
+    </inkml:brush>
+  </inkml:definitions>
+  <inkml:trace contextRef="#ctx0" brushRef="#br0">1 1 192 0 0,'10'9'764'0'0,"1"7"20"0"0,-1 3-84 0 0,-3 6-116 0 0,4 0-96 0 0,-1 4-96 0 0,1 2-88 0 0,3 1-80 0 0,-4-1-64 0 0,4 1-68 0 0,0-1-92 0 0,0-2-124 0 0,0-4-144 0 0,0 0-152 0 0,0-3-204 0 0,0-3-212 0 0,-3-3-68 0 0,-4-4 36 0 0</inkml:trace>
+</inkml:ink>
+</file>
+
+<file path=ppt/ink/ink2.xml><?xml version="1.0" encoding="utf-8"?>
+<inkml:ink xmlns:inkml="http://www.w3.org/2003/InkML">
+  <inkml:definitions>
+    <inkml:context xml:id="ctx0">
+      <inkml:inkSource xml:id="inkSrc0">
+        <inkml:traceFormat>
+          <inkml:channel name="X" type="integer" min="-2.14748E9" max="2.14748E9" units="cm"/>
+          <inkml:channel name="Y" type="integer" min="-2.14748E9" max="2.14748E9" units="cm"/>
+          <inkml:channel name="F" type="integer" max="32767" units="dev"/>
+          <inkml:channel name="OA" type="integer" max="360" units="deg"/>
+          <inkml:channel name="OE" type="integer" max="90" units="deg"/>
+        </inkml:traceFormat>
+        <inkml:channelProperties>
+          <inkml:channelProperty channel="X" name="resolution" value="1000" units="1/cm"/>
+          <inkml:channelProperty channel="Y" name="resolution" value="1000" units="1/cm"/>
+          <inkml:channelProperty channel="F" name="resolution" value="0" units="1/dev"/>
+          <inkml:channelProperty channel="OA" name="resolution" value="1000" units="1/deg"/>
+          <inkml:channelProperty channel="OE" name="resolution" value="1000" units="1/deg"/>
+        </inkml:channelProperties>
+      </inkml:inkSource>
+      <inkml:timestamp xml:id="ts0" timeString="2026-10-04T03:50:44.622"/>
+    </inkml:context>
+    <inkml:brush xml:id="br0">
+      <inkml:brushProperty name="width" value="0.1" units="cm"/>
+      <inkml:brushProperty name="height" value="0.1" units="cm"/>
+    </inkml:brush>
+  </inkml:definitions>
+  <inkml:trace contextRef="#ctx0" brushRef="#br0">308 139 40 0 0,'-31'73'835'0'0,"2"0"1"0"0,-18 79-1 0 0,-26 156 115 0 0,19-70-358 0 0,-20 74 522 0 0,112-497-119 0 0,26-108-288 0 0,48-55-383 0 0,-75 256-270 0 0,80-147 1 0 0,-109 224-46 0 0,35-53-14 0 0,-39 62 23 0 0,0 1-1 0 0,0 1 1 0 0,0-1 0 0 0,1 0 0 0 0,-1 1 0 0 0,1 0-1 0 0,0 0 1 0 0,1 1 0 0 0,10-7 0 0 0,-15 10 0 0 0,1-1 1 0 0,-1 0 0 0 0,1 1 0 0 0,0-1-1 0 0,-1 1 1 0 0,1-1 0 0 0,-1 1-1 0 0,1 0 1 0 0,0 0 0 0 0,-1 0-1 0 0,1 0 1 0 0,0 0 0 0 0,-1 0 0 0 0,1 0-1 0 0,0 1 1 0 0,-1-1 0 0 0,1 0-1 0 0,-1 1 1 0 0,1-1 0 0 0,-1 1 0 0 0,3 1-1 0 0,-2 0 8 0 0,0-1 0 0 0,0 1 0 0 0,-1 0 0 0 0,1 0 0 0 0,-1-1 0 0 0,1 1 0 0 0,-1 0 0 0 0,0 0 0 0 0,0 1 0 0 0,0-1-1 0 0,0 0 1 0 0,0 0 0 0 0,0 3 0 0 0,2 7 56 0 0,-1-1-1 0 0,-1 0 0 0 0,0 1 1 0 0,-1 22-1 0 0,-2-1-28 0 0,-2 1 0 0 0,-2-1 0 0 0,-1 0-1 0 0,-1 0 1 0 0,-1-1 0 0 0,-28 61 0 0 0,24-67-345 0 0,0 0 0 0 0,-2-1 1 0 0,-1 0-1 0 0,-1-2 1 0 0,-1 0-1 0 0,-1 0 0 0 0,-1-2 1 0 0,-31 26-1 0 0,42-40-234 0 0,0 0 0 0 0,0-1 0 0 0,-16 8 0 0 0,21-12 287 0 0,-1-1-1 0 0,1 1 1 0 0,0-1-1 0 0,-1 1 1 0 0,1-1 0 0 0,-1 0-1 0 0,0-1 1 0 0,1 1-1 0 0,-1-1 1 0 0,1 0 0 0 0,-7-1-1 0 0,-10-4-816 0 0</inkml:trace>
+</inkml:ink>
+</file>
+
+<file path=ppt/ink/ink20.xml><?xml version="1.0" encoding="utf-8"?>
+<inkml:ink xmlns:inkml="http://www.w3.org/2003/InkML">
+  <inkml:definitions>
+    <inkml:context xml:id="ctx0">
+      <inkml:inkSource xml:id="inkSrc0">
+        <inkml:traceFormat>
+          <inkml:channel name="X" type="integer" min="-2.14748E9" max="2.14748E9" units="cm"/>
+          <inkml:channel name="Y" type="integer" min="-2.14748E9" max="2.14748E9" units="cm"/>
+          <inkml:channel name="F" type="integer" max="32767" units="dev"/>
+          <inkml:channel name="OA" type="integer" max="360" units="deg"/>
+          <inkml:channel name="OE" type="integer" max="90" units="deg"/>
+        </inkml:traceFormat>
+        <inkml:channelProperties>
+          <inkml:channelProperty channel="X" name="resolution" value="1000" units="1/cm"/>
+          <inkml:channelProperty channel="Y" name="resolution" value="1000" units="1/cm"/>
+          <inkml:channelProperty channel="F" name="resolution" value="0" units="1/dev"/>
+          <inkml:channelProperty channel="OA" name="resolution" value="1000" units="1/deg"/>
+          <inkml:channelProperty channel="OE" name="resolution" value="1000" units="1/deg"/>
+        </inkml:channelProperties>
+      </inkml:inkSource>
+      <inkml:timestamp xml:id="ts0" timeString="2026-10-04T03:50:50.113"/>
+    </inkml:context>
+    <inkml:brush xml:id="br0">
+      <inkml:brushProperty name="width" value="0.1" units="cm"/>
+      <inkml:brushProperty name="height" value="0.1" units="cm"/>
+    </inkml:brush>
+  </inkml:definitions>
+  <inkml:trace contextRef="#ctx0" brushRef="#br0">8 28 420 0 0,'-4'-15'584'0'0,"1"5"-216"0"0,3 7-268 0 0,3 3-512 0 0,4 3-32 0 0,0 4-64 0 0</inkml:trace>
+</inkml:ink>
+</file>
+
+<file path=ppt/ink/ink21.xml><?xml version="1.0" encoding="utf-8"?>
+<inkml:ink xmlns:inkml="http://www.w3.org/2003/InkML">
+  <inkml:definitions>
+    <inkml:context xml:id="ctx0">
+      <inkml:inkSource xml:id="inkSrc0">
+        <inkml:traceFormat>
+          <inkml:channel name="X" type="integer" min="-2.14748E9" max="2.14748E9" units="cm"/>
+          <inkml:channel name="Y" type="integer" min="-2.14748E9" max="2.14748E9" units="cm"/>
+          <inkml:channel name="F" type="integer" max="32767" units="dev"/>
+          <inkml:channel name="OA" type="integer" max="360" units="deg"/>
+          <inkml:channel name="OE" type="integer" max="90" units="deg"/>
+        </inkml:traceFormat>
+        <inkml:channelProperties>
+          <inkml:channelProperty channel="X" name="resolution" value="1000" units="1/cm"/>
+          <inkml:channelProperty channel="Y" name="resolution" value="1000" units="1/cm"/>
+          <inkml:channelProperty channel="F" name="resolution" value="0" units="1/dev"/>
+          <inkml:channelProperty channel="OA" name="resolution" value="1000" units="1/deg"/>
+          <inkml:channelProperty channel="OE" name="resolution" value="1000" units="1/deg"/>
+        </inkml:channelProperties>
+      </inkml:inkSource>
+      <inkml:timestamp xml:id="ts0" timeString="2026-10-04T03:50:50.412"/>
+    </inkml:context>
+    <inkml:brush xml:id="br0">
+      <inkml:brushProperty name="width" value="0.1" units="cm"/>
+      <inkml:brushProperty name="height" value="0.1" units="cm"/>
+    </inkml:brush>
+  </inkml:definitions>
+  <inkml:trace contextRef="#ctx0" brushRef="#br0">164 0 144 0 0,'-45'118'3804'0'0,"28"-78"-1440"0"0,-22 79-1 0 0,37-113-2182 0 0,-7 48 928 0 0,8-51-1073 0 0,1 0 1 0 0,0 1-1 0 0,0-1 0 0 0,0 0 0 0 0,1 0 1 0 0,-1 0-1 0 0,1 0 0 0 0,-1 0 0 0 0,1 0 1 0 0,0 0-1 0 0,0 0 0 0 0,1 0 0 0 0,-1 0 1 0 0,3 3-1 0 0,-3-5-32 0 0,0 0-1 0 0,-1 0 1 0 0,1 0-1 0 0,0 0 1 0 0,0 0 0 0 0,-1-1-1 0 0,1 1 1 0 0,0 0-1 0 0,0-1 1 0 0,0 1 0 0 0,0-1-1 0 0,0 1 1 0 0,0-1-1 0 0,0 1 1 0 0,0-1 0 0 0,0 0-1 0 0,0 1 1 0 0,0-1-1 0 0,0 0 1 0 0,0 0 0 0 0,1 0-1 0 0,-1 0 1 0 0,0 0-1 0 0,0 0 1 0 0,1 0 0 0 0,0-1-1 0 0,1 0 1 0 0,-1 0-1 0 0,0 0 1 0 0,0 0-1 0 0,0 0 0 0 0,0 0 1 0 0,0-1-1 0 0,0 1 1 0 0,0-1-1 0 0,0 1 1 0 0,1-3-1 0 0,3-2 12 0 0,-1 0-1 0 0,0-1 1 0 0,-1 0-1 0 0,1 0 1 0 0,5-13-1 0 0,-8 14 32 0 0,1-1 0 0 0,-1 1 1 0 0,0-1-1 0 0,-1 0 0 0 0,0 1 0 0 0,0-1 0 0 0,0 0 1 0 0,-1 0-1 0 0,0 0 0 0 0,0 0 0 0 0,-1 0 0 0 0,1 1 1 0 0,-2-1-1 0 0,1 0 0 0 0,-1 0 0 0 0,0 1 0 0 0,0-1 1 0 0,-1 1-1 0 0,0 0 0 0 0,0 0 0 0 0,0 0 0 0 0,-1 0 1 0 0,0 0-1 0 0,0 1 0 0 0,0-1 0 0 0,-1 1 0 0 0,0 0 1 0 0,0 1-1 0 0,0-1 0 0 0,-1 1 0 0 0,1 0 0 0 0,-1 0 1 0 0,-12-5-1 0 0,-24-8-3221 0 0,15 12-3120 0 0</inkml:trace>
+</inkml:ink>
+</file>
+
+<file path=ppt/ink/ink22.xml><?xml version="1.0" encoding="utf-8"?>
+<inkml:ink xmlns:inkml="http://www.w3.org/2003/InkML">
+  <inkml:definitions>
+    <inkml:context xml:id="ctx0">
+      <inkml:inkSource xml:id="inkSrc0">
+        <inkml:traceFormat>
+          <inkml:channel name="X" type="integer" min="-2.14748E9" max="2.14748E9" units="cm"/>
+          <inkml:channel name="Y" type="integer" min="-2.14748E9" max="2.14748E9" units="cm"/>
+          <inkml:channel name="F" type="integer" max="32767" units="dev"/>
+          <inkml:channel name="OA" type="integer" max="360" units="deg"/>
+          <inkml:channel name="OE" type="integer" max="90" units="deg"/>
+        </inkml:traceFormat>
+        <inkml:channelProperties>
+          <inkml:channelProperty channel="X" name="resolution" value="1000" units="1/cm"/>
+          <inkml:channelProperty channel="Y" name="resolution" value="1000" units="1/cm"/>
+          <inkml:channelProperty channel="F" name="resolution" value="0" units="1/dev"/>
+          <inkml:channelProperty channel="OA" name="resolution" value="1000" units="1/deg"/>
+          <inkml:channelProperty channel="OE" name="resolution" value="1000" units="1/deg"/>
+        </inkml:channelProperties>
+      </inkml:inkSource>
+      <inkml:timestamp xml:id="ts0" timeString="2026-10-04T03:50:50.776"/>
+    </inkml:context>
+    <inkml:brush xml:id="br0">
+      <inkml:brushProperty name="width" value="0.1" units="cm"/>
+      <inkml:brushProperty name="height" value="0.1" units="cm"/>
+    </inkml:brush>
+  </inkml:definitions>
+  <inkml:trace contextRef="#ctx0" brushRef="#br0">11 1 700 0 0,'0'0'133'0'0,"-1"0"-1"0"0,1 0 1 0 0,-1 0 0 0 0,1 0-1 0 0,-1 1 1 0 0,1-1-1 0 0,-1 0 1 0 0,1 1 0 0 0,-1-1-1 0 0,1 0 1 0 0,-1 1 0 0 0,1-1-1 0 0,-1 0 1 0 0,1 1-1 0 0,0-1 1 0 0,-1 1 0 0 0,1-1-1 0 0,0 1 1 0 0,-1-1 0 0 0,1 1-1 0 0,0-1 1 0 0,0 1-1 0 0,-1-1 1 0 0,1 1 0 0 0,0-1-1 0 0,0 1 1 0 0,0 0 0 0 0,0-1-1 0 0,0 1 1 0 0,0-1-1 0 0,0 1 1 0 0,0-1 0 0 0,0 1-1 0 0,0 0 1 0 0,0-1 0 0 0,0 1-1 0 0,0-1 1 0 0,0 1-1 0 0,1 0 1 0 0,7 32 1170 0 0,-6-24-580 0 0,11 33 938 0 0,1-1 1 0 0,25 49-1 0 0,-36-83-1621 0 0,0 0 0 0 0,1 0 0 0 0,0-1 0 0 0,0 1 0 0 0,0-1 0 0 0,1 0 0 0 0,0 0 0 0 0,0 0 0 0 0,0-1 0 0 0,9 7 0 0 0,-13-12-26 0 0,0 1 1 0 0,1-1 0 0 0,-1 0 0 0 0,0 1 0 0 0,1-1 0 0 0,-1 0 0 0 0,0 1 0 0 0,1-1 0 0 0,-1 0 0 0 0,0 0-1 0 0,1 0 1 0 0,-1 0 0 0 0,1-1 0 0 0,-1 1 0 0 0,0 0 0 0 0,1-1 0 0 0,-1 1 0 0 0,0 0 0 0 0,0-1 0 0 0,1 1-1 0 0,-1-1 1 0 0,0 0 0 0 0,0 0 0 0 0,0 1 0 0 0,0-1 0 0 0,0 0 0 0 0,0 0 0 0 0,0 0 0 0 0,0 0 0 0 0,0 0-1 0 0,0 0 1 0 0,0 0 0 0 0,0-2 0 0 0,4-4 115 0 0,0 0 0 0 0,0 0 0 0 0,5-13 0 0 0,-9 19-121 0 0,14-36 390 0 0,-11 25-255 0 0,1 0-1 0 0,0 0 1 0 0,8-12 0 0 0,-12 23-136 0 0,-1 0 0 0 0,1 1-1 0 0,-1-1 1 0 0,1 0 0 0 0,0 1 0 0 0,-1-1-1 0 0,1 1 1 0 0,0-1 0 0 0,-1 1-1 0 0,1-1 1 0 0,0 1 0 0 0,0-1 0 0 0,-1 1-1 0 0,1 0 1 0 0,0 0 0 0 0,0-1 0 0 0,0 1-1 0 0,-1 0 1 0 0,1 0 0 0 0,0 0 0 0 0,0 0-1 0 0,0 0 1 0 0,0 0 0 0 0,0 0-1 0 0,-1 0 1 0 0,1 0 0 0 0,0 0 0 0 0,0 0-1 0 0,0 1 1 0 0,0-1 0 0 0,-1 0 0 0 0,1 1-1 0 0,0-1 1 0 0,0 0 0 0 0,-1 1 0 0 0,1-1-1 0 0,0 1 1 0 0,0 0 0 0 0,29 27 104 0 0,-23-21-83 0 0,5 5-14 0 0,2-1 0 0 0,-1 0 0 0 0,1-1 0 0 0,1 0 0 0 0,24 11 0 0 0,-5-5-552 0 0,55 16 0 0 0,-56-23-879 0 0,-21-6 176 0 0,0 0-1 0 0,-1 1 1 0 0,1 0-1 0 0,-1 1 1 0 0,0 0-1 0 0,0 0 1 0 0,0 2-1 0 0,12 8 1 0 0,-12-3-567 0 0</inkml:trace>
+</inkml:ink>
+</file>
+
+<file path=ppt/ink/ink23.xml><?xml version="1.0" encoding="utf-8"?>
+<inkml:ink xmlns:inkml="http://www.w3.org/2003/InkML">
+  <inkml:definitions>
+    <inkml:context xml:id="ctx0">
+      <inkml:inkSource xml:id="inkSrc0">
+        <inkml:traceFormat>
+          <inkml:channel name="X" type="integer" min="-2.14748E9" max="2.14748E9" units="cm"/>
+          <inkml:channel name="Y" type="integer" min="-2.14748E9" max="2.14748E9" units="cm"/>
+          <inkml:channel name="F" type="integer" max="32767" units="dev"/>
+          <inkml:channel name="OA" type="integer" max="360" units="deg"/>
+          <inkml:channel name="OE" type="integer" max="90" units="deg"/>
+        </inkml:traceFormat>
+        <inkml:channelProperties>
+          <inkml:channelProperty channel="X" name="resolution" value="1000" units="1/cm"/>
+          <inkml:channelProperty channel="Y" name="resolution" value="1000" units="1/cm"/>
+          <inkml:channelProperty channel="F" name="resolution" value="0" units="1/dev"/>
+          <inkml:channelProperty channel="OA" name="resolution" value="1000" units="1/deg"/>
+          <inkml:channelProperty channel="OE" name="resolution" value="1000" units="1/deg"/>
+        </inkml:channelProperties>
+      </inkml:inkSource>
+      <inkml:timestamp xml:id="ts0" timeString="2026-10-04T03:51:00.860"/>
+    </inkml:context>
+    <inkml:brush xml:id="br0">
+      <inkml:brushProperty name="width" value="0.1" units="cm"/>
+      <inkml:brushProperty name="height" value="0.1" units="cm"/>
+    </inkml:brush>
+  </inkml:definitions>
+  <inkml:trace contextRef="#ctx0" brushRef="#br0">214 0 184 0 0,'-1'0'168'0'0,"0"1"1"0"0,1-1-1 0 0,-1 1 0 0 0,1-1 1 0 0,-1 1-1 0 0,1-1 0 0 0,-1 1 1 0 0,1-1-1 0 0,-1 1 0 0 0,1-1 1 0 0,0 1-1 0 0,-1-1 0 0 0,1 1 1 0 0,0 0-1 0 0,-1-1 1 0 0,1 1-1 0 0,0 0 0 0 0,0-1 1 0 0,0 1-1 0 0,-1 0 0 0 0,1-1 1 0 0,0 1-1 0 0,0 0 0 0 0,0 1 1 0 0,-3 28 2051 0 0,1-9-470 0 0,1-9-1210 0 0,0 0-1 0 0,0 1 0 0 0,2 20 0 0 0,1-2-137 0 0,7 260 903 0 0,-1-126-1259 0 0,-3-61-39 0 0,1 59-171 0 0,-6-157 101 0 0,0-1-1 0 0,-1 0 1 0 0,1 1 0 0 0,-1-1 0 0 0,0 0 0 0 0,-3 6-1 0 0,4-10 43 0 0,0 0-1 0 0,0 0 0 0 0,-1 0 0 0 0,1 0 0 0 0,-1 0 1 0 0,1 0-1 0 0,-1-1 0 0 0,1 1 0 0 0,-1 0 0 0 0,0 0 1 0 0,1 0-1 0 0,-1-1 0 0 0,0 1 0 0 0,0 0 0 0 0,1-1 1 0 0,-1 1-1 0 0,0-1 0 0 0,0 1 0 0 0,0-1 0 0 0,0 1 1 0 0,0-1-1 0 0,0 0 0 0 0,0 1 0 0 0,0-1 1 0 0,1 0-1 0 0,-1 0 0 0 0,0 0 0 0 0,0 0 0 0 0,0 0 1 0 0,0 0-1 0 0,0 0 0 0 0,0 0 0 0 0,0 0 0 0 0,0 0 1 0 0,0 0-1 0 0,0-1 0 0 0,0 1 0 0 0,0 0 0 0 0,-1-1 1 0 0,-10-5-30 0 0,2 0 0 0 0,-1-1 0 0 0,1 0 0 0 0,0-1 1 0 0,1 0-1 0 0,0-1 0 0 0,0 1 0 0 0,0-2 0 0 0,-10-15 1 0 0,-20-19 34 0 0,26 27 15 0 0,11 14-1 0 0,0 0 0 0 0,0 1-1 0 0,0-1 1 0 0,0 0-1 0 0,0 1 1 0 0,-1-1 0 0 0,1 1-1 0 0,-1 0 1 0 0,-3-2 0 0 0,6 4 1 0 0,0 0 1 0 0,0 0-1 0 0,0 0 1 0 0,-1 0-1 0 0,1 0 1 0 0,0 0-1 0 0,0 1 1 0 0,0-1-1 0 0,0 0 1 0 0,-1 0-1 0 0,1 0 1 0 0,0 0-1 0 0,0 1 1 0 0,0-1-1 0 0,0 0 1 0 0,0 0-1 0 0,0 0 1 0 0,0 0-1 0 0,-1 1 1 0 0,1-1-1 0 0,0 0 1 0 0,0 0 0 0 0,0 0-1 0 0,0 1 1 0 0,0-1-1 0 0,0 0 1 0 0,0 0-1 0 0,0 0 1 0 0,0 1-1 0 0,0-1 1 0 0,0 0-1 0 0,0 0 1 0 0,0 0-1 0 0,0 1 1 0 0,0-1-1 0 0,0 0 1 0 0,1 0-1 0 0,-1 0 1 0 0,0 1-1 0 0,0-1 1 0 0,0 0-1 0 0,0 0 1 0 0,0 0-1 0 0,0 0 1 0 0,1 1-1 0 0,3 15-1 0 0,-3-12 2 0 0,1 5 0 0 0,1 1 1 0 0,0-1-1 0 0,1-1 0 0 0,0 1 1 0 0,0 0-1 0 0,1-1 0 0 0,0 0 1 0 0,0 0-1 0 0,1-1 0 0 0,0 1 1 0 0,0-1-1 0 0,1 0 0 0 0,0-1 1 0 0,12 9-1 0 0,-14-11 1 0 0,1 0-1 0 0,0-1 1 0 0,0 0 0 0 0,0 0-1 0 0,1-1 1 0 0,-1 0 0 0 0,1 0 0 0 0,-1 0-1 0 0,1-1 1 0 0,0 0 0 0 0,-1 0-1 0 0,1-1 1 0 0,0 0 0 0 0,0 0-1 0 0,0 0 1 0 0,-1-1 0 0 0,1 0-1 0 0,0-1 1 0 0,-1 1 0 0 0,1-1-1 0 0,6-3 1 0 0,14-7-756 0 0,0-1 0 0 0,0-2 0 0 0,-1 0 0 0 0,-1-2 0 0 0,28-24 0 0 0,-47 36 114 0 0,0-1 1 0 0,-1 0-1 0 0,1 0 0 0 0,6-11 1 0 0,2-3-764 0 0</inkml:trace>
+</inkml:ink>
+</file>
+
+<file path=ppt/ink/ink24.xml><?xml version="1.0" encoding="utf-8"?>
+<inkml:ink xmlns:inkml="http://www.w3.org/2003/InkML">
+  <inkml:definitions>
+    <inkml:context xml:id="ctx0">
+      <inkml:inkSource xml:id="inkSrc0">
+        <inkml:traceFormat>
+          <inkml:channel name="X" type="integer" min="-2.14748E9" max="2.14748E9" units="cm"/>
+          <inkml:channel name="Y" type="integer" min="-2.14748E9" max="2.14748E9" units="cm"/>
+          <inkml:channel name="F" type="integer" max="32767" units="dev"/>
+          <inkml:channel name="OA" type="integer" max="360" units="deg"/>
+          <inkml:channel name="OE" type="integer" max="90" units="deg"/>
+        </inkml:traceFormat>
+        <inkml:channelProperties>
+          <inkml:channelProperty channel="X" name="resolution" value="1000" units="1/cm"/>
+          <inkml:channelProperty channel="Y" name="resolution" value="1000" units="1/cm"/>
+          <inkml:channelProperty channel="F" name="resolution" value="0" units="1/dev"/>
+          <inkml:channelProperty channel="OA" name="resolution" value="1000" units="1/deg"/>
+          <inkml:channelProperty channel="OE" name="resolution" value="1000" units="1/deg"/>
+        </inkml:channelProperties>
+      </inkml:inkSource>
+      <inkml:timestamp xml:id="ts0" timeString="2026-10-04T03:51:01.319"/>
+    </inkml:context>
+    <inkml:brush xml:id="br0">
+      <inkml:brushProperty name="width" value="0.1" units="cm"/>
+      <inkml:brushProperty name="height" value="0.1" units="cm"/>
+    </inkml:brush>
+  </inkml:definitions>
+  <inkml:trace contextRef="#ctx0" brushRef="#br0">74 70 44 0 0,'4'-69'4069'0'0,"-15"107"-2635"0"0,-6 162-522 0 0,13-120-861 0 0,-1 69-296 0 0,4-81-1529 0 0,-2-1 0 0 0,-24 127 0 0 0,17-158 927 0 0</inkml:trace>
+</inkml:ink>
+</file>
+
+<file path=ppt/ink/ink25.xml><?xml version="1.0" encoding="utf-8"?>
+<inkml:ink xmlns:inkml="http://www.w3.org/2003/InkML">
+  <inkml:definitions>
+    <inkml:context xml:id="ctx0">
+      <inkml:inkSource xml:id="inkSrc0">
+        <inkml:traceFormat>
+          <inkml:channel name="X" type="integer" min="-2.14748E9" max="2.14748E9" units="cm"/>
+          <inkml:channel name="Y" type="integer" min="-2.14748E9" max="2.14748E9" units="cm"/>
+          <inkml:channel name="F" type="integer" max="32767" units="dev"/>
+          <inkml:channel name="OA" type="integer" max="360" units="deg"/>
+          <inkml:channel name="OE" type="integer" max="90" units="deg"/>
+        </inkml:traceFormat>
+        <inkml:channelProperties>
+          <inkml:channelProperty channel="X" name="resolution" value="1000" units="1/cm"/>
+          <inkml:channelProperty channel="Y" name="resolution" value="1000" units="1/cm"/>
+          <inkml:channelProperty channel="F" name="resolution" value="0" units="1/dev"/>
+          <inkml:channelProperty channel="OA" name="resolution" value="1000" units="1/deg"/>
+          <inkml:channelProperty channel="OE" name="resolution" value="1000" units="1/deg"/>
+        </inkml:channelProperties>
+      </inkml:inkSource>
+      <inkml:timestamp xml:id="ts0" timeString="2026-10-04T03:51:01.541"/>
+    </inkml:context>
+    <inkml:brush xml:id="br0">
+      <inkml:brushProperty name="width" value="0.1" units="cm"/>
+      <inkml:brushProperty name="height" value="0.1" units="cm"/>
+    </inkml:brush>
+  </inkml:definitions>
+  <inkml:trace contextRef="#ctx0" brushRef="#br0">4 146 200 0 0,'-2'-37'1120'0'0,"1"26"-567"0"0,1 0 0 0 0,-1 0 0 0 0,2-1 0 0 0,2-16 0 0 0,-3 27-518 0 0,1-1 0 0 0,0 1-1 0 0,-1 0 1 0 0,1-1 0 0 0,0 1 0 0 0,0 0-1 0 0,0 0 1 0 0,0 0 0 0 0,0 0 0 0 0,0 0-1 0 0,0 0 1 0 0,0 0 0 0 0,0 0 0 0 0,0 0-1 0 0,1 1 1 0 0,-1-1 0 0 0,0 0 0 0 0,1 1-1 0 0,-1-1 1 0 0,0 1 0 0 0,1-1 0 0 0,-1 1-1 0 0,3-1 1 0 0,41-3-112 0 0,-33 4 18 0 0,128-9-3095 0 0,-109 9 2229 0 0</inkml:trace>
+</inkml:ink>
+</file>
+
+<file path=ppt/ink/ink26.xml><?xml version="1.0" encoding="utf-8"?>
+<inkml:ink xmlns:inkml="http://www.w3.org/2003/InkML">
+  <inkml:definitions>
+    <inkml:context xml:id="ctx0">
+      <inkml:inkSource xml:id="inkSrc0">
+        <inkml:traceFormat>
+          <inkml:channel name="X" type="integer" min="-2.14748E9" max="2.14748E9" units="cm"/>
+          <inkml:channel name="Y" type="integer" min="-2.14748E9" max="2.14748E9" units="cm"/>
+          <inkml:channel name="F" type="integer" max="32767" units="dev"/>
+          <inkml:channel name="OA" type="integer" max="360" units="deg"/>
+          <inkml:channel name="OE" type="integer" max="90" units="deg"/>
+        </inkml:traceFormat>
+        <inkml:channelProperties>
+          <inkml:channelProperty channel="X" name="resolution" value="1000" units="1/cm"/>
+          <inkml:channelProperty channel="Y" name="resolution" value="1000" units="1/cm"/>
+          <inkml:channelProperty channel="F" name="resolution" value="0" units="1/dev"/>
+          <inkml:channelProperty channel="OA" name="resolution" value="1000" units="1/deg"/>
+          <inkml:channelProperty channel="OE" name="resolution" value="1000" units="1/deg"/>
+        </inkml:channelProperties>
+      </inkml:inkSource>
+      <inkml:timestamp xml:id="ts0" timeString="2026-10-04T03:51:01.918"/>
+    </inkml:context>
+    <inkml:brush xml:id="br0">
+      <inkml:brushProperty name="width" value="0.1" units="cm"/>
+      <inkml:brushProperty name="height" value="0.1" units="cm"/>
+    </inkml:brush>
+  </inkml:definitions>
+  <inkml:trace contextRef="#ctx0" brushRef="#br0">57 102 60 0 0,'29'-2'3045'0'0,"-24"1"-3038"0"0,-1-1-1 0 0,1 1 0 0 0,-1-1 0 0 0,0 0 0 0 0,1 0 1 0 0,-1 0-1 0 0,0 0 0 0 0,0-1 0 0 0,-1 0 0 0 0,1 0 0 0 0,4-4 1 0 0,-6 6 41 0 0,0-1 0 0 0,-1 1 0 0 0,1-1 0 0 0,-1 1 0 0 0,1-1 0 0 0,-1 0 0 0 0,0 1 0 0 0,0-1 0 0 0,0 0 0 0 0,0 0 0 0 0,0 0 0 0 0,0 0 1 0 0,0 0-1 0 0,-1 0 0 0 0,1 0 0 0 0,-1 0 0 0 0,0 0 0 0 0,1 0 0 0 0,-1 0 0 0 0,0-1 0 0 0,0 1 0 0 0,0-2 0 0 0,-1 2 63 0 0,0 1 1 0 0,1-1-1 0 0,-1 1 0 0 0,0 0 0 0 0,0-1 1 0 0,0 1-1 0 0,0 0 0 0 0,0 0 0 0 0,0-1 1 0 0,0 1-1 0 0,0 0 0 0 0,0 0 0 0 0,0 0 1 0 0,-1 0-1 0 0,1 1 0 0 0,-1-1 1 0 0,1 0-1 0 0,0 0 0 0 0,-1 1 0 0 0,1-1 1 0 0,-1 1-1 0 0,1 0 0 0 0,-1-1 0 0 0,1 1 1 0 0,-1 0-1 0 0,0 0 0 0 0,1 0 0 0 0,-1 0 1 0 0,1 0-1 0 0,-3 0 0 0 0,0 0 3 0 0,-1 0 0 0 0,1 1 1 0 0,0-1-1 0 0,-1 1 0 0 0,1 0 0 0 0,0 0 1 0 0,-1 1-1 0 0,1-1 0 0 0,0 1 0 0 0,0 0 0 0 0,0 0 1 0 0,0 0-1 0 0,1 1 0 0 0,-1-1 0 0 0,1 1 0 0 0,-1 0 1 0 0,1 0-1 0 0,0 0 0 0 0,0 0 0 0 0,0 1 1 0 0,0-1-1 0 0,1 1 0 0 0,-1 0 0 0 0,1-1 0 0 0,0 1 1 0 0,0 0-1 0 0,1 1 0 0 0,-2 3 0 0 0,-2 8-95 0 0,1 1 0 0 0,0 0 1 0 0,1 0-1 0 0,1-1 0 0 0,1 35 0 0 0,1-46-18 0 0,0-1 1 0 0,0 0-1 0 0,1 1 0 0 0,-1-1 1 0 0,1 0-1 0 0,0 1 0 0 0,1-1 1 0 0,-1 0-1 0 0,1 0 0 0 0,0 0 1 0 0,-1 0-1 0 0,2 0 0 0 0,3 5 1 0 0,-5-8-29 0 0,1 1 0 0 0,-1 0 0 0 0,1-1 0 0 0,0 1 0 0 0,0-1 0 0 0,0 0 0 0 0,0 0 1 0 0,0 0-1 0 0,0 0 0 0 0,0 0 0 0 0,0 0 0 0 0,0 0 0 0 0,0 0 0 0 0,1-1 0 0 0,-1 1 1 0 0,0-1-1 0 0,1 0 0 0 0,-1 0 0 0 0,0 0 0 0 0,1 0 0 0 0,-1 0 0 0 0,0 0 0 0 0,0-1 0 0 0,1 1 1 0 0,-1-1-1 0 0,0 1 0 0 0,3-2 0 0 0,8-4-680 0 0,0-1 0 0 0,-1 0-1 0 0,0 0 1 0 0,0-2 0 0 0,-1 1 0 0 0,0-1 0 0 0,13-14 0 0 0,17-13-2613 0 0,-29 26 2234 0 0</inkml:trace>
+</inkml:ink>
+</file>
+
+<file path=ppt/ink/ink27.xml><?xml version="1.0" encoding="utf-8"?>
+<inkml:ink xmlns:inkml="http://www.w3.org/2003/InkML">
+  <inkml:definitions>
+    <inkml:context xml:id="ctx0">
+      <inkml:inkSource xml:id="inkSrc0">
+        <inkml:traceFormat>
+          <inkml:channel name="X" type="integer" min="-2.14748E9" max="2.14748E9" units="cm"/>
+          <inkml:channel name="Y" type="integer" min="-2.14748E9" max="2.14748E9" units="cm"/>
+          <inkml:channel name="F" type="integer" max="32767" units="dev"/>
+          <inkml:channel name="OA" type="integer" max="360" units="deg"/>
+          <inkml:channel name="OE" type="integer" max="90" units="deg"/>
+        </inkml:traceFormat>
+        <inkml:channelProperties>
+          <inkml:channelProperty channel="X" name="resolution" value="1000" units="1/cm"/>
+          <inkml:channelProperty channel="Y" name="resolution" value="1000" units="1/cm"/>
+          <inkml:channelProperty channel="F" name="resolution" value="0" units="1/dev"/>
+          <inkml:channelProperty channel="OA" name="resolution" value="1000" units="1/deg"/>
+          <inkml:channelProperty channel="OE" name="resolution" value="1000" units="1/deg"/>
+        </inkml:channelProperties>
+      </inkml:inkSource>
+      <inkml:timestamp xml:id="ts0" timeString="2026-10-04T03:51:02.377"/>
+    </inkml:context>
+    <inkml:brush xml:id="br0">
+      <inkml:brushProperty name="width" value="0.1" units="cm"/>
+      <inkml:brushProperty name="height" value="0.1" units="cm"/>
+    </inkml:brush>
+  </inkml:definitions>
+  <inkml:trace contextRef="#ctx0" brushRef="#br0">0 6 364 0 0,'0'0'465'0'0,"11"11"1418"0"0,-3 16-1142 0 0,-1 1 1 0 0,6 54-1 0 0,-3-15 94 0 0,1 14 1375 0 0,-11-81-2191 0 0,0 0 0 0 0,1 1-1 0 0,-1-1 1 0 0,0 0 0 0 0,0 0-1 0 0,0 1 1 0 0,0-1 0 0 0,0 0-1 0 0,0 1 1 0 0,0-1 0 0 0,1 0-1 0 0,-1 0 1 0 0,0 0 0 0 0,0 1-1 0 0,0-1 1 0 0,1 0 0 0 0,-1 0 0 0 0,0 0-1 0 0,0 1 1 0 0,1-1 0 0 0,-1 0-1 0 0,0 0 1 0 0,0 0 0 0 0,1 0-1 0 0,-1 0 1 0 0,0 0 0 0 0,0 1-1 0 0,1-1 1 0 0,-1 0 0 0 0,0 0-1 0 0,1 0 1 0 0,-1 0 0 0 0,0 0-1 0 0,1 0 1 0 0,-1 0 0 0 0,0 0-1 0 0,0 0 1 0 0,1 0 0 0 0,-1-1-1 0 0,0 1 1 0 0,1 0 0 0 0,-1 0-1 0 0,0 0 1 0 0,0 0 0 0 0,1 0-1 0 0,-1 0 1 0 0,0-1 0 0 0,0 1-1 0 0,1 0 1 0 0,-1 0 0 0 0,0 0-1 0 0,0-1 1 0 0,0 1 0 0 0,1 0-1 0 0,-1 0 1 0 0,0 0 0 0 0,0-1-1 0 0,14-15 652 0 0,-13 14-606 0 0,53-76 1639 0 0,22-29-1273 0 0,-61 89-1768 0 0,28-27 1 0 0,-38 41 627 0 0,0 0 0 0 0,0 1 0 0 0,0-1 0 0 0,1 1 0 0 0,-1 0 1 0 0,1 0-1 0 0,-1 0 0 0 0,1 1 0 0 0,0 0 0 0 0,8-2 0 0 0,0 1-477 0 0</inkml:trace>
+</inkml:ink>
+</file>
+
+<file path=ppt/ink/ink28.xml><?xml version="1.0" encoding="utf-8"?>
+<inkml:ink xmlns:inkml="http://www.w3.org/2003/InkML">
+  <inkml:definitions>
+    <inkml:context xml:id="ctx0">
+      <inkml:inkSource xml:id="inkSrc0">
+        <inkml:traceFormat>
+          <inkml:channel name="X" type="integer" min="-2.14748E9" max="2.14748E9" units="cm"/>
+          <inkml:channel name="Y" type="integer" min="-2.14748E9" max="2.14748E9" units="cm"/>
+          <inkml:channel name="F" type="integer" max="32767" units="dev"/>
+          <inkml:channel name="OA" type="integer" max="360" units="deg"/>
+          <inkml:channel name="OE" type="integer" max="90" units="deg"/>
+        </inkml:traceFormat>
+        <inkml:channelProperties>
+          <inkml:channelProperty channel="X" name="resolution" value="1000" units="1/cm"/>
+          <inkml:channelProperty channel="Y" name="resolution" value="1000" units="1/cm"/>
+          <inkml:channelProperty channel="F" name="resolution" value="0" units="1/dev"/>
+          <inkml:channelProperty channel="OA" name="resolution" value="1000" units="1/deg"/>
+          <inkml:channelProperty channel="OE" name="resolution" value="1000" units="1/deg"/>
+        </inkml:channelProperties>
+      </inkml:inkSource>
+      <inkml:timestamp xml:id="ts0" timeString="2026-10-04T03:51:02.838"/>
+    </inkml:context>
+    <inkml:brush xml:id="br0">
+      <inkml:brushProperty name="width" value="0.1" units="cm"/>
+      <inkml:brushProperty name="height" value="0.1" units="cm"/>
+    </inkml:brush>
+  </inkml:definitions>
+  <inkml:trace contextRef="#ctx0" brushRef="#br0">0 106 248 0 0,'3'7'687'0'0,"-1"2"-1"0"0,-1-1 1 0 0,2 12-1 0 0,-2-12-13 0 0,0 0-1 0 0,0 0 0 0 0,4 11 0 0 0,-5-18-632 0 0,1-1 0 0 0,-1 0 0 0 0,0 1 0 0 0,0-1 0 0 0,1 0 0 0 0,-1 0 0 0 0,0 1 0 0 0,1-1 0 0 0,-1 0 0 0 0,0 0 0 0 0,1 1 0 0 0,-1-1 0 0 0,1 0 0 0 0,-1 0-1 0 0,0 0 1 0 0,1 0 0 0 0,-1 0 0 0 0,1 0 0 0 0,-1 0 0 0 0,0 1 0 0 0,1-1 0 0 0,-1 0 0 0 0,1 0 0 0 0,-1 0 0 0 0,0-1 0 0 0,1 1 0 0 0,-1 0 0 0 0,1 0 0 0 0,-1 0 0 0 0,0 0 0 0 0,1 0 0 0 0,-1 0 0 0 0,1-1 0 0 0,-1 1 0 0 0,0 0 0 0 0,1 0-1 0 0,-1-1 1 0 0,0 1 0 0 0,1 0 0 0 0,-1 0 0 0 0,0-1 0 0 0,0 1 0 0 0,1 0 0 0 0,-1-1 0 0 0,0 1 0 0 0,0 0 0 0 0,1-1 0 0 0,17-18 730 0 0,-17 17-654 0 0,11-13 247 0 0,-1-1-1 0 0,-1-1 1 0 0,14-27-1 0 0,-14 24 856 0 0,24-37-1 0 0,-34 57-1199 0 0,0 0 0 0 0,1 0 0 0 0,-1 0-1 0 0,0-1 1 0 0,0 1 0 0 0,0 0 0 0 0,0 0 0 0 0,0 0 0 0 0,0 0 0 0 0,0 0 0 0 0,0 0 0 0 0,1 0 0 0 0,-1 0 0 0 0,0 0-1 0 0,0 0 1 0 0,0 0 0 0 0,0 0 0 0 0,0 0 0 0 0,0-1 0 0 0,1 1 0 0 0,-1 0 0 0 0,0 0 0 0 0,0 0 0 0 0,0 0 0 0 0,0 0-1 0 0,0 0 1 0 0,0 0 0 0 0,1 0 0 0 0,-1 0 0 0 0,0 1 0 0 0,0-1 0 0 0,0 0 0 0 0,0 0 0 0 0,0 0 0 0 0,0 0 0 0 0,1 0-1 0 0,-1 0 1 0 0,0 0 0 0 0,0 0 0 0 0,0 0 0 0 0,0 0 0 0 0,0 0 0 0 0,0 0 0 0 0,0 0 0 0 0,0 1 0 0 0,1-1 0 0 0,4 9 277 0 0,4 19-353 0 0,-8-22 130 0 0,0-3-78 0 0,0-1 1 0 0,-1 0 0 0 0,1 1 0 0 0,0-1 0 0 0,0 0 0 0 0,1 0-1 0 0,-1 0 1 0 0,0 0 0 0 0,1 0 0 0 0,-1 0 0 0 0,1 0 0 0 0,0 0-1 0 0,-1 0 1 0 0,1-1 0 0 0,0 1 0 0 0,0-1 0 0 0,0 1-1 0 0,0-1 1 0 0,1 0 0 0 0,-1 0 0 0 0,0 0 0 0 0,0 0 0 0 0,1 0-1 0 0,-1 0 1 0 0,0-1 0 0 0,1 1 0 0 0,-1-1 0 0 0,1 0 0 0 0,-1 0-1 0 0,1 0 1 0 0,-1 0 0 0 0,1 0 0 0 0,-1 0 0 0 0,1 0 0 0 0,2-2-1 0 0,4 0-4 0 0,0-1-1 0 0,0 0 1 0 0,0 0-1 0 0,0-1 1 0 0,-1 0 0 0 0,1-1-1 0 0,12-9 1 0 0,-19 12 29 0 0,-1 1 1 0 0,1 0 0 0 0,0-1 0 0 0,0 1 0 0 0,0 0 0 0 0,0 0 0 0 0,-1 0 0 0 0,2 1-1 0 0,-1-1 1 0 0,0 0 0 0 0,0 1 0 0 0,4-1 0 0 0,-4 1-5 0 0,-1 1-1 0 0,1-1 1 0 0,-1 1 0 0 0,0-1 0 0 0,1 1-1 0 0,-1 0 1 0 0,0-1 0 0 0,1 1 0 0 0,-1 0-1 0 0,0 0 1 0 0,0 0 0 0 0,0 0 0 0 0,1 0-1 0 0,-1 1 1 0 0,0-1 0 0 0,-1 0 0 0 0,1 0-1 0 0,0 1 1 0 0,1 1 0 0 0,12 14 64 0 0,-11-15-607 0 0,-1 0 0 0 0,1 0 0 0 0,0 0 0 0 0,-1 0-1 0 0,1 0 1 0 0,0-1 0 0 0,6 3 0 0 0,-7-3 157 0 0,0-1 0 0 0,0 1 0 0 0,1-1 0 0 0,-1 0 0 0 0,0 1 0 0 0,1-1 0 0 0,-1 0 0 0 0,0 0 1 0 0,1-1-1 0 0,-1 1 0 0 0,0 0 0 0 0,1-1 0 0 0,-1 1 0 0 0,0-1 0 0 0,0 0 0 0 0,0 0 0 0 0,1 0 0 0 0,-1 0 0 0 0,0 0 0 0 0,0 0 0 0 0,2-3 0 0 0,7-5-968 0 0</inkml:trace>
+</inkml:ink>
+</file>
+
+<file path=ppt/ink/ink29.xml><?xml version="1.0" encoding="utf-8"?>
+<inkml:ink xmlns:inkml="http://www.w3.org/2003/InkML">
+  <inkml:definitions>
+    <inkml:context xml:id="ctx0">
+      <inkml:inkSource xml:id="inkSrc0">
+        <inkml:traceFormat>
+          <inkml:channel name="X" type="integer" min="-2.14748E9" max="2.14748E9" units="cm"/>
+          <inkml:channel name="Y" type="integer" min="-2.14748E9" max="2.14748E9" units="cm"/>
+          <inkml:channel name="F" type="integer" max="32767" units="dev"/>
+          <inkml:channel name="OA" type="integer" max="360" units="deg"/>
+          <inkml:channel name="OE" type="integer" max="90" units="deg"/>
+        </inkml:traceFormat>
+        <inkml:channelProperties>
+          <inkml:channelProperty channel="X" name="resolution" value="1000" units="1/cm"/>
+          <inkml:channelProperty channel="Y" name="resolution" value="1000" units="1/cm"/>
+          <inkml:channelProperty channel="F" name="resolution" value="0" units="1/dev"/>
+          <inkml:channelProperty channel="OA" name="resolution" value="1000" units="1/deg"/>
+          <inkml:channelProperty channel="OE" name="resolution" value="1000" units="1/deg"/>
+        </inkml:channelProperties>
+      </inkml:inkSource>
+      <inkml:timestamp xml:id="ts0" timeString="2026-10-04T03:51:02.979"/>
+    </inkml:context>
+    <inkml:brush xml:id="br0">
+      <inkml:brushProperty name="width" value="0.1" units="cm"/>
+      <inkml:brushProperty name="height" value="0.1" units="cm"/>
+    </inkml:brush>
+  </inkml:definitions>
+  <inkml:trace contextRef="#ctx0" brushRef="#br0">57 0 392 0 0,'-4'6'816'0'0,"1"7"52"0"0,-4 0-228 0 0,-4 2-220 0 0,4 4-144 0 0,0 0-92 0 0,0 0-68 0 0,0 3-52 0 0,4-3-32 0 0,3 0-20 0 0,0 0-52 0 0,0-3-112 0 0,3-4-164 0 0,4 1-260 0 0,0-4-168 0 0,0-2-76 0 0,4-4-12 0 0</inkml:trace>
+</inkml:ink>
+</file>
+
+<file path=ppt/ink/ink3.xml><?xml version="1.0" encoding="utf-8"?>
+<inkml:ink xmlns:inkml="http://www.w3.org/2003/InkML">
+  <inkml:definitions>
+    <inkml:context xml:id="ctx0">
+      <inkml:inkSource xml:id="inkSrc0">
+        <inkml:traceFormat>
+          <inkml:channel name="X" type="integer" min="-2.14748E9" max="2.14748E9" units="cm"/>
+          <inkml:channel name="Y" type="integer" min="-2.14748E9" max="2.14748E9" units="cm"/>
+          <inkml:channel name="F" type="integer" max="32767" units="dev"/>
+          <inkml:channel name="OA" type="integer" max="360" units="deg"/>
+          <inkml:channel name="OE" type="integer" max="90" units="deg"/>
+        </inkml:traceFormat>
+        <inkml:channelProperties>
+          <inkml:channelProperty channel="X" name="resolution" value="1000" units="1/cm"/>
+          <inkml:channelProperty channel="Y" name="resolution" value="1000" units="1/cm"/>
+          <inkml:channelProperty channel="F" name="resolution" value="0" units="1/dev"/>
+          <inkml:channelProperty channel="OA" name="resolution" value="1000" units="1/deg"/>
+          <inkml:channelProperty channel="OE" name="resolution" value="1000" units="1/deg"/>
+        </inkml:channelProperties>
+      </inkml:inkSource>
+      <inkml:timestamp xml:id="ts0" timeString="2026-10-04T03:50:45.195"/>
+    </inkml:context>
+    <inkml:brush xml:id="br0">
+      <inkml:brushProperty name="width" value="0.1" units="cm"/>
+      <inkml:brushProperty name="height" value="0.1" units="cm"/>
+    </inkml:brush>
+  </inkml:definitions>
+  <inkml:trace contextRef="#ctx0" brushRef="#br0">63 260 280 0 0,'-13'48'674'0'0,"9"-31"-44"0"0,0 0 1 0 0,-2-1-1 0 0,-13 31 1 0 0,19-47-563 0 0,0 1 0 0 0,0 0 0 0 0,-1-1 0 0 0,1 1 0 0 0,0 0 0 0 0,-1-1 1 0 0,1 1-1 0 0,0-1 0 0 0,-1 1 0 0 0,1 0 0 0 0,-1-1 0 0 0,1 1 0 0 0,-1-1 0 0 0,1 0 1 0 0,-1 1-1 0 0,1-1 0 0 0,-1 1 0 0 0,0-1 0 0 0,1 0 0 0 0,-1 1 0 0 0,-1-1 0 0 0,2 0-28 0 0,-1 0 0 0 0,1-1 0 0 0,0 1-1 0 0,-1 0 1 0 0,1-1 0 0 0,0 1 0 0 0,-1 0-1 0 0,1-1 1 0 0,0 1 0 0 0,-1-1-1 0 0,1 1 1 0 0,0-1 0 0 0,0 1 0 0 0,-1-1-1 0 0,1 1 1 0 0,0-1 0 0 0,0 1-1 0 0,0-1 1 0 0,0 1 0 0 0,0-1 0 0 0,0 0-1 0 0,0-36 362 0 0,7 8-442 0 0,2-1 1 0 0,0 2 0 0 0,2-1 0 0 0,1 1 0 0 0,2 1 0 0 0,0 1 0 0 0,24-34 0 0 0,-27 46-289 0 0,0 1-1 0 0,1 1 1 0 0,0-1 0 0 0,1 2-1 0 0,0 0 1 0 0,1 0 0 0 0,20-11 0 0 0,-34 22 325 0 0,0-1 1 0 0,1 1 0 0 0,-1 0 0 0 0,0-1 0 0 0,1 1 0 0 0,-1 0 0 0 0,1-1-1 0 0,-1 1 1 0 0,1 0 0 0 0,-1-1 0 0 0,1 1 0 0 0,-1 0 0 0 0,1 0 0 0 0,-1 0-1 0 0,1 0 1 0 0,-1-1 0 0 0,1 1 0 0 0,-1 0 0 0 0,1 0 0 0 0,0 0-1 0 0,-1 0 1 0 0,1 0 0 0 0,-1 0 0 0 0,1 0 0 0 0,-1 0 0 0 0,1 1 0 0 0,-1-1-1 0 0,1 0 1 0 0,-1 0 0 0 0,1 0 0 0 0,-1 0 0 0 0,1 1 0 0 0,-1-1-1 0 0,1 0 1 0 0,-1 1 0 0 0,1-1 0 0 0,-1 0 0 0 0,1 1 0 0 0,-1-1 0 0 0,0 0-1 0 0,1 1 1 0 0,-1-1 0 0 0,0 1 0 0 0,1-1 0 0 0,-1 1 0 0 0,0-1 0 0 0,0 1-1 0 0,1-1 1 0 0,-1 1 0 0 0,0-1 0 0 0,0 1 0 0 0,0-1 0 0 0,0 1-1 0 0,0-1 1 0 0,0 1 0 0 0,1 0 0 0 0,-1-1 0 0 0,-1 1 0 0 0,1-1 0 0 0,0 1-1 0 0,0-1 1 0 0,0 2 0 0 0,-7 42 171 0 0,5-37-131 0 0,-29 114 622 0 0,18-75-306 0 0,2 0 0 0 0,-10 83 0 0 0,21-125-317 0 0,0 1 1 0 0,0-1 0 0 0,0 1-1 0 0,1-1 1 0 0,0 1-1 0 0,-1-1 1 0 0,2 0 0 0 0,1 6-1 0 0,-3-9-20 0 0,1 0 0 0 0,-1 0 0 0 0,0 0 0 0 0,1 0 0 0 0,0 0 0 0 0,-1 0 0 0 0,1 0 0 0 0,0-1 0 0 0,-1 1 0 0 0,1 0 0 0 0,0 0 0 0 0,0 0 0 0 0,0-1 0 0 0,0 1 0 0 0,0 0 0 0 0,0-1 0 0 0,0 1 0 0 0,0-1 0 0 0,0 1 0 0 0,0-1 0 0 0,0 0 0 0 0,0 1 0 0 0,0-1 0 0 0,0 0 0 0 0,0 0 0 0 0,0 0 0 0 0,1 1 0 0 0,-1-1 0 0 0,0-1 0 0 0,0 1 0 0 0,0 0 0 0 0,0 0 0 0 0,0 0 0 0 0,0 0 0 0 0,1-1 0 0 0,-1 1 0 0 0,1-1 0 0 0,6-3 71 0 0,1 0 0 0 0,-1-1 1 0 0,0 0-1 0 0,0-1 1 0 0,-1 1-1 0 0,0-1 0 0 0,0-1 1 0 0,0 1-1 0 0,9-13 1 0 0,2-5 88 0 0,27-44 1 0 0,-39 58-146 0 0,-1 1 0 0 0,-1-1 1 0 0,1 1-1 0 0,-2-1 0 0 0,1-1 0 0 0,-1 1 1 0 0,-1 0-1 0 0,0-1 0 0 0,1-11 0 0 0,-3 18-37 0 0,0 0-1 0 0,0 0 0 0 0,0-1 0 0 0,-1 1 1 0 0,0 0-1 0 0,0 0 0 0 0,0 0 0 0 0,0 0 0 0 0,0 0 1 0 0,-1 1-1 0 0,0-1 0 0 0,1 0 0 0 0,-2 0 0 0 0,1 1 1 0 0,0 0-1 0 0,-1-1 0 0 0,1 1 0 0 0,-1 0 1 0 0,0 0-1 0 0,0 0 0 0 0,0 1 0 0 0,0-1 0 0 0,-1 1 1 0 0,1-1-1 0 0,-8-2 0 0 0,-8-4-516 0 0,4 2-1228 0 0,0-1 0 0 0,-13-10 0 0 0,20 12 657 0 0</inkml:trace>
+</inkml:ink>
+</file>
+
+<file path=ppt/ink/ink30.xml><?xml version="1.0" encoding="utf-8"?>
+<inkml:ink xmlns:inkml="http://www.w3.org/2003/InkML">
+  <inkml:definitions>
+    <inkml:context xml:id="ctx0">
+      <inkml:inkSource xml:id="inkSrc0">
+        <inkml:traceFormat>
+          <inkml:channel name="X" type="integer" min="-2.14748E9" max="2.14748E9" units="cm"/>
+          <inkml:channel name="Y" type="integer" min="-2.14748E9" max="2.14748E9" units="cm"/>
+          <inkml:channel name="F" type="integer" max="32767" units="dev"/>
+          <inkml:channel name="OA" type="integer" max="360" units="deg"/>
+          <inkml:channel name="OE" type="integer" max="90" units="deg"/>
+        </inkml:traceFormat>
+        <inkml:channelProperties>
+          <inkml:channelProperty channel="X" name="resolution" value="1000" units="1/cm"/>
+          <inkml:channelProperty channel="Y" name="resolution" value="1000" units="1/cm"/>
+          <inkml:channelProperty channel="F" name="resolution" value="0" units="1/dev"/>
+          <inkml:channelProperty channel="OA" name="resolution" value="1000" units="1/deg"/>
+          <inkml:channelProperty channel="OE" name="resolution" value="1000" units="1/deg"/>
+        </inkml:channelProperties>
+      </inkml:inkSource>
+      <inkml:timestamp xml:id="ts0" timeString="2026-10-04T03:51:03.137"/>
+    </inkml:context>
+    <inkml:brush xml:id="br0">
+      <inkml:brushProperty name="width" value="0.1" units="cm"/>
+      <inkml:brushProperty name="height" value="0.1" units="cm"/>
+    </inkml:brush>
+  </inkml:definitions>
+  <inkml:trace contextRef="#ctx0" brushRef="#br0">18 121 680 0 0,'0'-22'1012'0'0,"0"3"68"0"0,0 3-244 0 0,-4 3-224 0 0,1 4-180 0 0,-1 0-152 0 0,1-1-124 0 0,3 4-124 0 0,-4 3-140 0 0,4-1-164 0 0,0 1-192 0 0,7 0-1172 0 0,0 3 648 0 0,0-3 40 0 0</inkml:trace>
+</inkml:ink>
+</file>
+
+<file path=ppt/ink/ink31.xml><?xml version="1.0" encoding="utf-8"?>
+<inkml:ink xmlns:inkml="http://www.w3.org/2003/InkML">
+  <inkml:definitions>
+    <inkml:context xml:id="ctx0">
+      <inkml:inkSource xml:id="inkSrc0">
+        <inkml:traceFormat>
+          <inkml:channel name="X" type="integer" min="-2.14748E9" max="2.14748E9" units="cm"/>
+          <inkml:channel name="Y" type="integer" min="-2.14748E9" max="2.14748E9" units="cm"/>
+          <inkml:channel name="F" type="integer" max="32767" units="dev"/>
+          <inkml:channel name="OA" type="integer" max="360" units="deg"/>
+          <inkml:channel name="OE" type="integer" max="90" units="deg"/>
+        </inkml:traceFormat>
+        <inkml:channelProperties>
+          <inkml:channelProperty channel="X" name="resolution" value="1000" units="1/cm"/>
+          <inkml:channelProperty channel="Y" name="resolution" value="1000" units="1/cm"/>
+          <inkml:channelProperty channel="F" name="resolution" value="0" units="1/dev"/>
+          <inkml:channelProperty channel="OA" name="resolution" value="1000" units="1/deg"/>
+          <inkml:channelProperty channel="OE" name="resolution" value="1000" units="1/deg"/>
+        </inkml:channelProperties>
+      </inkml:inkSource>
+      <inkml:timestamp xml:id="ts0" timeString="2026-10-04T03:51:03.440"/>
+    </inkml:context>
+    <inkml:brush xml:id="br0">
+      <inkml:brushProperty name="width" value="0.1" units="cm"/>
+      <inkml:brushProperty name="height" value="0.1" units="cm"/>
+    </inkml:brush>
+  </inkml:definitions>
+  <inkml:trace contextRef="#ctx0" brushRef="#br0">26 1 276 0 0,'-8'29'514'0'0,"2"0"-1"0"0,2 0 1 0 0,-3 54-1 0 0,7-74-448 0 0,0-1 50 0 0,0 1-1 0 0,0-1 1 0 0,0 1 0 0 0,1 0 0 0 0,1-1 0 0 0,0 0 0 0 0,4 15 0 0 0,-5-22-80 0 0,-1 0-1 0 0,0 0 1 0 0,1-1-1 0 0,-1 1 0 0 0,1 0 1 0 0,-1 0-1 0 0,1-1 1 0 0,-1 1-1 0 0,1 0 0 0 0,-1-1 1 0 0,1 1-1 0 0,0 0 1 0 0,0-1-1 0 0,-1 1 1 0 0,1-1-1 0 0,0 1 0 0 0,0-1 1 0 0,-1 0-1 0 0,1 1 1 0 0,0-1-1 0 0,0 0 1 0 0,0 1-1 0 0,0-1 0 0 0,0 0 1 0 0,-1 0-1 0 0,3 0 1 0 0,-1 0 46 0 0,0 0 0 0 0,0-1 0 0 0,0 1 0 0 0,0-1 0 0 0,-1 0 0 0 0,1 0 0 0 0,0 1 0 0 0,0-1 0 0 0,0 0 0 0 0,-1 0 0 0 0,3-3 0 0 0,3-2 220 0 0,0 0-1 0 0,0-1 1 0 0,-1 0-1 0 0,6-8 1 0 0,3-9 1126 0 0,18-36 0 0 0,-21 36 1195 0 0,27-40 0 0 0,-35 64-2416 0 0,0 9-201 0 0,3 15-861 0 0,-5-16-33 0 0,0-3 266 0 0,0-1 0 0 0,0 1 0 0 0,1-1 1 0 0,0 1-1 0 0,-1-1 0 0 0,1 0 0 0 0,1 0 0 0 0,-1 0 0 0 0,0-1 0 0 0,1 1 0 0 0,0-1 0 0 0,0 0 0 0 0,0 0 0 0 0,0 0 1 0 0,1 0-1 0 0,-1-1 0 0 0,7 3 0 0 0,6 2-820 0 0</inkml:trace>
+</inkml:ink>
+</file>
+
+<file path=ppt/ink/ink32.xml><?xml version="1.0" encoding="utf-8"?>
+<inkml:ink xmlns:inkml="http://www.w3.org/2003/InkML">
+  <inkml:definitions>
+    <inkml:context xml:id="ctx0">
+      <inkml:inkSource xml:id="inkSrc0">
+        <inkml:traceFormat>
+          <inkml:channel name="X" type="integer" min="-2.14748E9" max="2.14748E9" units="cm"/>
+          <inkml:channel name="Y" type="integer" min="-2.14748E9" max="2.14748E9" units="cm"/>
+          <inkml:channel name="F" type="integer" max="32767" units="dev"/>
+          <inkml:channel name="OA" type="integer" max="360" units="deg"/>
+          <inkml:channel name="OE" type="integer" max="90" units="deg"/>
+        </inkml:traceFormat>
+        <inkml:channelProperties>
+          <inkml:channelProperty channel="X" name="resolution" value="1000" units="1/cm"/>
+          <inkml:channelProperty channel="Y" name="resolution" value="1000" units="1/cm"/>
+          <inkml:channelProperty channel="F" name="resolution" value="0" units="1/dev"/>
+          <inkml:channelProperty channel="OA" name="resolution" value="1000" units="1/deg"/>
+          <inkml:channelProperty channel="OE" name="resolution" value="1000" units="1/deg"/>
+        </inkml:channelProperties>
+      </inkml:inkSource>
+      <inkml:timestamp xml:id="ts0" timeString="2026-10-04T03:51:03.755"/>
+    </inkml:context>
+    <inkml:brush xml:id="br0">
+      <inkml:brushProperty name="width" value="0.1" units="cm"/>
+      <inkml:brushProperty name="height" value="0.1" units="cm"/>
+    </inkml:brush>
+  </inkml:definitions>
+  <inkml:trace contextRef="#ctx0" brushRef="#br0">155 53 120 0 0,'1'-2'183'0'0,"-1"1"0"0"0,1-1 0 0 0,-1 1 0 0 0,1-1 0 0 0,-1 0 0 0 0,0 1 0 0 0,0-1 0 0 0,0 0 0 0 0,0 1 0 0 0,0-1 1 0 0,0 0-1 0 0,0 1 0 0 0,-1-1 0 0 0,1 0 0 0 0,0 1 0 0 0,-1-1 0 0 0,1 0 0 0 0,-1 1 0 0 0,0-1 0 0 0,0 1 0 0 0,1 0 0 0 0,-1-1 0 0 0,0 1 0 0 0,0-1 0 0 0,0 1 0 0 0,-1 0 0 0 0,1 0 0 0 0,-3-2 0 0 0,2 2 42 0 0,0 0 0 0 0,0 0-1 0 0,-1 0 1 0 0,1 0 0 0 0,0 1 0 0 0,-1-1-1 0 0,1 1 1 0 0,-1-1 0 0 0,1 1-1 0 0,-1 0 1 0 0,1 0 0 0 0,-1 0-1 0 0,1 1 1 0 0,-1-1 0 0 0,1 0-1 0 0,0 1 1 0 0,-1 0 0 0 0,1-1 0 0 0,-3 3-1 0 0,-3 0 141 0 0,0 1-1 0 0,0 0 1 0 0,1 1-1 0 0,0-1 1 0 0,0 1-1 0 0,-7 8 1 0 0,11-11-317 0 0,0 1 0 0 0,0-1 0 0 0,1 1 0 0 0,-1 0 0 0 0,1 0 0 0 0,0 0 0 0 0,0 1 0 0 0,0-1 0 0 0,0 0 0 0 0,1 1 0 0 0,-1-1 0 0 0,1 1 0 0 0,0 0 0 0 0,0-1 0 0 0,0 1 1 0 0,0 4-1 0 0,1-7-45 0 0,0 0 1 0 0,0 0-1 0 0,0 0 1 0 0,0 0-1 0 0,0 0 1 0 0,0 0-1 0 0,1 0 1 0 0,-1 0-1 0 0,0 0 1 0 0,0 0-1 0 0,1 0 1 0 0,-1 0-1 0 0,1 0 1 0 0,-1 0-1 0 0,1 0 1 0 0,-1-1-1 0 0,1 1 0 0 0,0 0 1 0 0,-1 0-1 0 0,1-1 1 0 0,0 1-1 0 0,0 0 1 0 0,-1-1-1 0 0,3 2 1 0 0,-1-1-2 0 0,0-1 1 0 0,0 1-1 0 0,0-1 1 0 0,0 1-1 0 0,0-1 0 0 0,0 0 1 0 0,0 1-1 0 0,0-1 0 0 0,0 0 1 0 0,0-1-1 0 0,3 1 1 0 0,6-3 45 0 0,0 1 1 0 0,0-1-1 0 0,15-7 1 0 0,-23 9-11 0 0,50-18 1138 0 0,-52 19-1163 0 0,-1 0 0 0 0,0 0 0 0 0,1 1 0 0 0,-1-1 0 0 0,0 0 0 0 0,1 0 0 0 0,-1 0 0 0 0,1 0 0 0 0,-1 1 0 0 0,0-1-1 0 0,1 0 1 0 0,-1 0 0 0 0,0 0 0 0 0,1 1 0 0 0,-1-1 0 0 0,0 0 0 0 0,0 1 0 0 0,1-1 0 0 0,-1 0 0 0 0,0 1 0 0 0,0-1 0 0 0,0 0-1 0 0,1 1 1 0 0,-1-1 0 0 0,0 0 0 0 0,0 1 0 0 0,0-1 0 0 0,0 1 0 0 0,0-1 0 0 0,0 0 0 0 0,0 1 0 0 0,0-1 0 0 0,0 1 0 0 0,0-1-1 0 0,0 0 1 0 0,0 1 0 0 0,0-1 0 0 0,0 1 0 0 0,0-1 0 0 0,0 0 0 0 0,0 1 0 0 0,0-1 0 0 0,-1 0 0 0 0,1 1 0 0 0,-5 26 51 0 0,3-20-31 0 0,-2 15 25 0 0,-3 33-1 0 0,7-48-335 0 0,-1 0-1 0 0,2 0 1 0 0,-1 0-1 0 0,1 0 1 0 0,0 0-1 0 0,0 0 1 0 0,1-1-1 0 0,0 1 0 0 0,3 7 1 0 0,-4-12 49 0 0,0-1 0 0 0,0 1 0 0 0,0-1 0 0 0,0 0-1 0 0,0 1 1 0 0,0-1 0 0 0,1 0 0 0 0,-1 0 0 0 0,0 0 0 0 0,1 0 0 0 0,-1 0 0 0 0,1 0 0 0 0,-1 0 0 0 0,1 0 0 0 0,0-1-1 0 0,-1 1 1 0 0,1 0 0 0 0,0-1 0 0 0,-1 0 0 0 0,1 1 0 0 0,0-1 0 0 0,0 0 0 0 0,-1 0 0 0 0,1 0 0 0 0,0 0 0 0 0,0 0 0 0 0,0 0-1 0 0,-1 0 1 0 0,1-1 0 0 0,0 1 0 0 0,-1-1 0 0 0,3 0 0 0 0,3-1-374 0 0,0-1-1 0 0,0 0 1 0 0,0 0-1 0 0,0-1 1 0 0,0 1 0 0 0,7-7-1 0 0,7-8-432 0 0</inkml:trace>
+</inkml:ink>
+</file>
+
+<file path=ppt/ink/ink33.xml><?xml version="1.0" encoding="utf-8"?>
+<inkml:ink xmlns:inkml="http://www.w3.org/2003/InkML">
+  <inkml:definitions>
+    <inkml:context xml:id="ctx0">
+      <inkml:inkSource xml:id="inkSrc0">
+        <inkml:traceFormat>
+          <inkml:channel name="X" type="integer" min="-2.14748E9" max="2.14748E9" units="cm"/>
+          <inkml:channel name="Y" type="integer" min="-2.14748E9" max="2.14748E9" units="cm"/>
+          <inkml:channel name="F" type="integer" max="32767" units="dev"/>
+          <inkml:channel name="OA" type="integer" max="360" units="deg"/>
+          <inkml:channel name="OE" type="integer" max="90" units="deg"/>
+        </inkml:traceFormat>
+        <inkml:channelProperties>
+          <inkml:channelProperty channel="X" name="resolution" value="1000" units="1/cm"/>
+          <inkml:channelProperty channel="Y" name="resolution" value="1000" units="1/cm"/>
+          <inkml:channelProperty channel="F" name="resolution" value="0" units="1/dev"/>
+          <inkml:channelProperty channel="OA" name="resolution" value="1000" units="1/deg"/>
+          <inkml:channelProperty channel="OE" name="resolution" value="1000" units="1/deg"/>
+        </inkml:channelProperties>
+      </inkml:inkSource>
+      <inkml:timestamp xml:id="ts0" timeString="2026-10-04T03:51:03.992"/>
+    </inkml:context>
+    <inkml:brush xml:id="br0">
+      <inkml:brushProperty name="width" value="0.1" units="cm"/>
+      <inkml:brushProperty name="height" value="0.1" units="cm"/>
+    </inkml:brush>
+  </inkml:definitions>
+  <inkml:trace contextRef="#ctx0" brushRef="#br0">99 141 36 0 0,'32'-109'2372'0'0,"-23"77"-1189"0"0,-37 158 2647 0 0,-5 79-2465 0 0,14-79-1204 0 0,-7 52-1553 0 0,4 0-3445 0 0,21-167 4399 0 0,-3 15-696 0 0,-2-3 144 0 0</inkml:trace>
+</inkml:ink>
+</file>
+
+<file path=ppt/ink/ink34.xml><?xml version="1.0" encoding="utf-8"?>
+<inkml:ink xmlns:inkml="http://www.w3.org/2003/InkML">
+  <inkml:definitions>
+    <inkml:context xml:id="ctx0">
+      <inkml:inkSource xml:id="inkSrc0">
+        <inkml:traceFormat>
+          <inkml:channel name="X" type="integer" min="-2.14748E9" max="2.14748E9" units="cm"/>
+          <inkml:channel name="Y" type="integer" min="-2.14748E9" max="2.14748E9" units="cm"/>
+          <inkml:channel name="F" type="integer" max="32767" units="dev"/>
+          <inkml:channel name="OA" type="integer" max="360" units="deg"/>
+          <inkml:channel name="OE" type="integer" max="90" units="deg"/>
+        </inkml:traceFormat>
+        <inkml:channelProperties>
+          <inkml:channelProperty channel="X" name="resolution" value="1000" units="1/cm"/>
+          <inkml:channelProperty channel="Y" name="resolution" value="1000" units="1/cm"/>
+          <inkml:channelProperty channel="F" name="resolution" value="0" units="1/dev"/>
+          <inkml:channelProperty channel="OA" name="resolution" value="1000" units="1/deg"/>
+          <inkml:channelProperty channel="OE" name="resolution" value="1000" units="1/deg"/>
+        </inkml:channelProperties>
+      </inkml:inkSource>
+      <inkml:timestamp xml:id="ts0" timeString="2026-10-04T03:51:04.324"/>
+    </inkml:context>
+    <inkml:brush xml:id="br0">
+      <inkml:brushProperty name="width" value="0.1" units="cm"/>
+      <inkml:brushProperty name="height" value="0.1" units="cm"/>
+    </inkml:brush>
+  </inkml:definitions>
+  <inkml:trace contextRef="#ctx0" brushRef="#br0">32 313 368 0 0,'-31'-44'3213'0'0,"31"43"-3204"0"0,0 1 1 0 0,0 0-1 0 0,0 0 0 0 0,0 0 0 0 0,0-1 1 0 0,0 1-1 0 0,0 0 0 0 0,0 0 1 0 0,0-1-1 0 0,0 1 0 0 0,0 0 1 0 0,0 0-1 0 0,0 0 0 0 0,0-1 0 0 0,1 1 1 0 0,-1 0-1 0 0,0 0 0 0 0,0 0 1 0 0,0-1-1 0 0,0 1 0 0 0,1 0 0 0 0,-1 0 1 0 0,0 0-1 0 0,0 0 0 0 0,0 0 1 0 0,1 0-1 0 0,-1-1 0 0 0,0 1 1 0 0,0 0-1 0 0,0 0 0 0 0,1 0 0 0 0,-1 0 1 0 0,0 0-1 0 0,0 0 0 0 0,1 0 1 0 0,-1 0-1 0 0,0 0 0 0 0,0 0 0 0 0,1 0 1 0 0,-1 0-1 0 0,0 0 0 0 0,0 0 1 0 0,0 0-1 0 0,1 0 0 0 0,-1 0 1 0 0,0 0-1 0 0,0 0 0 0 0,1 1 0 0 0,-1-1 1 0 0,0 0-1 0 0,0 0 0 0 0,22 3-26 0 0,-13-2 44 0 0,17 0-65 0 0,1-2 0 0 0,-1-1-1 0 0,38-8 1 0 0,-23 4-5 0 0,23-3-165 0 0,-1-3 0 0 0,0-2 0 0 0,-1-3 0 0 0,-1-3 0 0 0,73-35 0 0 0,-121 49 272 0 0,-1-1 0 0 0,0 0-1 0 0,-1-1 1 0 0,0 0 0 0 0,0-1-1 0 0,-1 0 1 0 0,0-1 0 0 0,13-16 0 0 0,-23 25-13 0 0,1 0 0 0 0,0 0 1 0 0,0 0-1 0 0,-1 0 1 0 0,1 0-1 0 0,0 0 0 0 0,-1 0 1 0 0,1 0-1 0 0,-1 0 0 0 0,0 0 1 0 0,1 0-1 0 0,-1 0 1 0 0,0 0-1 0 0,0 0 0 0 0,1-1 1 0 0,-1 1-1 0 0,0 0 1 0 0,0 0-1 0 0,-1-2 0 0 0,1 2 22 0 0,0 1 1 0 0,-1-1-1 0 0,1 0 0 0 0,-1 1 0 0 0,1-1 0 0 0,-1 1 0 0 0,1-1 0 0 0,-1 1 1 0 0,1-1-1 0 0,-1 1 0 0 0,1 0 0 0 0,-1-1 0 0 0,0 1 0 0 0,1-1 0 0 0,-1 1 1 0 0,0 0-1 0 0,1 0 0 0 0,-1 0 0 0 0,0-1 0 0 0,1 1 0 0 0,-1 0 0 0 0,-1 0 1 0 0,-2 0 217 0 0,0 0 0 0 0,-1 0 0 0 0,1 0 1 0 0,0 0-1 0 0,0 1 0 0 0,0 0 0 0 0,-1 0 1 0 0,-6 3-1 0 0,-6 4 150 0 0,0 1 0 0 0,0 1 0 0 0,1 1 0 0 0,1 0 0 0 0,0 2 1 0 0,0-1-1 0 0,1 2 0 0 0,1 0 0 0 0,0 0 0 0 0,1 1 0 0 0,0 1 0 0 0,2 0 1 0 0,-12 22-1 0 0,20-35-480 0 0,1 1 0 0 0,-1-1-1 0 0,1 1 1 0 0,0 0 0 0 0,0-1 0 0 0,0 1 0 0 0,1 0 0 0 0,-1 0 0 0 0,1-1 0 0 0,0 1 0 0 0,0 0 0 0 0,0 0 0 0 0,1 0 0 0 0,-1 0 0 0 0,3 6-1 0 0,-2-7-157 0 0,1-1-1 0 0,-1 1 1 0 0,1 0-1 0 0,0-1 1 0 0,0 1-1 0 0,0-1 1 0 0,0 0-1 0 0,0 1 1 0 0,0-1-1 0 0,1 0 1 0 0,-1-1-1 0 0,1 1 1 0 0,-1 0-1 0 0,1-1 1 0 0,0 1-1 0 0,0-1 1 0 0,0 0-1 0 0,-1 0 0 0 0,6 1 1 0 0,14 4-1791 0 0,0-2 1 0 0,0-1-1 0 0,36 1 0 0 0,-50-4 1617 0 0,21 3-1078 0 0</inkml:trace>
+</inkml:ink>
+</file>
+
+<file path=ppt/ink/ink35.xml><?xml version="1.0" encoding="utf-8"?>
+<inkml:ink xmlns:inkml="http://www.w3.org/2003/InkML">
+  <inkml:definitions>
+    <inkml:context xml:id="ctx0">
+      <inkml:inkSource xml:id="inkSrc0">
+        <inkml:traceFormat>
+          <inkml:channel name="X" type="integer" min="-2.14748E9" max="2.14748E9" units="cm"/>
+          <inkml:channel name="Y" type="integer" min="-2.14748E9" max="2.14748E9" units="cm"/>
+          <inkml:channel name="F" type="integer" max="32767" units="dev"/>
+          <inkml:channel name="OA" type="integer" max="360" units="deg"/>
+          <inkml:channel name="OE" type="integer" max="90" units="deg"/>
+        </inkml:traceFormat>
+        <inkml:channelProperties>
+          <inkml:channelProperty channel="X" name="resolution" value="1000" units="1/cm"/>
+          <inkml:channelProperty channel="Y" name="resolution" value="1000" units="1/cm"/>
+          <inkml:channelProperty channel="F" name="resolution" value="0" units="1/dev"/>
+          <inkml:channelProperty channel="OA" name="resolution" value="1000" units="1/deg"/>
+          <inkml:channelProperty channel="OE" name="resolution" value="1000" units="1/deg"/>
+        </inkml:channelProperties>
+      </inkml:inkSource>
+      <inkml:timestamp xml:id="ts0" timeString="2026-10-04T03:51:04.688"/>
+    </inkml:context>
+    <inkml:brush xml:id="br0">
+      <inkml:brushProperty name="width" value="0.1" units="cm"/>
+      <inkml:brushProperty name="height" value="0.1" units="cm"/>
+    </inkml:brush>
+  </inkml:definitions>
+  <inkml:trace contextRef="#ctx0" brushRef="#br0">30 10 604 0 0,'-2'-10'1727'0'0,"-2"12"-307"0"0,-4 17-322 0 0,1 34-472 0 0,1 1-1 0 0,4-1 0 0 0,4 62 1 0 0,-1-92-1006 0 0,1 0 1 0 0,7 28-1 0 0,-7-41-406 0 0,1-1 0 0 0,0 1 1 0 0,1-1-1 0 0,5 11 0 0 0,-4-13-529 0 0</inkml:trace>
+</inkml:ink>
+</file>
+
+<file path=ppt/ink/ink36.xml><?xml version="1.0" encoding="utf-8"?>
+<inkml:ink xmlns:inkml="http://www.w3.org/2003/InkML">
+  <inkml:definitions>
+    <inkml:context xml:id="ctx0">
+      <inkml:inkSource xml:id="inkSrc0">
+        <inkml:traceFormat>
+          <inkml:channel name="X" type="integer" min="-2.14748E9" max="2.14748E9" units="cm"/>
+          <inkml:channel name="Y" type="integer" min="-2.14748E9" max="2.14748E9" units="cm"/>
+          <inkml:channel name="F" type="integer" max="32767" units="dev"/>
+          <inkml:channel name="OA" type="integer" max="360" units="deg"/>
+          <inkml:channel name="OE" type="integer" max="90" units="deg"/>
+        </inkml:traceFormat>
+        <inkml:channelProperties>
+          <inkml:channelProperty channel="X" name="resolution" value="1000" units="1/cm"/>
+          <inkml:channelProperty channel="Y" name="resolution" value="1000" units="1/cm"/>
+          <inkml:channelProperty channel="F" name="resolution" value="0" units="1/dev"/>
+          <inkml:channelProperty channel="OA" name="resolution" value="1000" units="1/deg"/>
+          <inkml:channelProperty channel="OE" name="resolution" value="1000" units="1/deg"/>
+        </inkml:channelProperties>
+      </inkml:inkSource>
+      <inkml:timestamp xml:id="ts0" timeString="2026-10-04T03:51:04.831"/>
+    </inkml:context>
+    <inkml:brush xml:id="br0">
+      <inkml:brushProperty name="width" value="0.1" units="cm"/>
+      <inkml:brushProperty name="height" value="0.1" units="cm"/>
+    </inkml:brush>
+  </inkml:definitions>
+  <inkml:trace contextRef="#ctx0" brushRef="#br0">1 38 480 0 0,'0'-13'684'0'0,"3"1"-84"0"0,1 5-316 0 0,-1 1-236 0 0,4 6-192 0 0,4 0-200 0 0,-1 0-172 0 0,4 3-76 0 0</inkml:trace>
+</inkml:ink>
+</file>
+
+<file path=ppt/ink/ink37.xml><?xml version="1.0" encoding="utf-8"?>
+<inkml:ink xmlns:inkml="http://www.w3.org/2003/InkML">
+  <inkml:definitions>
+    <inkml:context xml:id="ctx0">
+      <inkml:inkSource xml:id="inkSrc0">
+        <inkml:traceFormat>
+          <inkml:channel name="X" type="integer" min="-2.14748E9" max="2.14748E9" units="cm"/>
+          <inkml:channel name="Y" type="integer" min="-2.14748E9" max="2.14748E9" units="cm"/>
+          <inkml:channel name="F" type="integer" max="32767" units="dev"/>
+          <inkml:channel name="OA" type="integer" max="360" units="deg"/>
+          <inkml:channel name="OE" type="integer" max="90" units="deg"/>
+        </inkml:traceFormat>
+        <inkml:channelProperties>
+          <inkml:channelProperty channel="X" name="resolution" value="1000" units="1/cm"/>
+          <inkml:channelProperty channel="Y" name="resolution" value="1000" units="1/cm"/>
+          <inkml:channelProperty channel="F" name="resolution" value="0" units="1/dev"/>
+          <inkml:channelProperty channel="OA" name="resolution" value="1000" units="1/deg"/>
+          <inkml:channelProperty channel="OE" name="resolution" value="1000" units="1/deg"/>
+        </inkml:channelProperties>
+      </inkml:inkSource>
+      <inkml:timestamp xml:id="ts0" timeString="2026-10-04T03:51:05.100"/>
+    </inkml:context>
+    <inkml:brush xml:id="br0">
+      <inkml:brushProperty name="width" value="0.1" units="cm"/>
+      <inkml:brushProperty name="height" value="0.1" units="cm"/>
+    </inkml:brush>
+  </inkml:definitions>
+  <inkml:trace contextRef="#ctx0" brushRef="#br0">27 0 620 0 0,'-8'45'928'0'0,"1"-11"-84"0"0,2-1 1 0 0,-1 40-1 0 0,5-72-805 0 0,1 0 1 0 0,0 1-1 0 0,0-1 0 0 0,0 0 0 0 0,0 0 1 0 0,0 0-1 0 0,0 1 0 0 0,1-1 1 0 0,-1 0-1 0 0,0 0 0 0 0,1 0 0 0 0,-1 0 1 0 0,1 0-1 0 0,-1 1 0 0 0,1-1 0 0 0,-1 0 1 0 0,1 0-1 0 0,0 0 0 0 0,-1 0 1 0 0,3 1-1 0 0,-2-2 7 0 0,-1 1 0 0 0,1-1 1 0 0,0 0-1 0 0,0 0 0 0 0,0 0 1 0 0,0 0-1 0 0,-1 0 0 0 0,1 0 0 0 0,0 0 1 0 0,0 0-1 0 0,0 0 0 0 0,0 0 1 0 0,-1 0-1 0 0,1-1 0 0 0,0 1 0 0 0,0 0 1 0 0,0-1-1 0 0,-1 1 0 0 0,1 0 1 0 0,0-1-1 0 0,1 0 0 0 0,4-4 238 0 0,0 0 0 0 0,1 0 0 0 0,-2-1 1 0 0,10-10-1 0 0,85-107 4733 0 0,-100 123-4973 0 0,1-1 1 0 0,-1 1-1 0 0,0-1 0 0 0,1 1 1 0 0,-1-1-1 0 0,1 1 0 0 0,-1 0 1 0 0,1-1-1 0 0,-1 1 0 0 0,1-1 1 0 0,-1 1-1 0 0,1 0 1 0 0,-1 0-1 0 0,1-1 0 0 0,0 1 1 0 0,-1 0-1 0 0,1 0 0 0 0,-1 0 1 0 0,1 0-1 0 0,0-1 1 0 0,-1 1-1 0 0,1 0 0 0 0,0 0 1 0 0,-1 0-1 0 0,1 0 0 0 0,-1 0 1 0 0,1 1-1 0 0,0-1 0 0 0,-1 0 1 0 0,1 0-1 0 0,0 0 1 0 0,-1 1-1 0 0,1-1 0 0 0,-1 0 1 0 0,1 0-1 0 0,-1 1 0 0 0,1-1 1 0 0,-1 0-1 0 0,1 1 1 0 0,-1-1-1 0 0,1 1 0 0 0,0 0 1 0 0,21 30-143 0 0,-4-4-1748 0 0,-14-24 1424 0 0,0-1 0 0 0,0 1 0 0 0,0-1-1 0 0,1 0 1 0 0,-1 0 0 0 0,1-1-1 0 0,-1 0 1 0 0,1 1 0 0 0,-1-1-1 0 0,1-1 1 0 0,0 1 0 0 0,-1-1 0 0 0,1 0-1 0 0,0 0 1 0 0,-1 0 0 0 0,1 0-1 0 0,0-1 1 0 0,-1 0 0 0 0,1 0-1 0 0,0 0 1 0 0,-1-1 0 0 0,9-3 0 0 0,15-7-1184 0 0</inkml:trace>
+</inkml:ink>
+</file>
+
+<file path=ppt/ink/ink38.xml><?xml version="1.0" encoding="utf-8"?>
+<inkml:ink xmlns:inkml="http://www.w3.org/2003/InkML">
+  <inkml:definitions>
+    <inkml:context xml:id="ctx0">
+      <inkml:inkSource xml:id="inkSrc0">
+        <inkml:traceFormat>
+          <inkml:channel name="X" type="integer" min="-2.14748E9" max="2.14748E9" units="cm"/>
+          <inkml:channel name="Y" type="integer" min="-2.14748E9" max="2.14748E9" units="cm"/>
+          <inkml:channel name="F" type="integer" max="32767" units="dev"/>
+          <inkml:channel name="OA" type="integer" max="360" units="deg"/>
+          <inkml:channel name="OE" type="integer" max="90" units="deg"/>
+        </inkml:traceFormat>
+        <inkml:channelProperties>
+          <inkml:channelProperty channel="X" name="resolution" value="1000" units="1/cm"/>
+          <inkml:channelProperty channel="Y" name="resolution" value="1000" units="1/cm"/>
+          <inkml:channelProperty channel="F" name="resolution" value="0" units="1/dev"/>
+          <inkml:channelProperty channel="OA" name="resolution" value="1000" units="1/deg"/>
+          <inkml:channelProperty channel="OE" name="resolution" value="1000" units="1/deg"/>
+        </inkml:channelProperties>
+      </inkml:inkSource>
+      <inkml:timestamp xml:id="ts0" timeString="2026-10-04T03:51:05.336"/>
+    </inkml:context>
+    <inkml:brush xml:id="br0">
+      <inkml:brushProperty name="width" value="0.1" units="cm"/>
+      <inkml:brushProperty name="height" value="0.1" units="cm"/>
+    </inkml:brush>
+  </inkml:definitions>
+  <inkml:trace contextRef="#ctx0" brushRef="#br0">260 17 168 0 0,'-1'-1'164'0'0,"0"0"0"0"0,1 0 0 0 0,-1 0 0 0 0,0 0 0 0 0,0 0 0 0 0,0 0 0 0 0,0 0 0 0 0,0 0 0 0 0,0 0 0 0 0,0 0 0 0 0,0 1 0 0 0,0-1 0 0 0,0 0 0 0 0,0 1 0 0 0,-1-1 0 0 0,1 1 0 0 0,0-1 0 0 0,0 1 0 0 0,-1-1 0 0 0,1 1 0 0 0,-3 0 0 0 0,1 0 161 0 0,0 0 0 0 0,0 0 0 0 0,0 0 0 0 0,0 1 0 0 0,0 0 0 0 0,0-1 0 0 0,0 1 0 0 0,0 0 0 0 0,-3 2 0 0 0,-1 0 239 0 0,0 1-1 0 0,1 0 0 0 0,0 0 0 0 0,-1 0 0 0 0,2 1 0 0 0,-1-1 1 0 0,-6 9-1 0 0,9-10-462 0 0,0 0 0 0 0,1 0 0 0 0,0 0 0 0 0,-1 0-1 0 0,1 1 1 0 0,1-1 0 0 0,-1 1 0 0 0,0-1 0 0 0,1 1 0 0 0,0 0 0 0 0,0 0 0 0 0,0 0 0 0 0,0-1 0 0 0,0 1 0 0 0,1 0 0 0 0,0 0 0 0 0,0 0 0 0 0,0 0 0 0 0,0 0 0 0 0,1 0 0 0 0,-1 0 0 0 0,1 0 0 0 0,0 0 0 0 0,0 0 0 0 0,1-1-1 0 0,-1 1 1 0 0,1 0 0 0 0,0-1 0 0 0,0 1 0 0 0,3 4 0 0 0,5 4-83 0 0,0-1 0 0 0,0 0-1 0 0,0-1 1 0 0,2 0 0 0 0,-1-1 0 0 0,23 15-1 0 0,-30-22-15 0 0,2 1 0 0 0,-1 0-1 0 0,0 1 1 0 0,0-1 0 0 0,0 1-1 0 0,0 0 1 0 0,-1 0-1 0 0,0 1 1 0 0,0 0 0 0 0,0-1-1 0 0,4 8 1 0 0,-7-11-2 0 0,-1 0 1 0 0,0 1-1 0 0,0-1 1 0 0,0 0 0 0 0,0 0-1 0 0,0 0 1 0 0,-1 0-1 0 0,1 0 1 0 0,0 0 0 0 0,-1 1-1 0 0,1-1 1 0 0,0 0-1 0 0,-1 0 1 0 0,1 0 0 0 0,-1 0-1 0 0,1 0 1 0 0,-1 0-1 0 0,0 0 1 0 0,1-1 0 0 0,-1 1-1 0 0,0 0 1 0 0,0 0-1 0 0,-1 1 1 0 0,-22 16-27 0 0,-7 1-1309 0 0,-48 22 0 0 0,-37 6-7429 0 0,98-41 6940 0 0,3-2 381 0 0</inkml:trace>
+</inkml:ink>
+</file>
+
+<file path=ppt/ink/ink39.xml><?xml version="1.0" encoding="utf-8"?>
+<inkml:ink xmlns:inkml="http://www.w3.org/2003/InkML">
+  <inkml:definitions>
+    <inkml:context xml:id="ctx0">
+      <inkml:inkSource xml:id="inkSrc0">
+        <inkml:traceFormat>
+          <inkml:channel name="X" type="integer" min="-2.14748E9" max="2.14748E9" units="cm"/>
+          <inkml:channel name="Y" type="integer" min="-2.14748E9" max="2.14748E9" units="cm"/>
+          <inkml:channel name="F" type="integer" max="32767" units="dev"/>
+          <inkml:channel name="OA" type="integer" max="360" units="deg"/>
+          <inkml:channel name="OE" type="integer" max="90" units="deg"/>
+        </inkml:traceFormat>
+        <inkml:channelProperties>
+          <inkml:channelProperty channel="X" name="resolution" value="1000" units="1/cm"/>
+          <inkml:channelProperty channel="Y" name="resolution" value="1000" units="1/cm"/>
+          <inkml:channelProperty channel="F" name="resolution" value="0" units="1/dev"/>
+          <inkml:channelProperty channel="OA" name="resolution" value="1000" units="1/deg"/>
+          <inkml:channelProperty channel="OE" name="resolution" value="1000" units="1/deg"/>
+        </inkml:channelProperties>
+      </inkml:inkSource>
+      <inkml:timestamp xml:id="ts0" timeString="2026-10-04T03:51:05.748"/>
+    </inkml:context>
+    <inkml:brush xml:id="br0">
+      <inkml:brushProperty name="width" value="0.1" units="cm"/>
+      <inkml:brushProperty name="height" value="0.1" units="cm"/>
+    </inkml:brush>
+  </inkml:definitions>
+  <inkml:trace contextRef="#ctx0" brushRef="#br0">95 346 612 0 0,'-25'44'3192'0'0,"11"-22"-2244"0"0,1 1 0 0 0,-17 43 0 0 0,27-57-934 0 0,1 0 1 0 0,0 1-1 0 0,0-1 1 0 0,0 0 0 0 0,1 1-1 0 0,1-1 1 0 0,0 1-1 0 0,0-1 1 0 0,1 0-1 0 0,0 1 1 0 0,3 13 0 0 0,4 1-229 0 0,1 0 0 0 0,2-1 0 0 0,0 0 0 0 0,1-1 0 0 0,1 0 0 0 0,1-1-1 0 0,23 27 1 0 0,-50-114 871 0 0,0 9 248 0 0,3-1 1 0 0,3 0 0 0 0,2-1 0 0 0,2-67 0 0 0,5 90-777 0 0,1 1-1 0 0,2 0 1 0 0,1 0 0 0 0,2 0 0 0 0,1 0-1 0 0,2 1 1 0 0,1 1 0 0 0,19-36-1 0 0,-28 64-90 0 0,0-1-1 0 0,1 1 0 0 0,-1 0 0 0 0,1 0 1 0 0,0 0-1 0 0,1 0 0 0 0,-1 1 0 0 0,1-1 1 0 0,8-5-1 0 0,-11 9 2 0 0,-1 0 0 0 0,1 0 0 0 0,-1 1 0 0 0,1-1 0 0 0,-1 0 0 0 0,1 1 0 0 0,0-1 0 0 0,-1 1 0 0 0,1-1 0 0 0,0 1 0 0 0,-1 0 0 0 0,1 0 0 0 0,0 0 0 0 0,0 0 0 0 0,-1 0 0 0 0,1 0 0 0 0,0 0 0 0 0,0 1 0 0 0,-1-1 0 0 0,1 1 0 0 0,0-1 0 0 0,-1 1 0 0 0,1-1 0 0 0,-1 1 0 0 0,1 0 0 0 0,-1 0 0 0 0,1 0 0 0 0,-1 0 0 0 0,1 0 0 0 0,-1 0 0 0 0,0 0 0 0 0,0 0 0 0 0,0 1 0 0 0,1-1 0 0 0,-1 0 0 0 0,0 1 0 0 0,-1-1 0 0 0,1 1 0 0 0,1 1 0 0 0,0 2 45 0 0,0 0 0 0 0,0 0 0 0 0,0 0 0 0 0,0 0 1 0 0,-1 0-1 0 0,0 0 0 0 0,0 0 0 0 0,-1 0 0 0 0,1 1 0 0 0,-1-1 1 0 0,0 0-1 0 0,0 0 0 0 0,-1 1 0 0 0,-1 7 0 0 0,-2 1-24 0 0,1 0-1 0 0,-2 1 0 0 0,-11 24 1 0 0,-1-7-1007 0 0,-1-1-1 0 0,-37 47 1 0 0,40-54-1004 0 0,12-19 606 0 0,0 0 1 0 0,0 0-1 0 0,0-1 1 0 0,-8 10-1 0 0</inkml:trace>
+</inkml:ink>
+</file>
+
+<file path=ppt/ink/ink4.xml><?xml version="1.0" encoding="utf-8"?>
+<inkml:ink xmlns:inkml="http://www.w3.org/2003/InkML">
+  <inkml:definitions>
+    <inkml:context xml:id="ctx0">
+      <inkml:inkSource xml:id="inkSrc0">
+        <inkml:traceFormat>
+          <inkml:channel name="X" type="integer" min="-2.14748E9" max="2.14748E9" units="cm"/>
+          <inkml:channel name="Y" type="integer" min="-2.14748E9" max="2.14748E9" units="cm"/>
+          <inkml:channel name="F" type="integer" max="32767" units="dev"/>
+          <inkml:channel name="OA" type="integer" max="360" units="deg"/>
+          <inkml:channel name="OE" type="integer" max="90" units="deg"/>
+        </inkml:traceFormat>
+        <inkml:channelProperties>
+          <inkml:channelProperty channel="X" name="resolution" value="1000" units="1/cm"/>
+          <inkml:channelProperty channel="Y" name="resolution" value="1000" units="1/cm"/>
+          <inkml:channelProperty channel="F" name="resolution" value="0" units="1/dev"/>
+          <inkml:channelProperty channel="OA" name="resolution" value="1000" units="1/deg"/>
+          <inkml:channelProperty channel="OE" name="resolution" value="1000" units="1/deg"/>
+        </inkml:channelProperties>
+      </inkml:inkSource>
+      <inkml:timestamp xml:id="ts0" timeString="2026-10-04T03:50:45.421"/>
+    </inkml:context>
+    <inkml:brush xml:id="br0">
+      <inkml:brushProperty name="width" value="0.1" units="cm"/>
+      <inkml:brushProperty name="height" value="0.1" units="cm"/>
+    </inkml:brush>
+  </inkml:definitions>
+  <inkml:trace contextRef="#ctx0" brushRef="#br0">14 19 736 0 0,'7'-18'2470'0'0,"-6"34"-401"0"0,-2-1-2108 0 0,-9 229 2254 0 0,-1 0-1912 0 0,11-191-455 0 0,2 96-981 0 0,0-124 242 0 0,1 0 0 0 0,1-1 0 0 0,14 46 1 0 0,-4-39-391 0 0,3-10 128 0 0</inkml:trace>
+</inkml:ink>
+</file>
+
+<file path=ppt/ink/ink40.xml><?xml version="1.0" encoding="utf-8"?>
+<inkml:ink xmlns:inkml="http://www.w3.org/2003/InkML">
+  <inkml:definitions>
+    <inkml:context xml:id="ctx0">
+      <inkml:inkSource xml:id="inkSrc0">
+        <inkml:traceFormat>
+          <inkml:channel name="X" type="integer" min="-2.14748E9" max="2.14748E9" units="cm"/>
+          <inkml:channel name="Y" type="integer" min="-2.14748E9" max="2.14748E9" units="cm"/>
+          <inkml:channel name="F" type="integer" max="32767" units="dev"/>
+          <inkml:channel name="OA" type="integer" max="360" units="deg"/>
+          <inkml:channel name="OE" type="integer" max="90" units="deg"/>
+        </inkml:traceFormat>
+        <inkml:channelProperties>
+          <inkml:channelProperty channel="X" name="resolution" value="1000" units="1/cm"/>
+          <inkml:channelProperty channel="Y" name="resolution" value="1000" units="1/cm"/>
+          <inkml:channelProperty channel="F" name="resolution" value="0" units="1/dev"/>
+          <inkml:channelProperty channel="OA" name="resolution" value="1000" units="1/deg"/>
+          <inkml:channelProperty channel="OE" name="resolution" value="1000" units="1/deg"/>
+        </inkml:channelProperties>
+      </inkml:inkSource>
+      <inkml:timestamp xml:id="ts0" timeString="2026-10-04T03:51:05.922"/>
+    </inkml:context>
+    <inkml:brush xml:id="br0">
+      <inkml:brushProperty name="width" value="0.1" units="cm"/>
+      <inkml:brushProperty name="height" value="0.1" units="cm"/>
+    </inkml:brush>
+  </inkml:definitions>
+  <inkml:trace contextRef="#ctx0" brushRef="#br0">60 0 636 0 0,'0'6'1256'0'0,"-3"7"136"0"0,-4 3 112 0 0,-4 3-391 0 0,1 3-349 0 0,3 0-232 0 0,0 6-148 0 0,0 1-140 0 0,3-1-108 0 0,1 0-88 0 0,3 1-188 0 0,0-4-280 0 0,7-3-320 0 0,0 0-424 0 0,3-6-229 0 0,1-7-91 0 0,-1-5 96 0 0,-3-4 220 0 0</inkml:trace>
+</inkml:ink>
+</file>
+
+<file path=ppt/ink/ink41.xml><?xml version="1.0" encoding="utf-8"?>
+<inkml:ink xmlns:inkml="http://www.w3.org/2003/InkML">
+  <inkml:definitions>
+    <inkml:context xml:id="ctx0">
+      <inkml:inkSource xml:id="inkSrc0">
+        <inkml:traceFormat>
+          <inkml:channel name="X" type="integer" min="-2.14748E9" max="2.14748E9" units="cm"/>
+          <inkml:channel name="Y" type="integer" min="-2.14748E9" max="2.14748E9" units="cm"/>
+          <inkml:channel name="F" type="integer" max="32767" units="dev"/>
+          <inkml:channel name="OA" type="integer" max="360" units="deg"/>
+          <inkml:channel name="OE" type="integer" max="90" units="deg"/>
+        </inkml:traceFormat>
+        <inkml:channelProperties>
+          <inkml:channelProperty channel="X" name="resolution" value="1000" units="1/cm"/>
+          <inkml:channelProperty channel="Y" name="resolution" value="1000" units="1/cm"/>
+          <inkml:channelProperty channel="F" name="resolution" value="0" units="1/dev"/>
+          <inkml:channelProperty channel="OA" name="resolution" value="1000" units="1/deg"/>
+          <inkml:channelProperty channel="OE" name="resolution" value="1000" units="1/deg"/>
+        </inkml:channelProperties>
+      </inkml:inkSource>
+      <inkml:timestamp xml:id="ts0" timeString="2026-10-04T03:51:06.082"/>
+    </inkml:context>
+    <inkml:brush xml:id="br0">
+      <inkml:brushProperty name="width" value="0.1" units="cm"/>
+      <inkml:brushProperty name="height" value="0.1" units="cm"/>
+    </inkml:brush>
+  </inkml:definitions>
+  <inkml:trace contextRef="#ctx0" brushRef="#br0">25 86 12 0 0,'-3'-19'856'0'0,"-1"3"52"0"0,-3 3 32 0 0,4 4-368 0 0,-4-1-236 0 0,7 4-152 0 0,0 3-96 0 0,3-3-96 0 0,4 6-100 0 0,7-4-88 0 0,0 4-88 0 0,7 4-104 0 0,0 2-108 0 0,4 3-72 0 0,-1 4-20 0 0,1 6 8 0 0,-1 0 68 0 0</inkml:trace>
+</inkml:ink>
+</file>
+
+<file path=ppt/ink/ink42.xml><?xml version="1.0" encoding="utf-8"?>
+<inkml:ink xmlns:inkml="http://www.w3.org/2003/InkML">
+  <inkml:definitions>
+    <inkml:context xml:id="ctx0">
+      <inkml:inkSource xml:id="inkSrc0">
+        <inkml:traceFormat>
+          <inkml:channel name="X" type="integer" min="-2.14748E9" max="2.14748E9" units="cm"/>
+          <inkml:channel name="Y" type="integer" min="-2.14748E9" max="2.14748E9" units="cm"/>
+          <inkml:channel name="F" type="integer" max="32767" units="dev"/>
+          <inkml:channel name="OA" type="integer" max="360" units="deg"/>
+          <inkml:channel name="OE" type="integer" max="90" units="deg"/>
+        </inkml:traceFormat>
+        <inkml:channelProperties>
+          <inkml:channelProperty channel="X" name="resolution" value="1000" units="1/cm"/>
+          <inkml:channelProperty channel="Y" name="resolution" value="1000" units="1/cm"/>
+          <inkml:channelProperty channel="F" name="resolution" value="0" units="1/dev"/>
+          <inkml:channelProperty channel="OA" name="resolution" value="1000" units="1/deg"/>
+          <inkml:channelProperty channel="OE" name="resolution" value="1000" units="1/deg"/>
+        </inkml:channelProperties>
+      </inkml:inkSource>
+      <inkml:timestamp xml:id="ts0" timeString="2026-10-04T03:51:06.274"/>
+    </inkml:context>
+    <inkml:brush xml:id="br0">
+      <inkml:brushProperty name="width" value="0.1" units="cm"/>
+      <inkml:brushProperty name="height" value="0.1" units="cm"/>
+    </inkml:brush>
+  </inkml:definitions>
+  <inkml:trace contextRef="#ctx0" brushRef="#br0">0 66 376 0 0,'7'37'968'0'0,"-2"0"1"0"0,0 45-1 0 0,-4-21 4494 0 0,4-171-221 0 0,-2 86-6080 0 0,1 1 1 0 0,12-40-1 0 0,-14 58 148 0 0,1 1-1 0 0,0-1 1 0 0,-1 1-1 0 0,2-1 1 0 0,-1 1-1 0 0,0 0 1 0 0,1 0-1 0 0,0 1 1 0 0,-1-1-1 0 0,2 1 1 0 0,-1 0-1 0 0,8-5 1 0 0,-1 1-800 0 0</inkml:trace>
+</inkml:ink>
+</file>
+
+<file path=ppt/ink/ink43.xml><?xml version="1.0" encoding="utf-8"?>
+<inkml:ink xmlns:inkml="http://www.w3.org/2003/InkML">
+  <inkml:definitions>
+    <inkml:context xml:id="ctx0">
+      <inkml:inkSource xml:id="inkSrc0">
+        <inkml:traceFormat>
+          <inkml:channel name="X" type="integer" min="-2.14748E9" max="2.14748E9" units="cm"/>
+          <inkml:channel name="Y" type="integer" min="-2.14748E9" max="2.14748E9" units="cm"/>
+          <inkml:channel name="F" type="integer" max="32767" units="dev"/>
+          <inkml:channel name="OA" type="integer" max="360" units="deg"/>
+          <inkml:channel name="OE" type="integer" max="90" units="deg"/>
+        </inkml:traceFormat>
+        <inkml:channelProperties>
+          <inkml:channelProperty channel="X" name="resolution" value="1000" units="1/cm"/>
+          <inkml:channelProperty channel="Y" name="resolution" value="1000" units="1/cm"/>
+          <inkml:channelProperty channel="F" name="resolution" value="0" units="1/dev"/>
+          <inkml:channelProperty channel="OA" name="resolution" value="1000" units="1/deg"/>
+          <inkml:channelProperty channel="OE" name="resolution" value="1000" units="1/deg"/>
+        </inkml:channelProperties>
+      </inkml:inkSource>
+      <inkml:timestamp xml:id="ts0" timeString="2026-10-04T03:51:06.574"/>
+    </inkml:context>
+    <inkml:brush xml:id="br0">
+      <inkml:brushProperty name="width" value="0.1" units="cm"/>
+      <inkml:brushProperty name="height" value="0.1" units="cm"/>
+    </inkml:brush>
+  </inkml:definitions>
+  <inkml:trace contextRef="#ctx0" brushRef="#br0">91 0 636 0 0,'0'1'140'0'0,"0"0"0"0"0,-1 1-1 0 0,1-1 1 0 0,0 0 0 0 0,-1 0-1 0 0,1 0 1 0 0,-1 0 0 0 0,1 0 0 0 0,-1 0-1 0 0,1 0 1 0 0,-1 0 0 0 0,0 0 0 0 0,1 0-1 0 0,-1 0 1 0 0,0 0 0 0 0,0 0 0 0 0,-1 1-1 0 0,-22 14 2021 0 0,-1 2-353 0 0,3 11-704 0 0,21-27-1062 0 0,0-1 1 0 0,0 1-1 0 0,0 0 1 0 0,0 0 0 0 0,0 0-1 0 0,1-1 1 0 0,-1 1-1 0 0,1 0 1 0 0,-1 0 0 0 0,1 0-1 0 0,-1 0 1 0 0,1 0-1 0 0,0 0 1 0 0,0 0 0 0 0,0 4-1 0 0,1-6-32 0 0,0 1 0 0 0,-1 0 0 0 0,1-1 0 0 0,-1 1 0 0 0,1-1 0 0 0,0 1 0 0 0,-1-1 0 0 0,1 1 0 0 0,0-1 0 0 0,0 1 0 0 0,0-1 0 0 0,-1 0 0 0 0,1 1 0 0 0,0-1 0 0 0,0 0 0 0 0,0 0 0 0 0,0 0 0 0 0,-1 0 0 0 0,1 0 0 0 0,0 1 0 0 0,0-2 0 0 0,0 1 0 0 0,0 0 0 0 0,0 0 0 0 0,-1 0 0 0 0,1 0 0 0 0,0 0 0 0 0,0-1 0 0 0,0 1 0 0 0,-1 0 0 0 0,1-1 0 0 0,0 1 0 0 0,1-1 0 0 0,29-13 739 0 0,-31 14-734 0 0,3-1 242 0 0,0-1 1 0 0,0 1-1 0 0,0-1 0 0 0,1 1 0 0 0,-1 0 0 0 0,1 0 0 0 0,-1 0 0 0 0,0 1 1 0 0,1-1-1 0 0,-1 1 0 0 0,7 0 0 0 0,-8 1-160 0 0,0-1 1 0 0,0 1-1 0 0,-1-1 1 0 0,1 1-1 0 0,0 0 1 0 0,0 0-1 0 0,0 0 1 0 0,0 0-1 0 0,-1 0 0 0 0,1 0 1 0 0,0 0-1 0 0,-1 0 1 0 0,1 1-1 0 0,-1-1 1 0 0,1 1-1 0 0,-1-1 1 0 0,0 1-1 0 0,0 0 0 0 0,1-1 1 0 0,0 4-1 0 0,9 15-57 0 0,-5-6-153 0 0,2-1 1 0 0,11 16-1 0 0,3-7-2719 0 0,-19-20 2130 0 0,-1-1 0 0 0,1 1 0 0 0,0-1 0 0 0,-1 0 1 0 0,1 1-1 0 0,0-1 0 0 0,0-1 0 0 0,3 2 0 0 0,-5-2 459 0 0,0 0 0 0 0,0 0 0 0 0,-1 0 0 0 0,1 0 0 0 0,0 0-1 0 0,0 0 1 0 0,0 0 0 0 0,0 0 0 0 0,0 0 0 0 0,0-1 0 0 0,-1 1 0 0 0,1 0 0 0 0,0 0 0 0 0,0-1 0 0 0,0 1 0 0 0,0-1 0 0 0,9-5-1183 0 0</inkml:trace>
+</inkml:ink>
+</file>
+
+<file path=ppt/ink/ink44.xml><?xml version="1.0" encoding="utf-8"?>
+<inkml:ink xmlns:inkml="http://www.w3.org/2003/InkML">
+  <inkml:definitions>
+    <inkml:context xml:id="ctx0">
+      <inkml:inkSource xml:id="inkSrc0">
+        <inkml:traceFormat>
+          <inkml:channel name="X" type="integer" min="-2.14748E9" max="2.14748E9" units="cm"/>
+          <inkml:channel name="Y" type="integer" min="-2.14748E9" max="2.14748E9" units="cm"/>
+          <inkml:channel name="F" type="integer" max="32767" units="dev"/>
+          <inkml:channel name="OA" type="integer" max="360" units="deg"/>
+          <inkml:channel name="OE" type="integer" max="90" units="deg"/>
+        </inkml:traceFormat>
+        <inkml:channelProperties>
+          <inkml:channelProperty channel="X" name="resolution" value="1000" units="1/cm"/>
+          <inkml:channelProperty channel="Y" name="resolution" value="1000" units="1/cm"/>
+          <inkml:channelProperty channel="F" name="resolution" value="0" units="1/dev"/>
+          <inkml:channelProperty channel="OA" name="resolution" value="1000" units="1/deg"/>
+          <inkml:channelProperty channel="OE" name="resolution" value="1000" units="1/deg"/>
+        </inkml:channelProperties>
+      </inkml:inkSource>
+      <inkml:timestamp xml:id="ts0" timeString="2026-10-04T03:51:06.760"/>
+    </inkml:context>
+    <inkml:brush xml:id="br0">
+      <inkml:brushProperty name="width" value="0.1" units="cm"/>
+      <inkml:brushProperty name="height" value="0.1" units="cm"/>
+    </inkml:brush>
+  </inkml:definitions>
+  <inkml:trace contextRef="#ctx0" brushRef="#br0">32 26 668 0 0,'-1'-2'188'0'0,"1"0"0"0"0,-1 0-1 0 0,0 0 1 0 0,0 0 0 0 0,0 0 0 0 0,0 1 0 0 0,0-1 0 0 0,0 0-1 0 0,-1 1 1 0 0,1-1 0 0 0,0 1 0 0 0,-3-2 0 0 0,4 3-153 0 0,0-1 1 0 0,0 1 0 0 0,-1 0-1 0 0,1 0 1 0 0,0 0 0 0 0,-1 0-1 0 0,1 0 1 0 0,0-1 0 0 0,-1 1-1 0 0,1 0 1 0 0,0 0 0 0 0,0 0-1 0 0,-1 0 1 0 0,1 0 0 0 0,0 0-1 0 0,-1 0 1 0 0,1 0 0 0 0,0 0-1 0 0,-1 0 1 0 0,1 0 0 0 0,0 0-1 0 0,-1 0 1 0 0,1 0 0 0 0,0 1-1 0 0,-1-1 1 0 0,1 0 0 0 0,0 0-1 0 0,0 0 1 0 0,-1 1 0 0 0,0-1-8 0 0,1 1 1 0 0,-1 0-1 0 0,0 0 1 0 0,1 0-1 0 0,-1 0 1 0 0,1 0-1 0 0,0 0 1 0 0,-1 0 0 0 0,1 0-1 0 0,0 0 1 0 0,-1 0-1 0 0,1 1 1 0 0,0 1-1 0 0,0 9 78 0 0,1 1-1 0 0,0-1 1 0 0,0 1 0 0 0,2-1 0 0 0,-1 0-1 0 0,8 20 1 0 0,-1 0 54 0 0,86 351-3175 0 0,-86-341 1984 0 0,-4-1 70 0 0</inkml:trace>
+</inkml:ink>
+</file>
+
+<file path=ppt/ink/ink45.xml><?xml version="1.0" encoding="utf-8"?>
+<inkml:ink xmlns:inkml="http://www.w3.org/2003/InkML">
+  <inkml:definitions>
+    <inkml:context xml:id="ctx0">
+      <inkml:inkSource xml:id="inkSrc0">
+        <inkml:traceFormat>
+          <inkml:channel name="X" type="integer" min="-2.14748E9" max="2.14748E9" units="cm"/>
+          <inkml:channel name="Y" type="integer" min="-2.14748E9" max="2.14748E9" units="cm"/>
+          <inkml:channel name="F" type="integer" max="32767" units="dev"/>
+          <inkml:channel name="OA" type="integer" max="360" units="deg"/>
+          <inkml:channel name="OE" type="integer" max="90" units="deg"/>
+        </inkml:traceFormat>
+        <inkml:channelProperties>
+          <inkml:channelProperty channel="X" name="resolution" value="1000" units="1/cm"/>
+          <inkml:channelProperty channel="Y" name="resolution" value="1000" units="1/cm"/>
+          <inkml:channelProperty channel="F" name="resolution" value="0" units="1/dev"/>
+          <inkml:channelProperty channel="OA" name="resolution" value="1000" units="1/deg"/>
+          <inkml:channelProperty channel="OE" name="resolution" value="1000" units="1/deg"/>
+        </inkml:channelProperties>
+      </inkml:inkSource>
+      <inkml:timestamp xml:id="ts0" timeString="2026-10-04T03:51:06.965"/>
+    </inkml:context>
+    <inkml:brush xml:id="br0">
+      <inkml:brushProperty name="width" value="0.1" units="cm"/>
+      <inkml:brushProperty name="height" value="0.1" units="cm"/>
+    </inkml:brush>
+  </inkml:definitions>
+  <inkml:trace contextRef="#ctx0" brushRef="#br0">29 269 396 0 0,'-7'-10'1092'0'0,"-4"-2"136"0"0,4 2 88 0 0,4-2-368 0 0,6-1-271 0 0,4 0-165 0 0,7-2-148 0 0,4-4-128 0 0,6 3-104 0 0,4-3-116 0 0,0 0-192 0 0,4 0-228 0 0,3 3-248 0 0,-4-2-321 0 0,4 2-227 0 0,-3 0-68 0 0,-4 3 88 0 0,-3 1 176 0 0</inkml:trace>
+</inkml:ink>
+</file>
+
+<file path=ppt/ink/ink46.xml><?xml version="1.0" encoding="utf-8"?>
+<inkml:ink xmlns:inkml="http://www.w3.org/2003/InkML">
+  <inkml:definitions>
+    <inkml:context xml:id="ctx0">
+      <inkml:inkSource xml:id="inkSrc0">
+        <inkml:traceFormat>
+          <inkml:channel name="X" type="integer" min="-2.14748E9" max="2.14748E9" units="cm"/>
+          <inkml:channel name="Y" type="integer" min="-2.14748E9" max="2.14748E9" units="cm"/>
+          <inkml:channel name="F" type="integer" max="32767" units="dev"/>
+          <inkml:channel name="OA" type="integer" max="360" units="deg"/>
+          <inkml:channel name="OE" type="integer" max="90" units="deg"/>
+        </inkml:traceFormat>
+        <inkml:channelProperties>
+          <inkml:channelProperty channel="X" name="resolution" value="1000" units="1/cm"/>
+          <inkml:channelProperty channel="Y" name="resolution" value="1000" units="1/cm"/>
+          <inkml:channelProperty channel="F" name="resolution" value="0" units="1/dev"/>
+          <inkml:channelProperty channel="OA" name="resolution" value="1000" units="1/deg"/>
+          <inkml:channelProperty channel="OE" name="resolution" value="1000" units="1/deg"/>
+        </inkml:channelProperties>
+      </inkml:inkSource>
+      <inkml:timestamp xml:id="ts0" timeString="2026-10-04T03:51:07.077"/>
+    </inkml:context>
+    <inkml:brush xml:id="br0">
+      <inkml:brushProperty name="width" value="0.1" units="cm"/>
+      <inkml:brushProperty name="height" value="0.1" units="cm"/>
+    </inkml:brush>
+  </inkml:definitions>
+  <inkml:trace contextRef="#ctx0" brushRef="#br0">1 1 628 0 0,'7'19'944'0'0,"-4"3"60"0"0,1-3-248 0 0,-1 3-236 0 0,1 0-164 0 0,-1 0-136 0 0,1 0-112 0 0,-1-3-144 0 0,1 0-176 0 0,-1-3-236 0 0,1-4-296 0 0,-1-2-152 0 0,1-1-64 0 0,-1-6 40 0 0</inkml:trace>
+</inkml:ink>
+</file>
+
+<file path=ppt/ink/ink47.xml><?xml version="1.0" encoding="utf-8"?>
+<inkml:ink xmlns:inkml="http://www.w3.org/2003/InkML">
+  <inkml:definitions>
+    <inkml:context xml:id="ctx0">
+      <inkml:inkSource xml:id="inkSrc0">
+        <inkml:traceFormat>
+          <inkml:channel name="X" type="integer" min="-2.14748E9" max="2.14748E9" units="cm"/>
+          <inkml:channel name="Y" type="integer" min="-2.14748E9" max="2.14748E9" units="cm"/>
+          <inkml:channel name="F" type="integer" max="32767" units="dev"/>
+          <inkml:channel name="OA" type="integer" max="360" units="deg"/>
+          <inkml:channel name="OE" type="integer" max="90" units="deg"/>
+        </inkml:traceFormat>
+        <inkml:channelProperties>
+          <inkml:channelProperty channel="X" name="resolution" value="1000" units="1/cm"/>
+          <inkml:channelProperty channel="Y" name="resolution" value="1000" units="1/cm"/>
+          <inkml:channelProperty channel="F" name="resolution" value="0" units="1/dev"/>
+          <inkml:channelProperty channel="OA" name="resolution" value="1000" units="1/deg"/>
+          <inkml:channelProperty channel="OE" name="resolution" value="1000" units="1/deg"/>
+        </inkml:channelProperties>
+      </inkml:inkSource>
+      <inkml:timestamp xml:id="ts0" timeString="2026-10-04T03:51:07.221"/>
+    </inkml:context>
+    <inkml:brush xml:id="br0">
+      <inkml:brushProperty name="width" value="0.1" units="cm"/>
+      <inkml:brushProperty name="height" value="0.1" units="cm"/>
+    </inkml:brush>
+  </inkml:definitions>
+  <inkml:trace contextRef="#ctx0" brushRef="#br0">67 63 144 0 0,'-10'-19'948'0'0,"-1"7"48"0"0,-3 2 24 0 0,4 1-408 0 0,-1 3-428 0 0,4 2-332 0 0,4 1-284 0 0,10 3-2072 0 0</inkml:trace>
+</inkml:ink>
+</file>
+
+<file path=ppt/ink/ink48.xml><?xml version="1.0" encoding="utf-8"?>
+<inkml:ink xmlns:inkml="http://www.w3.org/2003/InkML">
+  <inkml:definitions>
+    <inkml:context xml:id="ctx0">
+      <inkml:inkSource xml:id="inkSrc0">
+        <inkml:traceFormat>
+          <inkml:channel name="X" type="integer" min="-2.14748E9" max="2.14748E9" units="cm"/>
+          <inkml:channel name="Y" type="integer" min="-2.14748E9" max="2.14748E9" units="cm"/>
+          <inkml:channel name="F" type="integer" max="32767" units="dev"/>
+          <inkml:channel name="OA" type="integer" max="360" units="deg"/>
+          <inkml:channel name="OE" type="integer" max="90" units="deg"/>
+        </inkml:traceFormat>
+        <inkml:channelProperties>
+          <inkml:channelProperty channel="X" name="resolution" value="1000" units="1/cm"/>
+          <inkml:channelProperty channel="Y" name="resolution" value="1000" units="1/cm"/>
+          <inkml:channelProperty channel="F" name="resolution" value="0" units="1/dev"/>
+          <inkml:channelProperty channel="OA" name="resolution" value="1000" units="1/deg"/>
+          <inkml:channelProperty channel="OE" name="resolution" value="1000" units="1/deg"/>
+        </inkml:channelProperties>
+      </inkml:inkSource>
+      <inkml:timestamp xml:id="ts0" timeString="2026-10-04T03:51:07.537"/>
+    </inkml:context>
+    <inkml:brush xml:id="br0">
+      <inkml:brushProperty name="width" value="0.1" units="cm"/>
+      <inkml:brushProperty name="height" value="0.1" units="cm"/>
+    </inkml:brush>
+  </inkml:definitions>
+  <inkml:trace contextRef="#ctx0" brushRef="#br0">148 1 708 0 0,'-20'24'1952'0'0,"-21"34"0"0"0,35-50-1651 0 0,1 1 0 0 0,1 0 0 0 0,-1 0 0 0 0,2 1 0 0 0,-1-1 0 0 0,1 1 0 0 0,1 0 0 0 0,-2 10 0 0 0,3-18-277 0 0,1 1 0 0 0,0-1 1 0 0,0 0-1 0 0,0 0 0 0 0,0 1 1 0 0,1-1-1 0 0,-1 0 0 0 0,1 0 1 0 0,-1 0-1 0 0,1 1 0 0 0,0-1 1 0 0,-1 0-1 0 0,1 0 0 0 0,0 0 1 0 0,0 0-1 0 0,1 0 0 0 0,-1-1 1 0 0,0 1-1 0 0,1 0 0 0 0,-1-1 1 0 0,1 1-1 0 0,0 0 0 0 0,-1-1 1 0 0,1 0-1 0 0,0 1 0 0 0,0-1 1 0 0,0 0-1 0 0,0 0 0 0 0,0 0 1 0 0,0 0-1 0 0,0-1 0 0 0,0 1 1 0 0,0 0-1 0 0,0-1 0 0 0,1 1 1 0 0,-1-1-1 0 0,3 0 0 0 0,2 1-10 0 0,1 0-1 0 0,-1-1 0 0 0,1 0 1 0 0,-1-1-1 0 0,1 0 0 0 0,-1 0 1 0 0,1 0-1 0 0,-1-1 0 0 0,0 0 1 0 0,8-3-1 0 0,-12 3 76 0 0,1 1-1 0 0,-1-1 1 0 0,0 0 0 0 0,0 0 0 0 0,0 0-1 0 0,-1 0 1 0 0,1 0 0 0 0,0-1-1 0 0,-1 1 1 0 0,1-1 0 0 0,-1 0-1 0 0,2-4 1 0 0,-3 6-6 0 0,0 0-1 0 0,-1-1 1 0 0,1 1-1 0 0,-1 0 1 0 0,1-1-1 0 0,-1 1 1 0 0,0-1 0 0 0,0 1-1 0 0,0 0 1 0 0,1-1-1 0 0,-1 1 1 0 0,-1-1-1 0 0,1 1 1 0 0,0-1-1 0 0,0 1 1 0 0,0-1 0 0 0,-1 1-1 0 0,1 0 1 0 0,-1-1-1 0 0,1 1 1 0 0,-1 0-1 0 0,0-1 1 0 0,1 1 0 0 0,-1 0-1 0 0,0 0 1 0 0,0-1-1 0 0,0 1 1 0 0,0 0-1 0 0,0 0 1 0 0,0 0 0 0 0,-2-1-1 0 0,-3-3-57 0 0,0 1 0 0 0,0-1 1 0 0,-1 2-1 0 0,0-1 0 0 0,1 1 0 0 0,-1-1 0 0 0,0 2 0 0 0,-1-1 1 0 0,1 1-1 0 0,0 0 0 0 0,-14-1 0 0 0,4 2-2148 0 0,-1 0-1 0 0,0 1 1 0 0,-33 4-1 0 0,41-4 424 0 0,2-3 237 0 0</inkml:trace>
+</inkml:ink>
+</file>
+
+<file path=ppt/ink/ink49.xml><?xml version="1.0" encoding="utf-8"?>
+<inkml:ink xmlns:inkml="http://www.w3.org/2003/InkML">
+  <inkml:definitions>
+    <inkml:context xml:id="ctx0">
+      <inkml:inkSource xml:id="inkSrc0">
+        <inkml:traceFormat>
+          <inkml:channel name="X" type="integer" min="-2.14748E9" max="2.14748E9" units="cm"/>
+          <inkml:channel name="Y" type="integer" min="-2.14748E9" max="2.14748E9" units="cm"/>
+          <inkml:channel name="F" type="integer" max="32767" units="dev"/>
+          <inkml:channel name="OA" type="integer" max="360" units="deg"/>
+          <inkml:channel name="OE" type="integer" max="90" units="deg"/>
+        </inkml:traceFormat>
+        <inkml:channelProperties>
+          <inkml:channelProperty channel="X" name="resolution" value="1000" units="1/cm"/>
+          <inkml:channelProperty channel="Y" name="resolution" value="1000" units="1/cm"/>
+          <inkml:channelProperty channel="F" name="resolution" value="0" units="1/dev"/>
+          <inkml:channelProperty channel="OA" name="resolution" value="1000" units="1/deg"/>
+          <inkml:channelProperty channel="OE" name="resolution" value="1000" units="1/deg"/>
+        </inkml:channelProperties>
+      </inkml:inkSource>
+      <inkml:timestamp xml:id="ts0" timeString="2026-10-04T03:51:07.903"/>
+    </inkml:context>
+    <inkml:brush xml:id="br0">
+      <inkml:brushProperty name="width" value="0.1" units="cm"/>
+      <inkml:brushProperty name="height" value="0.1" units="cm"/>
+    </inkml:brush>
+  </inkml:definitions>
+  <inkml:trace contextRef="#ctx0" brushRef="#br0">1 1 408 0 0,'1'0'173'0'0,"0"1"1"0"0,0-1-1 0 0,0 1 0 0 0,0-1 1 0 0,0 1-1 0 0,0-1 0 0 0,0 1 0 0 0,0 0 1 0 0,0-1-1 0 0,0 1 0 0 0,0 0 1 0 0,0 0-1 0 0,-1 0 0 0 0,1-1 0 0 0,0 1 1 0 0,0 0-1 0 0,-1 0 0 0 0,1 0 1 0 0,0 2-1 0 0,12 24 153 0 0,-10-20-63 0 0,50 132 1696 0 0,-14-33 1045 0 0,-27-87-1276 0 0,-5-17-436 0 0,-2-13-501 0 0,11-76 700 0 0,-8 36-1038 0 0,-8 51-449 0 0,0 0 1 0 0,0 0-1 0 0,0-1 0 0 0,0 1 1 0 0,0 0-1 0 0,0 0 1 0 0,0 0-1 0 0,0 0 1 0 0,0 0-1 0 0,0-1 0 0 0,0 1 1 0 0,0 0-1 0 0,0 0 1 0 0,0 0-1 0 0,0 0 0 0 0,0-1 1 0 0,0 1-1 0 0,0 0 1 0 0,0 0-1 0 0,1 0 1 0 0,-1 0-1 0 0,0 0 0 0 0,0-1 1 0 0,0 1-1 0 0,0 0 1 0 0,0 0-1 0 0,0 0 0 0 0,0 0 1 0 0,0 0-1 0 0,1 0 1 0 0,-1 0-1 0 0,0 0 1 0 0,0-1-1 0 0,0 1 0 0 0,0 0 1 0 0,0 0-1 0 0,1 0 1 0 0,-1 0-1 0 0,0 0 1 0 0,0 0-1 0 0,0 0 0 0 0,0 0 1 0 0,0 0-1 0 0,1 0 1 0 0,-1 0-1 0 0,0 0 0 0 0,0 0 1 0 0,0 0-1 0 0,1 0 1 0 0,5 9 106 0 0,6 24-45 0 0,-9-25-45 0 0,2 5-15 0 0,0 0 0 0 0,0-1 0 0 0,1 0 0 0 0,1 1 1 0 0,0-2-1 0 0,15 19 0 0 0,-19-27-95 0 0,0 0 1 0 0,0 0-1 0 0,1 0 1 0 0,-1 0-1 0 0,1 0 1 0 0,0-1-1 0 0,0 1 1 0 0,0-1 0 0 0,0 0-1 0 0,0 0 1 0 0,0-1-1 0 0,1 1 1 0 0,-1-1-1 0 0,0 0 1 0 0,1 0-1 0 0,-1-1 1 0 0,1 1-1 0 0,-1-1 1 0 0,1 0 0 0 0,0 0-1 0 0,-1 0 1 0 0,1-1-1 0 0,-1 0 1 0 0,6-1-1 0 0,5-2-657 0 0,-1-1-1 0 0,0-1 1 0 0,0 0 0 0 0,0-1-1 0 0,-1-1 1 0 0,0 0 0 0 0,19-15-1 0 0,-12 6-535 0 0,-1 0 0 0 0,0-1 0 0 0,27-36 0 0 0,-7-4-486 0 0</inkml:trace>
+</inkml:ink>
+</file>
+
+<file path=ppt/ink/ink5.xml><?xml version="1.0" encoding="utf-8"?>
+<inkml:ink xmlns:inkml="http://www.w3.org/2003/InkML">
+  <inkml:definitions>
+    <inkml:context xml:id="ctx0">
+      <inkml:inkSource xml:id="inkSrc0">
+        <inkml:traceFormat>
+          <inkml:channel name="X" type="integer" min="-2.14748E9" max="2.14748E9" units="cm"/>
+          <inkml:channel name="Y" type="integer" min="-2.14748E9" max="2.14748E9" units="cm"/>
+          <inkml:channel name="F" type="integer" max="32767" units="dev"/>
+          <inkml:channel name="OA" type="integer" max="360" units="deg"/>
+          <inkml:channel name="OE" type="integer" max="90" units="deg"/>
+        </inkml:traceFormat>
+        <inkml:channelProperties>
+          <inkml:channelProperty channel="X" name="resolution" value="1000" units="1/cm"/>
+          <inkml:channelProperty channel="Y" name="resolution" value="1000" units="1/cm"/>
+          <inkml:channelProperty channel="F" name="resolution" value="0" units="1/dev"/>
+          <inkml:channelProperty channel="OA" name="resolution" value="1000" units="1/deg"/>
+          <inkml:channelProperty channel="OE" name="resolution" value="1000" units="1/deg"/>
+        </inkml:channelProperties>
+      </inkml:inkSource>
+      <inkml:timestamp xml:id="ts0" timeString="2026-10-04T03:50:45.689"/>
+    </inkml:context>
+    <inkml:brush xml:id="br0">
+      <inkml:brushProperty name="width" value="0.1" units="cm"/>
+      <inkml:brushProperty name="height" value="0.1" units="cm"/>
+    </inkml:brush>
+  </inkml:definitions>
+  <inkml:trace contextRef="#ctx0" brushRef="#br0">161 2 344 0 0,'-1'0'75'0'0,"1"-1"0"0"0,-1 1 0 0 0,0 0-1 0 0,1 0 1 0 0,-1 0 0 0 0,0 0 0 0 0,0-1 0 0 0,1 1 0 0 0,-1 0 0 0 0,0 0-1 0 0,1 1 1 0 0,-1-1 0 0 0,0 0 0 0 0,1 0 0 0 0,-1 0 0 0 0,0 0 0 0 0,1 1-1 0 0,-1-1 1 0 0,0 0 0 0 0,1 0 0 0 0,-1 1 0 0 0,1-1 0 0 0,-1 1 0 0 0,0-1-1 0 0,1 0 1 0 0,-1 1 0 0 0,1-1 0 0 0,-1 1 0 0 0,1-1 0 0 0,0 1 0 0 0,-1 0-1 0 0,-18 22 590 0 0,16-20-494 0 0,-13 20 6 0 0,1 1 1 0 0,1 0-1 0 0,1 1 1 0 0,1 0-1 0 0,1 1 0 0 0,2 0 1 0 0,0 1-1 0 0,-7 40 0 0 0,15-59-160 0 0,0 0-1 0 0,0 0 0 0 0,1 0 0 0 0,0 0 0 0 0,0 0 0 0 0,1 1 0 0 0,0-1 0 0 0,0 0 0 0 0,4 9 0 0 0,-5-15-9 0 0,1 0 0 0 0,0 0-1 0 0,0-1 1 0 0,0 1-1 0 0,0 0 1 0 0,0 0 0 0 0,0-1-1 0 0,0 1 1 0 0,0-1-1 0 0,1 1 1 0 0,-1-1 0 0 0,0 0-1 0 0,1 1 1 0 0,0-1-1 0 0,-1 0 1 0 0,1 0 0 0 0,2 1-1 0 0,-2-1 6 0 0,0-1-1 0 0,0 1 1 0 0,1-1-1 0 0,-1 0 1 0 0,0 0-1 0 0,0 0 1 0 0,1 0-1 0 0,-1 0 1 0 0,0-1-1 0 0,0 1 1 0 0,0 0-1 0 0,1-1 1 0 0,-1 0-1 0 0,0 0 1 0 0,0 1-1 0 0,0-1 1 0 0,0 0-1 0 0,3-3 1 0 0,1 1 7 0 0,0-1 0 0 0,-1 0 0 0 0,1-1 1 0 0,-1 1-1 0 0,0-1 0 0 0,0 0 0 0 0,-1 0 0 0 0,0 0 1 0 0,0-1-1 0 0,7-11 0 0 0,-6 6 40 0 0,0 1 0 0 0,-1-1 0 0 0,-1 0 0 0 0,0 0 0 0 0,4-22 0 0 0,-4 2-505 0 0,-2 0 0 0 0,-1 0 0 0 0,-8-59 0 0 0,8 79-355 0 0,-4-9-1447 0 0,1 16 1276 0 0</inkml:trace>
+</inkml:ink>
+</file>
+
+<file path=ppt/ink/ink6.xml><?xml version="1.0" encoding="utf-8"?>
+<inkml:ink xmlns:inkml="http://www.w3.org/2003/InkML">
+  <inkml:definitions>
+    <inkml:context xml:id="ctx0">
+      <inkml:inkSource xml:id="inkSrc0">
+        <inkml:traceFormat>
+          <inkml:channel name="X" type="integer" min="-2.14748E9" max="2.14748E9" units="cm"/>
+          <inkml:channel name="Y" type="integer" min="-2.14748E9" max="2.14748E9" units="cm"/>
+          <inkml:channel name="F" type="integer" max="32767" units="dev"/>
+          <inkml:channel name="OA" type="integer" max="360" units="deg"/>
+          <inkml:channel name="OE" type="integer" max="90" units="deg"/>
+        </inkml:traceFormat>
+        <inkml:channelProperties>
+          <inkml:channelProperty channel="X" name="resolution" value="1000" units="1/cm"/>
+          <inkml:channelProperty channel="Y" name="resolution" value="1000" units="1/cm"/>
+          <inkml:channelProperty channel="F" name="resolution" value="0" units="1/dev"/>
+          <inkml:channelProperty channel="OA" name="resolution" value="1000" units="1/deg"/>
+          <inkml:channelProperty channel="OE" name="resolution" value="1000" units="1/deg"/>
+        </inkml:channelProperties>
+      </inkml:inkSource>
+      <inkml:timestamp xml:id="ts0" timeString="2026-10-04T03:50:46.054"/>
+    </inkml:context>
+    <inkml:brush xml:id="br0">
+      <inkml:brushProperty name="width" value="0.1" units="cm"/>
+      <inkml:brushProperty name="height" value="0.1" units="cm"/>
+    </inkml:brush>
+  </inkml:definitions>
+  <inkml:trace contextRef="#ctx0" brushRef="#br0">1 0 452 0 0,'1'2'211'0'0,"0"-1"0"0"0,0 1 1 0 0,-1 0-1 0 0,1-1 0 0 0,-1 1 0 0 0,1 0 0 0 0,-1 0 1 0 0,0 0-1 0 0,0-1 0 0 0,1 1 0 0 0,-1 0 0 0 0,-1 0 1 0 0,1 0-1 0 0,-1 2 0 0 0,1 6 229 0 0,-3 61 1242 0 0,2 36 66 0 0,2-90-1450 0 0,0-1 0 0 0,1 1 0 0 0,1-1 0 0 0,8 25 0 0 0,-11-41-275 0 0,0 1 0 0 0,0-1-1 0 0,1 1 1 0 0,-1-1 0 0 0,0 1 0 0 0,0-1-1 0 0,0 1 1 0 0,1-1 0 0 0,-1 1 0 0 0,0-1-1 0 0,1 1 1 0 0,-1-1 0 0 0,0 0 0 0 0,1 1-1 0 0,-1-1 1 0 0,1 1 0 0 0,-1-1 0 0 0,1 0 0 0 0,-1 1-1 0 0,0-1 1 0 0,1 0 0 0 0,-1 0 0 0 0,1 0-1 0 0,0 1 1 0 0,-1-1 0 0 0,1 0 0 0 0,-1 0-1 0 0,1 0 1 0 0,0 0 0 0 0,0 0 31 0 0,0 0 1 0 0,0-1-1 0 0,1 1 1 0 0,-1 0 0 0 0,0-1-1 0 0,0 0 1 0 0,0 1-1 0 0,0-1 1 0 0,0 1-1 0 0,0-1 1 0 0,0 0-1 0 0,2-1 1 0 0,24-31 1132 0 0,-25 30-1062 0 0,39-68 1397 0 0,-28 47-792 0 0,20-28-1 0 0,-33 52-721 0 0,0 0-1 0 0,0-1 1 0 0,0 1-1 0 0,0 0 1 0 0,0 0-1 0 0,0 0 1 0 0,0 0-1 0 0,0-1 1 0 0,0 1-1 0 0,0 0 1 0 0,0 0-1 0 0,1 0 1 0 0,-1 0-1 0 0,0 0 1 0 0,0-1-1 0 0,0 1 1 0 0,0 0-1 0 0,0 0 1 0 0,0 0-1 0 0,1 0 1 0 0,-1 0-1 0 0,0 0 1 0 0,0 0-1 0 0,0 0 1 0 0,0 0-1 0 0,1 0 1 0 0,-1-1-1 0 0,0 1 1 0 0,0 0-1 0 0,0 0 1 0 0,1 0-1 0 0,-1 0 1 0 0,0 0-1 0 0,0 0 1 0 0,0 0-1 0 0,0 0 1 0 0,1 0-1 0 0,-1 1 1 0 0,0-1-1 0 0,0 0 1 0 0,0 0-1 0 0,0 0 1 0 0,1 0-1 0 0,-1 0 1 0 0,0 0-1 0 0,0 0 1 0 0,0 0-1 0 0,0 0 1 0 0,1 1-1 0 0,2 11 145 0 0,-3 26-122 0 0,0-30-1 0 0,0 0-9 0 0,0 21-531 0 0,7 56-1 0 0,-6-77-237 0 0,1 0 0 0 0,-1 0 0 0 0,2-1-1 0 0,-1 1 1 0 0,1 0 0 0 0,1-1 0 0 0,-1 1 0 0 0,1-1 0 0 0,0 0 0 0 0,1-1 0 0 0,9 12-1 0 0,-12-16 373 0 0,0 0 0 0 0,1 0 0 0 0,-1 0-1 0 0,0-1 1 0 0,1 1 0 0 0,-1-1-1 0 0,1 0 1 0 0,-1 0 0 0 0,5 2-1 0 0,10 0-971 0 0</inkml:trace>
+</inkml:ink>
+</file>
+
+<file path=ppt/ink/ink7.xml><?xml version="1.0" encoding="utf-8"?>
+<inkml:ink xmlns:inkml="http://www.w3.org/2003/InkML">
+  <inkml:definitions>
+    <inkml:context xml:id="ctx0">
+      <inkml:inkSource xml:id="inkSrc0">
+        <inkml:traceFormat>
+          <inkml:channel name="X" type="integer" min="-2.14748E9" max="2.14748E9" units="cm"/>
+          <inkml:channel name="Y" type="integer" min="-2.14748E9" max="2.14748E9" units="cm"/>
+          <inkml:channel name="F" type="integer" max="32767" units="dev"/>
+          <inkml:channel name="OA" type="integer" max="360" units="deg"/>
+          <inkml:channel name="OE" type="integer" max="90" units="deg"/>
+        </inkml:traceFormat>
+        <inkml:channelProperties>
+          <inkml:channelProperty channel="X" name="resolution" value="1000" units="1/cm"/>
+          <inkml:channelProperty channel="Y" name="resolution" value="1000" units="1/cm"/>
+          <inkml:channelProperty channel="F" name="resolution" value="0" units="1/dev"/>
+          <inkml:channelProperty channel="OA" name="resolution" value="1000" units="1/deg"/>
+          <inkml:channelProperty channel="OE" name="resolution" value="1000" units="1/deg"/>
+        </inkml:channelProperties>
+      </inkml:inkSource>
+      <inkml:timestamp xml:id="ts0" timeString="2026-10-04T03:50:46.730"/>
+    </inkml:context>
+    <inkml:brush xml:id="br0">
+      <inkml:brushProperty name="width" value="0.1" units="cm"/>
+      <inkml:brushProperty name="height" value="0.1" units="cm"/>
+    </inkml:brush>
+  </inkml:definitions>
+  <inkml:trace contextRef="#ctx0" brushRef="#br0">148 91 56 0 0,'4'-8'785'0'0,"-1"0"0"0"0,0 0 0 0 0,-1 0 0 0 0,2-9 1 0 0,0-23 9032 0 0,-3 40-9694 0 0,-12 1 253 0 0,-11-2 192 0 0,16 1-540 0 0,-1-1 0 0 0,1 1 0 0 0,0 0 0 0 0,-1 0 1 0 0,1 1-1 0 0,0 0 0 0 0,-1 0 0 0 0,1 1 0 0 0,0-1 0 0 0,0 1 0 0 0,0 0 0 0 0,0 1 0 0 0,0 0 0 0 0,-8 5 0 0 0,11-6-26 0 0,0 1 0 0 0,0 0 1 0 0,0 0-1 0 0,0 0 0 0 0,0 0 0 0 0,0 0 0 0 0,1 0 1 0 0,0 1-1 0 0,-1-1 0 0 0,-1 6 0 0 0,4-8-4 0 0,-1 1 1 0 0,1-1-1 0 0,-1 0 0 0 0,1 1 1 0 0,0-1-1 0 0,-1 0 0 0 0,1 1 0 0 0,0-1 1 0 0,0 1-1 0 0,0-1 0 0 0,0 0 1 0 0,0 1-1 0 0,1-1 0 0 0,-1 1 0 0 0,0-1 1 0 0,1 0-1 0 0,-1 1 0 0 0,0-1 0 0 0,1 0 1 0 0,0 0-1 0 0,-1 1 0 0 0,1-1 1 0 0,0 0-1 0 0,0 0 0 0 0,0 0 0 0 0,-1 0 1 0 0,1 0-1 0 0,0 0 0 0 0,0 0 1 0 0,1 0-1 0 0,-1 0 0 0 0,0 0 0 0 0,3 1 1 0 0,0 0-2 0 0,0 0 1 0 0,0 0-1 0 0,0 0 1 0 0,0 0-1 0 0,1-1 1 0 0,-1 0 0 0 0,1 0-1 0 0,-1 0 1 0 0,1 0-1 0 0,8-1 1 0 0,-1 0 2 0 0,-1-2 1 0 0,21-3-1 0 0,-22 2-13 0 0,0 1-1 0 0,0 1 0 0 0,0 0 0 0 0,0 0 0 0 0,14 1 1 0 0,-21 1 11 0 0,0 0-1 0 0,0 0 1 0 0,0 0 0 0 0,-1 0 0 0 0,1 0 0 0 0,0 1 0 0 0,-1-1-1 0 0,1 1 1 0 0,-1 0 0 0 0,0 0 0 0 0,1 0 0 0 0,-1 0 0 0 0,0 0 0 0 0,0 0-1 0 0,0 0 1 0 0,0 1 0 0 0,-1-1 0 0 0,1 1 0 0 0,-1-1 0 0 0,1 1-1 0 0,-1 0 1 0 0,1 4 0 0 0,3 6 7 0 0,-1 0-1 0 0,0 0 1 0 0,2 21 0 0 0,23 327-5 0 0,-23-229-25 0 0,-6 114-74 0 0,-6-198 77 0 0,5-44 18 0 0,0 0 0 0 0,0 0 0 0 0,0 0 0 0 0,0 0 0 0 0,-1-1 0 0 0,0 1 0 0 0,0 0 0 0 0,0-1 0 0 0,-4 6 0 0 0,5-8 2 0 0,0 0 0 0 0,0 0 1 0 0,0-1-1 0 0,0 1 1 0 0,0 0-1 0 0,-1-1 0 0 0,1 1 1 0 0,0-1-1 0 0,0 1 1 0 0,-1-1-1 0 0,1 0 0 0 0,0 1 1 0 0,-1-1-1 0 0,1 0 1 0 0,0 0-1 0 0,-1 0 0 0 0,1 0 1 0 0,-1 0-1 0 0,1 0 1 0 0,0 0-1 0 0,-1-1 0 0 0,1 1 1 0 0,0 0-1 0 0,0-1 0 0 0,-1 1 1 0 0,1-1-1 0 0,0 1 1 0 0,0-1-1 0 0,0 0 0 0 0,-1 1 1 0 0,0-3-1 0 0,-4 0 3 0 0,1-1-1 0 0,0 0 1 0 0,1 0 0 0 0,-1-1-1 0 0,-5-7 1 0 0,-8-10 43 0 0,1-2 0 0 0,1 0 0 0 0,2-1 1 0 0,0-1-1 0 0,2 0 0 0 0,1-1 0 0 0,-13-46 1 0 0,20 56-227 0 0,0-1 1 0 0,2 0-1 0 0,0 1 1 0 0,1-1-1 0 0,3-31 1 0 0,-1 35-463 0 0,1 0 1 0 0,1 1 0 0 0,1-1-1 0 0,0 1 1 0 0,0-1 0 0 0,1 1-1 0 0,14-24 1 0 0,6-6-2948 0 0,37-45 0 0 0,-37 55 2303 0 0</inkml:trace>
+</inkml:ink>
+</file>
+
+<file path=ppt/ink/ink8.xml><?xml version="1.0" encoding="utf-8"?>
+<inkml:ink xmlns:inkml="http://www.w3.org/2003/InkML">
+  <inkml:definitions>
+    <inkml:context xml:id="ctx0">
+      <inkml:inkSource xml:id="inkSrc0">
+        <inkml:traceFormat>
+          <inkml:channel name="X" type="integer" min="-2.14748E9" max="2.14748E9" units="cm"/>
+          <inkml:channel name="Y" type="integer" min="-2.14748E9" max="2.14748E9" units="cm"/>
+          <inkml:channel name="F" type="integer" max="32767" units="dev"/>
+          <inkml:channel name="OA" type="integer" max="360" units="deg"/>
+          <inkml:channel name="OE" type="integer" max="90" units="deg"/>
+        </inkml:traceFormat>
+        <inkml:channelProperties>
+          <inkml:channelProperty channel="X" name="resolution" value="1000" units="1/cm"/>
+          <inkml:channelProperty channel="Y" name="resolution" value="1000" units="1/cm"/>
+          <inkml:channelProperty channel="F" name="resolution" value="0" units="1/dev"/>
+          <inkml:channelProperty channel="OA" name="resolution" value="1000" units="1/deg"/>
+          <inkml:channelProperty channel="OE" name="resolution" value="1000" units="1/deg"/>
+        </inkml:channelProperties>
+      </inkml:inkSource>
+      <inkml:timestamp xml:id="ts0" timeString="2026-10-04T03:50:47.016"/>
+    </inkml:context>
+    <inkml:brush xml:id="br0">
+      <inkml:brushProperty name="width" value="0.1" units="cm"/>
+      <inkml:brushProperty name="height" value="0.1" units="cm"/>
+    </inkml:brush>
+  </inkml:definitions>
+  <inkml:trace contextRef="#ctx0" brushRef="#br0">341 108 196 0 0,'2'-13'459'0'0,"0"1"-57"0"0,-1 1 0 0 0,1-19 0 0 0,-2 29-337 0 0,0-1-1 0 0,0 0 1 0 0,0 0-1 0 0,0 0 1 0 0,0 0-1 0 0,-1 0 1 0 0,1 0-1 0 0,-1 0 1 0 0,1 1 0 0 0,-1-1-1 0 0,0 0 1 0 0,1 0-1 0 0,-1 1 1 0 0,0-1-1 0 0,0 0 1 0 0,-1 1-1 0 0,1-1 1 0 0,0 1-1 0 0,0-1 1 0 0,-1 1 0 0 0,1 0-1 0 0,-2-2 1 0 0,1 3-15 0 0,1 0 0 0 0,0-1 0 0 0,0 1 0 0 0,-1 0 0 0 0,1 0 0 0 0,0 0 0 0 0,-1 0 0 0 0,1 0 0 0 0,0 0 0 0 0,0 0 0 0 0,-1 1 0 0 0,1-1 0 0 0,0 0 0 0 0,0 1 0 0 0,-1-1 0 0 0,1 1 0 0 0,0-1 0 0 0,0 1 0 0 0,0 0 0 0 0,-2 1 0 0 0,-21 17 651 0 0,18-13-601 0 0,1 0 1 0 0,0 1-1 0 0,0-1 0 0 0,0 1 1 0 0,1 0-1 0 0,0 1 0 0 0,1-1 1 0 0,-1 1-1 0 0,1-1 0 0 0,1 1 0 0 0,-1 0 1 0 0,1 0-1 0 0,1 0 0 0 0,-1 0 1 0 0,2 1-1 0 0,-1-1 0 0 0,1 0 1 0 0,0 1-1 0 0,1-1 0 0 0,0 0 0 0 0,0 0 1 0 0,1 0-1 0 0,0 0 0 0 0,0 0 1 0 0,1 0-1 0 0,0 0 0 0 0,0-1 0 0 0,1 1 1 0 0,8 12-1 0 0,4 1 226 0 0,-7-10 381 0 0,-1 0-1 0 0,0 0 1 0 0,-1 1-1 0 0,11 21 0 0 0,-17-29-599 0 0,0-1-1 0 0,1 1 0 0 0,-2-1 0 0 0,1 1 1 0 0,0 0-1 0 0,-1 0 0 0 0,1-1 0 0 0,-1 1 0 0 0,0 0 1 0 0,-1 0-1 0 0,1 0 0 0 0,-1-1 0 0 0,1 1 1 0 0,-1 0-1 0 0,0-1 0 0 0,0 1 0 0 0,-1 0 0 0 0,1-1 1 0 0,-1 0-1 0 0,0 1 0 0 0,-4 5 0 0 0,-5 4-687 0 0,-1-1-1 0 0,0 0 1 0 0,-1 0-1 0 0,0-2 1 0 0,-1 0-1 0 0,0 0 0 0 0,-26 12 1 0 0,-3 4-1947 0 0,-48 28-1978 0 0,43-26 2719 0 0</inkml:trace>
+</inkml:ink>
+</file>
+
+<file path=ppt/ink/ink9.xml><?xml version="1.0" encoding="utf-8"?>
+<inkml:ink xmlns:inkml="http://www.w3.org/2003/InkML">
+  <inkml:definitions>
+    <inkml:context xml:id="ctx0">
+      <inkml:inkSource xml:id="inkSrc0">
+        <inkml:traceFormat>
+          <inkml:channel name="X" type="integer" min="-2.14748E9" max="2.14748E9" units="cm"/>
+          <inkml:channel name="Y" type="integer" min="-2.14748E9" max="2.14748E9" units="cm"/>
+          <inkml:channel name="F" type="integer" max="32767" units="dev"/>
+          <inkml:channel name="OA" type="integer" max="360" units="deg"/>
+          <inkml:channel name="OE" type="integer" max="90" units="deg"/>
+        </inkml:traceFormat>
+        <inkml:channelProperties>
+          <inkml:channelProperty channel="X" name="resolution" value="1000" units="1/cm"/>
+          <inkml:channelProperty channel="Y" name="resolution" value="1000" units="1/cm"/>
+          <inkml:channelProperty channel="F" name="resolution" value="0" units="1/dev"/>
+          <inkml:channelProperty channel="OA" name="resolution" value="1000" units="1/deg"/>
+          <inkml:channelProperty channel="OE" name="resolution" value="1000" units="1/deg"/>
+        </inkml:channelProperties>
+      </inkml:inkSource>
+      <inkml:timestamp xml:id="ts0" timeString="2026-10-04T03:50:47.397"/>
+    </inkml:context>
+    <inkml:brush xml:id="br0">
+      <inkml:brushProperty name="width" value="0.1" units="cm"/>
+      <inkml:brushProperty name="height" value="0.1" units="cm"/>
+    </inkml:brush>
+  </inkml:definitions>
+  <inkml:trace contextRef="#ctx0" brushRef="#br0">64 21 140 0 0,'0'-1'133'0'0,"0"0"-1"0"0,0 0 1 0 0,0 0 0 0 0,0 0-1 0 0,0 0 1 0 0,-1 1 0 0 0,1-1-1 0 0,0 0 1 0 0,-1 0 0 0 0,1 0-1 0 0,-1 0 1 0 0,1 0 0 0 0,-1 0-1 0 0,1 1 1 0 0,-1-1 0 0 0,1 0 0 0 0,-1 0-1 0 0,0 1 1 0 0,1-1 0 0 0,-1 1-1 0 0,0-1 1 0 0,0 0 0 0 0,0 1-1 0 0,1-1 1 0 0,-3 0 0 0 0,2 2-38 0 0,0 0 1 0 0,0-1 0 0 0,0 1 0 0 0,-1 0 0 0 0,1 0 0 0 0,0 0 0 0 0,0 0 0 0 0,0 0 0 0 0,0 0 0 0 0,1 0 0 0 0,-1 0 0 0 0,0 0-1 0 0,0 0 1 0 0,1 0 0 0 0,-1 1 0 0 0,0-1 0 0 0,1 0 0 0 0,0 1 0 0 0,-1 0 0 0 0,-6 16 109 0 0,1 0 0 0 0,1 0 0 0 0,0 1 0 0 0,2 0 0 0 0,-3 36 0 0 0,7 96-1574 0 0,8-76-2164 0 0,-12-61 2341 0 0</inkml:trace>
+</inkml:ink>
 </file>
 
 <file path=ppt/notesMasters/notesMaster1.xml><?xml version="1.0" encoding="utf-8"?>
@@ -2658,7 +4176,7 @@
                 <a:cs typeface="Arial"/>
                 <a:sym typeface="Arial"/>
               </a:rPr>
-              <a:t>4</a:t>
+              <a:t>3</a:t>
             </a:fld>
             <a:endParaRPr lang="en-US" sz="1200" b="0" i="0" u="none" strike="noStrike" cap="none">
               <a:solidFill>
@@ -2729,7 +4247,50 @@
           <a:bodyPr/>
           <a:lstStyle/>
           <a:p>
-            <a:endParaRPr lang="en-US" dirty="0"/>
+            <a:pPr marL="0" marR="0" lvl="0" indent="0" algn="l" defTabSz="457200" rtl="0" eaLnBrk="1" fontAlgn="auto" latinLnBrk="0" hangingPunct="1">
+              <a:lnSpc>
+                <a:spcPct val="100000"/>
+              </a:lnSpc>
+              <a:spcBef>
+                <a:spcPts val="0"/>
+              </a:spcBef>
+              <a:spcAft>
+                <a:spcPts val="0"/>
+              </a:spcAft>
+              <a:buClrTx/>
+              <a:buSzTx/>
+              <a:buFontTx/>
+              <a:buNone/>
+              <a:tabLst/>
+              <a:defRPr/>
+            </a:pPr>
+            <a:r>
+              <a:rPr lang="en-US" noProof="0" dirty="0"/>
+              <a:t>Long Description:</a:t>
+            </a:r>
+          </a:p>
+          <a:p>
+            <a:pPr marL="0" marR="0" lvl="0" indent="0" algn="l" defTabSz="457200" rtl="0" eaLnBrk="1" fontAlgn="auto" latinLnBrk="0" hangingPunct="1">
+              <a:lnSpc>
+                <a:spcPct val="100000"/>
+              </a:lnSpc>
+              <a:spcBef>
+                <a:spcPts val="0"/>
+              </a:spcBef>
+              <a:spcAft>
+                <a:spcPts val="0"/>
+              </a:spcAft>
+              <a:buClrTx/>
+              <a:buSzTx/>
+              <a:buFontTx/>
+              <a:buNone/>
+              <a:tabLst/>
+              <a:defRPr/>
+            </a:pPr>
+            <a:r>
+              <a:rPr lang="en-US" noProof="0" dirty="0"/>
+              <a:t>A side view of the brain is depicted, showing the left hemisphere. The brain is a walnut-shaped organ with several grooves and folds on its surface. The deep grooves are labeled fissures. The elevated regions, or folds, of the brain between the fissures, are labeled gyri. Shallow grooves on the gyri are labeled sulci. The spinal cord attaches to the inferior surface of the brain. Before entering the brain, the spinal cord becomes a little thicker and penetrates deep into the center of the brain. This part of the cord that penetrates the brain is labeled brainstem. The different parts of the brain are labeled and their functions are listed in parts a to f. Part a, Cerebrum. A large portion covering the anterior part of the brain is labeled cerebrum. The functions of the cerebrum are listed as follows: Conscious thought processes, intellectual functions; Memory storage and processing; Conscious and subconscious regulation of skeletal muscle contractions. Part b, Cerebellum. A spherical region inferior to the posterior part of the brain is labeled cerebellum. It is posterior to and makes contact with the posterior surface of the brainstem. The surface of the cerebellum is covered in several shallow grooves. The functions of the cerebellum are listed as follows: Coordinates complex somatic motor patterns; Adjusts output of other somatic motor centers in the brain and spinal cord. Part c, Diencephalon. A small oblong structure inferior to the cerebrum, at the superior end of the brainstem, is labeled diencephalon. It has two parts: the thalamus and the hypothalamus. The thalamus relays and processes sensory information. The hypothalamus controls emotions, autonomic functions, and hormone production. The brain stem is magnified and its different parts are labeled and described in parts d to f. The diencephalon can be seen posterior to the superior end of the brainstem with narrow processes wrapping around the brainstem. Part d, Midbrain. A short portion at the superior end of the brainstem is labeled midbrain. This part is present deep in the brain, just below the diencephalon. The functions of the midbrain are listed as follows: Processes visual and auditory data; Generates reflexive somatic motor responses; Maintains consciousness. Part e, Pons. A swollen region below the midbrain is labeled pons. This part is outside the brain, anterior to the cerebellum. The functions of the pons are listed as follows: Relays sensory information to the cerebellum and thalamus, Subconscious somatic and visceral motor centers. Part f, Medulla oblongata. A short region forming the inferior end of the brainstem is labeled medulla oblongata. The medulla oblongata connects the spinal cord and the rest of the brain stem. The functions of the medulla oblongata are listed as follows: Relays sensory information to the thalamus and other portions of the brainstem; Autonomic centers for regulation of visceral function (cardiovascular, respiratory, and digestive system activities).</a:t>
+            </a:r>
           </a:p>
         </p:txBody>
       </p:sp>
@@ -2765,157 +4326,7 @@
                 <a:cs typeface="Arial"/>
                 <a:sym typeface="Arial"/>
               </a:rPr>
-              <a:t>5</a:t>
-            </a:fld>
-            <a:endParaRPr lang="en-US" sz="1200" b="0" i="0" u="none" strike="noStrike" cap="none">
-              <a:solidFill>
-                <a:schemeClr val="dk1"/>
-              </a:solidFill>
-              <a:latin typeface="Arial"/>
-              <a:ea typeface="Arial"/>
-              <a:cs typeface="Arial"/>
-              <a:sym typeface="Arial"/>
-            </a:endParaRPr>
-          </a:p>
-        </p:txBody>
-      </p:sp>
-    </p:spTree>
-    <p:extLst>
-      <p:ext uri="{BB962C8B-B14F-4D97-AF65-F5344CB8AC3E}">
-        <p14:creationId xmlns:p14="http://schemas.microsoft.com/office/powerpoint/2010/main" val="3689319540"/>
-      </p:ext>
-    </p:extLst>
-  </p:cSld>
-  <p:clrMapOvr>
-    <a:masterClrMapping/>
-  </p:clrMapOvr>
-</p:notes>
-</file>
-
-<file path=ppt/notesSlides/notesSlide4.xml><?xml version="1.0" encoding="utf-8"?>
-<p:notes xmlns:a="http://schemas.openxmlformats.org/drawingml/2006/main" xmlns:r="http://schemas.openxmlformats.org/officeDocument/2006/relationships" xmlns:p="http://schemas.openxmlformats.org/presentationml/2006/main">
-  <p:cSld>
-    <p:spTree>
-      <p:nvGrpSpPr>
-        <p:cNvPr id="1" name=""/>
-        <p:cNvGrpSpPr/>
-        <p:nvPr/>
-      </p:nvGrpSpPr>
-      <p:grpSpPr>
-        <a:xfrm>
-          <a:off x="0" y="0"/>
-          <a:ext cx="0" cy="0"/>
-          <a:chOff x="0" y="0"/>
-          <a:chExt cx="0" cy="0"/>
-        </a:xfrm>
-      </p:grpSpPr>
-      <p:sp>
-        <p:nvSpPr>
-          <p:cNvPr id="2" name="Slide Image Placeholder 1"/>
-          <p:cNvSpPr>
-            <a:spLocks noGrp="1" noRot="1" noChangeAspect="1"/>
-          </p:cNvSpPr>
-          <p:nvPr>
-            <p:ph type="sldImg"/>
-          </p:nvPr>
-        </p:nvSpPr>
-        <p:spPr/>
-      </p:sp>
-      <p:sp>
-        <p:nvSpPr>
-          <p:cNvPr id="3" name="Notes Placeholder 2"/>
-          <p:cNvSpPr>
-            <a:spLocks noGrp="1"/>
-          </p:cNvSpPr>
-          <p:nvPr>
-            <p:ph type="body" idx="1"/>
-          </p:nvPr>
-        </p:nvSpPr>
-        <p:spPr/>
-        <p:txBody>
-          <a:bodyPr/>
-          <a:lstStyle/>
-          <a:p>
-            <a:pPr marL="0" marR="0" lvl="0" indent="0" algn="l" defTabSz="457200" rtl="0" eaLnBrk="1" fontAlgn="auto" latinLnBrk="0" hangingPunct="1">
-              <a:lnSpc>
-                <a:spcPct val="100000"/>
-              </a:lnSpc>
-              <a:spcBef>
-                <a:spcPts val="0"/>
-              </a:spcBef>
-              <a:spcAft>
-                <a:spcPts val="0"/>
-              </a:spcAft>
-              <a:buClrTx/>
-              <a:buSzTx/>
-              <a:buFontTx/>
-              <a:buNone/>
-              <a:tabLst/>
-              <a:defRPr/>
-            </a:pPr>
-            <a:r>
-              <a:rPr lang="en-US" noProof="0" dirty="0"/>
-              <a:t>Long Description:</a:t>
-            </a:r>
-          </a:p>
-          <a:p>
-            <a:pPr marL="0" marR="0" lvl="0" indent="0" algn="l" defTabSz="457200" rtl="0" eaLnBrk="1" fontAlgn="auto" latinLnBrk="0" hangingPunct="1">
-              <a:lnSpc>
-                <a:spcPct val="100000"/>
-              </a:lnSpc>
-              <a:spcBef>
-                <a:spcPts val="0"/>
-              </a:spcBef>
-              <a:spcAft>
-                <a:spcPts val="0"/>
-              </a:spcAft>
-              <a:buClrTx/>
-              <a:buSzTx/>
-              <a:buFontTx/>
-              <a:buNone/>
-              <a:tabLst/>
-              <a:defRPr/>
-            </a:pPr>
-            <a:r>
-              <a:rPr lang="en-US" noProof="0" dirty="0"/>
-              <a:t>A side view of the brain is depicted, showing the left hemisphere. The brain is a walnut-shaped organ with several grooves and folds on its surface. The deep grooves are labeled fissures. The elevated regions, or folds, of the brain between the fissures, are labeled gyri. Shallow grooves on the gyri are labeled sulci. The spinal cord attaches to the inferior surface of the brain. Before entering the brain, the spinal cord becomes a little thicker and penetrates deep into the center of the brain. This part of the cord that penetrates the brain is labeled brainstem. The different parts of the brain are labeled and their functions are listed in parts a to f. Part a, Cerebrum. A large portion covering the anterior part of the brain is labeled cerebrum. The functions of the cerebrum are listed as follows: Conscious thought processes, intellectual functions; Memory storage and processing; Conscious and subconscious regulation of skeletal muscle contractions. Part b, Cerebellum. A spherical region inferior to the posterior part of the brain is labeled cerebellum. It is posterior to and makes contact with the posterior surface of the brainstem. The surface of the cerebellum is covered in several shallow grooves. The functions of the cerebellum are listed as follows: Coordinates complex somatic motor patterns; Adjusts output of other somatic motor centers in the brain and spinal cord. Part c, Diencephalon. A small oblong structure inferior to the cerebrum, at the superior end of the brainstem, is labeled diencephalon. It has two parts: the thalamus and the hypothalamus. The thalamus relays and processes sensory information. The hypothalamus controls emotions, autonomic functions, and hormone production. The brain stem is magnified and its different parts are labeled and described in parts d to f. The diencephalon can be seen posterior to the superior end of the brainstem with narrow processes wrapping around the brainstem. Part d, Midbrain. A short portion at the superior end of the brainstem is labeled midbrain. This part is present deep in the brain, just below the diencephalon. The functions of the midbrain are listed as follows: Processes visual and auditory data; Generates reflexive somatic motor responses; Maintains consciousness. Part e, Pons. A swollen region below the midbrain is labeled pons. This part is outside the brain, anterior to the cerebellum. The functions of the pons are listed as follows: Relays sensory information to the cerebellum and thalamus, Subconscious somatic and visceral motor centers. Part f, Medulla oblongata. A short region forming the inferior end of the brainstem is labeled medulla oblongata. The medulla oblongata connects the spinal cord and the rest of the brain stem. The functions of the medulla oblongata are listed as follows: Relays sensory information to the thalamus and other portions of the brainstem; Autonomic centers for regulation of visceral function (cardiovascular, respiratory, and digestive system activities).</a:t>
-            </a:r>
-          </a:p>
-        </p:txBody>
-      </p:sp>
-      <p:sp>
-        <p:nvSpPr>
-          <p:cNvPr id="4" name="Slide Number Placeholder 3"/>
-          <p:cNvSpPr>
-            <a:spLocks noGrp="1"/>
-          </p:cNvSpPr>
-          <p:nvPr>
-            <p:ph type="sldNum" idx="12"/>
-          </p:nvPr>
-        </p:nvSpPr>
-        <p:spPr/>
-        <p:txBody>
-          <a:bodyPr/>
-          <a:lstStyle/>
-          <a:p>
-            <a:pPr marL="0" marR="0" lvl="0" indent="0" algn="r" rtl="0">
-              <a:spcBef>
-                <a:spcPts val="0"/>
-              </a:spcBef>
-              <a:buSzPct val="25000"/>
-              <a:buNone/>
-            </a:pPr>
-            <a:fld id="{00000000-1234-1234-1234-123412341234}" type="slidenum">
-              <a:rPr lang="en-US" sz="1200" b="0" i="0" u="none" strike="noStrike" cap="none" smtClean="0">
-                <a:solidFill>
-                  <a:schemeClr val="dk1"/>
-                </a:solidFill>
-                <a:latin typeface="Arial"/>
-                <a:ea typeface="Arial"/>
-                <a:cs typeface="Arial"/>
-                <a:sym typeface="Arial"/>
-              </a:rPr>
-              <a:t>6</a:t>
+              <a:t>4</a:t>
             </a:fld>
             <a:endParaRPr lang="en-US" sz="1200" b="0" i="0" u="none" strike="noStrike" cap="none">
               <a:solidFill>
@@ -5602,6 +7013,869 @@
         </p:txBody>
       </p:sp>
     </p:spTree>
+  </p:cSld>
+  <p:clrMapOvr>
+    <a:masterClrMapping/>
+  </p:clrMapOvr>
+</p:sldLayout>
+</file>
+
+<file path=ppt/slideLayouts/slideLayout14.xml><?xml version="1.0" encoding="utf-8"?>
+<p:sldLayout xmlns:a="http://schemas.openxmlformats.org/drawingml/2006/main" xmlns:r="http://schemas.openxmlformats.org/officeDocument/2006/relationships" xmlns:p="http://schemas.openxmlformats.org/presentationml/2006/main" userDrawn="1">
+  <p:cSld name="1_Title and Content">
+    <p:spTree>
+      <p:nvGrpSpPr>
+        <p:cNvPr id="1" name="Shape 24"/>
+        <p:cNvGrpSpPr/>
+        <p:nvPr/>
+      </p:nvGrpSpPr>
+      <p:grpSpPr>
+        <a:xfrm>
+          <a:off x="0" y="0"/>
+          <a:ext cx="0" cy="0"/>
+          <a:chOff x="0" y="0"/>
+          <a:chExt cx="0" cy="0"/>
+        </a:xfrm>
+      </p:grpSpPr>
+      <p:sp>
+        <p:nvSpPr>
+          <p:cNvPr id="25" name="Title Placeholder"/>
+          <p:cNvSpPr txBox="1">
+            <a:spLocks noGrp="1"/>
+          </p:cNvSpPr>
+          <p:nvPr>
+            <p:ph type="title"/>
+          </p:nvPr>
+        </p:nvSpPr>
+        <p:spPr>
+          <a:xfrm>
+            <a:off x="457200" y="215371"/>
+            <a:ext cx="8229600" cy="1097279"/>
+          </a:xfrm>
+          <a:prstGeom prst="rect">
+            <a:avLst/>
+          </a:prstGeom>
+          <a:noFill/>
+          <a:ln>
+            <a:noFill/>
+          </a:ln>
+        </p:spPr>
+        <p:txBody>
+          <a:bodyPr lIns="91425" tIns="91425" rIns="91425" bIns="91425" anchor="b" anchorCtr="0"/>
+          <a:lstStyle>
+            <a:lvl1pPr marL="0" marR="0" lvl="0" indent="0" algn="l" rtl="0">
+              <a:lnSpc>
+                <a:spcPct val="100000"/>
+              </a:lnSpc>
+              <a:spcBef>
+                <a:spcPts val="0"/>
+              </a:spcBef>
+              <a:buClr>
+                <a:srgbClr val="007FA3"/>
+              </a:buClr>
+              <a:buFont typeface="Times New Roman"/>
+              <a:buNone/>
+              <a:defRPr sz="3600" b="1" i="0" u="none" strike="noStrike" cap="none">
+                <a:solidFill>
+                  <a:srgbClr val="007FA3"/>
+                </a:solidFill>
+                <a:latin typeface="+mj-lt"/>
+                <a:ea typeface="Times New Roman"/>
+                <a:cs typeface="Times New Roman"/>
+                <a:sym typeface="Times New Roman"/>
+              </a:defRPr>
+            </a:lvl1pPr>
+            <a:lvl2pPr lvl="1" indent="0">
+              <a:spcBef>
+                <a:spcPts val="0"/>
+              </a:spcBef>
+              <a:buNone/>
+              <a:defRPr sz="1800"/>
+            </a:lvl2pPr>
+            <a:lvl3pPr lvl="2" indent="0">
+              <a:spcBef>
+                <a:spcPts val="0"/>
+              </a:spcBef>
+              <a:buNone/>
+              <a:defRPr sz="1800"/>
+            </a:lvl3pPr>
+            <a:lvl4pPr lvl="3" indent="0">
+              <a:spcBef>
+                <a:spcPts val="0"/>
+              </a:spcBef>
+              <a:buNone/>
+              <a:defRPr sz="1800"/>
+            </a:lvl4pPr>
+            <a:lvl5pPr lvl="4" indent="0">
+              <a:spcBef>
+                <a:spcPts val="0"/>
+              </a:spcBef>
+              <a:buNone/>
+              <a:defRPr sz="1800"/>
+            </a:lvl5pPr>
+            <a:lvl6pPr lvl="5" indent="0">
+              <a:spcBef>
+                <a:spcPts val="0"/>
+              </a:spcBef>
+              <a:buNone/>
+              <a:defRPr sz="1800"/>
+            </a:lvl6pPr>
+            <a:lvl7pPr lvl="6" indent="0">
+              <a:spcBef>
+                <a:spcPts val="0"/>
+              </a:spcBef>
+              <a:buNone/>
+              <a:defRPr sz="1800"/>
+            </a:lvl7pPr>
+            <a:lvl8pPr lvl="7" indent="0">
+              <a:spcBef>
+                <a:spcPts val="0"/>
+              </a:spcBef>
+              <a:buNone/>
+              <a:defRPr sz="1800"/>
+            </a:lvl8pPr>
+            <a:lvl9pPr lvl="8" indent="0">
+              <a:spcBef>
+                <a:spcPts val="0"/>
+              </a:spcBef>
+              <a:buNone/>
+              <a:defRPr sz="1800"/>
+            </a:lvl9pPr>
+          </a:lstStyle>
+          <a:p>
+            <a:endParaRPr dirty="0"/>
+          </a:p>
+        </p:txBody>
+      </p:sp>
+      <p:sp>
+        <p:nvSpPr>
+          <p:cNvPr id="4" name="Content Placeholder 3">
+            <a:extLst>
+              <a:ext uri="{FF2B5EF4-FFF2-40B4-BE49-F238E27FC236}">
+                <a16:creationId xmlns:a16="http://schemas.microsoft.com/office/drawing/2014/main" id="{00F45AE3-EB76-41DE-97B2-CFE79B73D3C6}"/>
+              </a:ext>
+            </a:extLst>
+          </p:cNvPr>
+          <p:cNvSpPr>
+            <a:spLocks noGrp="1"/>
+          </p:cNvSpPr>
+          <p:nvPr>
+            <p:ph sz="quarter" idx="13"/>
+          </p:nvPr>
+        </p:nvSpPr>
+        <p:spPr>
+          <a:xfrm>
+            <a:off x="457201" y="1441449"/>
+            <a:ext cx="4114800" cy="441941"/>
+          </a:xfrm>
+        </p:spPr>
+        <p:txBody>
+          <a:bodyPr/>
+          <a:lstStyle/>
+          <a:p>
+            <a:pPr lvl="0"/>
+            <a:r>
+              <a:rPr lang="en-US" dirty="0"/>
+              <a:t>Edit Master text styles</a:t>
+            </a:r>
+          </a:p>
+          <a:p>
+            <a:pPr lvl="1"/>
+            <a:r>
+              <a:rPr lang="en-US" dirty="0"/>
+              <a:t>Second level</a:t>
+            </a:r>
+          </a:p>
+          <a:p>
+            <a:pPr lvl="2"/>
+            <a:r>
+              <a:rPr lang="en-US" dirty="0"/>
+              <a:t>Third level</a:t>
+            </a:r>
+          </a:p>
+          <a:p>
+            <a:pPr lvl="3"/>
+            <a:r>
+              <a:rPr lang="en-US" dirty="0"/>
+              <a:t>Fourth level</a:t>
+            </a:r>
+          </a:p>
+          <a:p>
+            <a:pPr lvl="4"/>
+            <a:r>
+              <a:rPr lang="en-US" dirty="0"/>
+              <a:t>Fifth level</a:t>
+            </a:r>
+          </a:p>
+        </p:txBody>
+      </p:sp>
+      <p:sp>
+        <p:nvSpPr>
+          <p:cNvPr id="28" name="Shape 28"/>
+          <p:cNvSpPr txBox="1">
+            <a:spLocks noGrp="1"/>
+          </p:cNvSpPr>
+          <p:nvPr>
+            <p:ph type="dt" idx="10"/>
+          </p:nvPr>
+        </p:nvSpPr>
+        <p:spPr>
+          <a:xfrm>
+            <a:off x="6335712" y="113071"/>
+            <a:ext cx="2133599" cy="182879"/>
+          </a:xfrm>
+          <a:prstGeom prst="rect">
+            <a:avLst/>
+          </a:prstGeom>
+          <a:noFill/>
+          <a:ln>
+            <a:noFill/>
+          </a:ln>
+        </p:spPr>
+        <p:txBody>
+          <a:bodyPr lIns="91425" tIns="91425" rIns="91425" bIns="91425" anchor="ctr" anchorCtr="0"/>
+          <a:lstStyle>
+            <a:lvl1pPr marL="0" marR="0" lvl="0" indent="0" algn="r" rtl="0">
+              <a:spcBef>
+                <a:spcPts val="0"/>
+              </a:spcBef>
+              <a:buNone/>
+              <a:defRPr sz="900" b="0" i="0" u="none" strike="noStrike" cap="none">
+                <a:solidFill>
+                  <a:schemeClr val="lt1"/>
+                </a:solidFill>
+                <a:latin typeface="Arial"/>
+                <a:ea typeface="Arial"/>
+                <a:cs typeface="Arial"/>
+                <a:sym typeface="Arial"/>
+              </a:defRPr>
+            </a:lvl1pPr>
+            <a:lvl2pPr marL="457200" marR="0" lvl="1" indent="0" algn="l" rtl="0">
+              <a:spcBef>
+                <a:spcPts val="0"/>
+              </a:spcBef>
+              <a:buNone/>
+              <a:defRPr sz="1800" b="0" i="0" u="none" strike="noStrike" cap="none">
+                <a:solidFill>
+                  <a:schemeClr val="dk1"/>
+                </a:solidFill>
+                <a:latin typeface="Arial"/>
+                <a:ea typeface="Arial"/>
+                <a:cs typeface="Arial"/>
+                <a:sym typeface="Arial"/>
+              </a:defRPr>
+            </a:lvl2pPr>
+            <a:lvl3pPr marL="914400" marR="0" lvl="2" indent="0" algn="l" rtl="0">
+              <a:spcBef>
+                <a:spcPts val="0"/>
+              </a:spcBef>
+              <a:buNone/>
+              <a:defRPr sz="1800" b="0" i="0" u="none" strike="noStrike" cap="none">
+                <a:solidFill>
+                  <a:schemeClr val="dk1"/>
+                </a:solidFill>
+                <a:latin typeface="Arial"/>
+                <a:ea typeface="Arial"/>
+                <a:cs typeface="Arial"/>
+                <a:sym typeface="Arial"/>
+              </a:defRPr>
+            </a:lvl3pPr>
+            <a:lvl4pPr marL="1371600" marR="0" lvl="3" indent="0" algn="l" rtl="0">
+              <a:spcBef>
+                <a:spcPts val="0"/>
+              </a:spcBef>
+              <a:buNone/>
+              <a:defRPr sz="1800" b="0" i="0" u="none" strike="noStrike" cap="none">
+                <a:solidFill>
+                  <a:schemeClr val="dk1"/>
+                </a:solidFill>
+                <a:latin typeface="Arial"/>
+                <a:ea typeface="Arial"/>
+                <a:cs typeface="Arial"/>
+                <a:sym typeface="Arial"/>
+              </a:defRPr>
+            </a:lvl4pPr>
+            <a:lvl5pPr marL="1828800" marR="0" lvl="4" indent="0" algn="l" rtl="0">
+              <a:spcBef>
+                <a:spcPts val="0"/>
+              </a:spcBef>
+              <a:buNone/>
+              <a:defRPr sz="1800" b="0" i="0" u="none" strike="noStrike" cap="none">
+                <a:solidFill>
+                  <a:schemeClr val="dk1"/>
+                </a:solidFill>
+                <a:latin typeface="Arial"/>
+                <a:ea typeface="Arial"/>
+                <a:cs typeface="Arial"/>
+                <a:sym typeface="Arial"/>
+              </a:defRPr>
+            </a:lvl5pPr>
+            <a:lvl6pPr marL="2286000" marR="0" lvl="5" indent="0" algn="l" rtl="0">
+              <a:spcBef>
+                <a:spcPts val="0"/>
+              </a:spcBef>
+              <a:buNone/>
+              <a:defRPr sz="1800" b="0" i="0" u="none" strike="noStrike" cap="none">
+                <a:solidFill>
+                  <a:schemeClr val="dk1"/>
+                </a:solidFill>
+                <a:latin typeface="Arial"/>
+                <a:ea typeface="Arial"/>
+                <a:cs typeface="Arial"/>
+                <a:sym typeface="Arial"/>
+              </a:defRPr>
+            </a:lvl6pPr>
+            <a:lvl7pPr marL="2743200" marR="0" lvl="6" indent="0" algn="l" rtl="0">
+              <a:spcBef>
+                <a:spcPts val="0"/>
+              </a:spcBef>
+              <a:buNone/>
+              <a:defRPr sz="1800" b="0" i="0" u="none" strike="noStrike" cap="none">
+                <a:solidFill>
+                  <a:schemeClr val="dk1"/>
+                </a:solidFill>
+                <a:latin typeface="Arial"/>
+                <a:ea typeface="Arial"/>
+                <a:cs typeface="Arial"/>
+                <a:sym typeface="Arial"/>
+              </a:defRPr>
+            </a:lvl7pPr>
+            <a:lvl8pPr marL="3200400" marR="0" lvl="7" indent="0" algn="l" rtl="0">
+              <a:spcBef>
+                <a:spcPts val="0"/>
+              </a:spcBef>
+              <a:buNone/>
+              <a:defRPr sz="1800" b="0" i="0" u="none" strike="noStrike" cap="none">
+                <a:solidFill>
+                  <a:schemeClr val="dk1"/>
+                </a:solidFill>
+                <a:latin typeface="Arial"/>
+                <a:ea typeface="Arial"/>
+                <a:cs typeface="Arial"/>
+                <a:sym typeface="Arial"/>
+              </a:defRPr>
+            </a:lvl8pPr>
+            <a:lvl9pPr marL="3657600" marR="0" lvl="8" indent="0" algn="l" rtl="0">
+              <a:spcBef>
+                <a:spcPts val="0"/>
+              </a:spcBef>
+              <a:buNone/>
+              <a:defRPr sz="1800" b="0" i="0" u="none" strike="noStrike" cap="none">
+                <a:solidFill>
+                  <a:schemeClr val="dk1"/>
+                </a:solidFill>
+                <a:latin typeface="Arial"/>
+                <a:ea typeface="Arial"/>
+                <a:cs typeface="Arial"/>
+                <a:sym typeface="Arial"/>
+              </a:defRPr>
+            </a:lvl9pPr>
+          </a:lstStyle>
+          <a:p>
+            <a:endParaRPr/>
+          </a:p>
+        </p:txBody>
+      </p:sp>
+      <p:sp>
+        <p:nvSpPr>
+          <p:cNvPr id="29" name="Shape 29"/>
+          <p:cNvSpPr txBox="1">
+            <a:spLocks noGrp="1"/>
+          </p:cNvSpPr>
+          <p:nvPr>
+            <p:ph type="sldNum" idx="12"/>
+          </p:nvPr>
+        </p:nvSpPr>
+        <p:spPr>
+          <a:xfrm>
+            <a:off x="8469311" y="113071"/>
+            <a:ext cx="551783" cy="182879"/>
+          </a:xfrm>
+          <a:prstGeom prst="rect">
+            <a:avLst/>
+          </a:prstGeom>
+          <a:noFill/>
+          <a:ln>
+            <a:noFill/>
+          </a:ln>
+        </p:spPr>
+        <p:txBody>
+          <a:bodyPr lIns="91425" tIns="45700" rIns="91425" bIns="45700" anchor="ctr" anchorCtr="0">
+            <a:noAutofit/>
+          </a:bodyPr>
+          <a:lstStyle/>
+          <a:p>
+            <a:pPr marL="0" marR="0" lvl="0" indent="0" algn="r" rtl="0">
+              <a:spcBef>
+                <a:spcPts val="0"/>
+              </a:spcBef>
+              <a:buSzPct val="25000"/>
+              <a:buNone/>
+            </a:pPr>
+            <a:fld id="{00000000-1234-1234-1234-123412341234}" type="slidenum">
+              <a:rPr lang="en-US" sz="900" b="0" i="0" u="none" strike="noStrike" cap="none">
+                <a:solidFill>
+                  <a:schemeClr val="lt1"/>
+                </a:solidFill>
+                <a:latin typeface="Arial"/>
+                <a:ea typeface="Arial"/>
+                <a:cs typeface="Arial"/>
+                <a:sym typeface="Arial"/>
+              </a:rPr>
+              <a:t>‹#›</a:t>
+            </a:fld>
+            <a:endParaRPr lang="en-US" sz="900" b="0" i="0" u="none" strike="noStrike" cap="none">
+              <a:solidFill>
+                <a:schemeClr val="lt1"/>
+              </a:solidFill>
+              <a:latin typeface="Arial"/>
+              <a:ea typeface="Arial"/>
+              <a:cs typeface="Arial"/>
+              <a:sym typeface="Arial"/>
+            </a:endParaRPr>
+          </a:p>
+        </p:txBody>
+      </p:sp>
+      <p:sp>
+        <p:nvSpPr>
+          <p:cNvPr id="3" name="Content Placeholder 2">
+            <a:extLst>
+              <a:ext uri="{FF2B5EF4-FFF2-40B4-BE49-F238E27FC236}">
+                <a16:creationId xmlns:a16="http://schemas.microsoft.com/office/drawing/2014/main" id="{4E01BEE0-C2D5-770C-E31C-0D5E757F86A5}"/>
+              </a:ext>
+            </a:extLst>
+          </p:cNvPr>
+          <p:cNvSpPr>
+            <a:spLocks noGrp="1"/>
+          </p:cNvSpPr>
+          <p:nvPr>
+            <p:ph sz="quarter" idx="14"/>
+          </p:nvPr>
+        </p:nvSpPr>
+        <p:spPr>
+          <a:xfrm>
+            <a:off x="457200" y="2019300"/>
+            <a:ext cx="4114800" cy="423863"/>
+          </a:xfrm>
+        </p:spPr>
+        <p:txBody>
+          <a:bodyPr/>
+          <a:lstStyle/>
+          <a:p>
+            <a:pPr lvl="0"/>
+            <a:r>
+              <a:rPr lang="en-US"/>
+              <a:t>Click to edit Master text styles</a:t>
+            </a:r>
+          </a:p>
+          <a:p>
+            <a:pPr lvl="1"/>
+            <a:r>
+              <a:rPr lang="en-US"/>
+              <a:t>Second level</a:t>
+            </a:r>
+          </a:p>
+          <a:p>
+            <a:pPr lvl="2"/>
+            <a:r>
+              <a:rPr lang="en-US"/>
+              <a:t>Third level</a:t>
+            </a:r>
+          </a:p>
+          <a:p>
+            <a:pPr lvl="3"/>
+            <a:r>
+              <a:rPr lang="en-US"/>
+              <a:t>Fourth level</a:t>
+            </a:r>
+          </a:p>
+          <a:p>
+            <a:pPr lvl="4"/>
+            <a:r>
+              <a:rPr lang="en-US"/>
+              <a:t>Fifth level</a:t>
+            </a:r>
+          </a:p>
+        </p:txBody>
+      </p:sp>
+      <p:sp>
+        <p:nvSpPr>
+          <p:cNvPr id="6" name="Content Placeholder 5">
+            <a:extLst>
+              <a:ext uri="{FF2B5EF4-FFF2-40B4-BE49-F238E27FC236}">
+                <a16:creationId xmlns:a16="http://schemas.microsoft.com/office/drawing/2014/main" id="{24AEEB02-6515-3A36-CD47-3A0060A4CAA0}"/>
+              </a:ext>
+            </a:extLst>
+          </p:cNvPr>
+          <p:cNvSpPr>
+            <a:spLocks noGrp="1"/>
+          </p:cNvSpPr>
+          <p:nvPr>
+            <p:ph sz="quarter" idx="15"/>
+          </p:nvPr>
+        </p:nvSpPr>
+        <p:spPr>
+          <a:xfrm>
+            <a:off x="457200" y="2590800"/>
+            <a:ext cx="4114800" cy="558800"/>
+          </a:xfrm>
+        </p:spPr>
+        <p:txBody>
+          <a:bodyPr/>
+          <a:lstStyle/>
+          <a:p>
+            <a:pPr lvl="0"/>
+            <a:r>
+              <a:rPr lang="en-US"/>
+              <a:t>Click to edit Master text styles</a:t>
+            </a:r>
+          </a:p>
+          <a:p>
+            <a:pPr lvl="1"/>
+            <a:r>
+              <a:rPr lang="en-US"/>
+              <a:t>Second level</a:t>
+            </a:r>
+          </a:p>
+          <a:p>
+            <a:pPr lvl="2"/>
+            <a:r>
+              <a:rPr lang="en-US"/>
+              <a:t>Third level</a:t>
+            </a:r>
+          </a:p>
+          <a:p>
+            <a:pPr lvl="3"/>
+            <a:r>
+              <a:rPr lang="en-US"/>
+              <a:t>Fourth level</a:t>
+            </a:r>
+          </a:p>
+          <a:p>
+            <a:pPr lvl="4"/>
+            <a:r>
+              <a:rPr lang="en-US"/>
+              <a:t>Fifth level</a:t>
+            </a:r>
+          </a:p>
+        </p:txBody>
+      </p:sp>
+      <p:sp>
+        <p:nvSpPr>
+          <p:cNvPr id="8" name="Text Placeholder 7">
+            <a:extLst>
+              <a:ext uri="{FF2B5EF4-FFF2-40B4-BE49-F238E27FC236}">
+                <a16:creationId xmlns:a16="http://schemas.microsoft.com/office/drawing/2014/main" id="{BBE3B687-5760-D71A-5948-6139FFE26F6D}"/>
+              </a:ext>
+            </a:extLst>
+          </p:cNvPr>
+          <p:cNvSpPr>
+            <a:spLocks noGrp="1"/>
+          </p:cNvSpPr>
+          <p:nvPr>
+            <p:ph type="body" sz="quarter" idx="16"/>
+          </p:nvPr>
+        </p:nvSpPr>
+        <p:spPr>
+          <a:xfrm>
+            <a:off x="457200" y="3297238"/>
+            <a:ext cx="4114800" cy="558800"/>
+          </a:xfrm>
+        </p:spPr>
+        <p:txBody>
+          <a:bodyPr/>
+          <a:lstStyle/>
+          <a:p>
+            <a:pPr lvl="0"/>
+            <a:r>
+              <a:rPr lang="en-US"/>
+              <a:t>Click to edit Master text styles</a:t>
+            </a:r>
+          </a:p>
+          <a:p>
+            <a:pPr lvl="1"/>
+            <a:r>
+              <a:rPr lang="en-US"/>
+              <a:t>Second level</a:t>
+            </a:r>
+          </a:p>
+          <a:p>
+            <a:pPr lvl="2"/>
+            <a:r>
+              <a:rPr lang="en-US"/>
+              <a:t>Third level</a:t>
+            </a:r>
+          </a:p>
+          <a:p>
+            <a:pPr lvl="3"/>
+            <a:r>
+              <a:rPr lang="en-US"/>
+              <a:t>Fourth level</a:t>
+            </a:r>
+          </a:p>
+          <a:p>
+            <a:pPr lvl="4"/>
+            <a:r>
+              <a:rPr lang="en-US"/>
+              <a:t>Fifth level</a:t>
+            </a:r>
+          </a:p>
+        </p:txBody>
+      </p:sp>
+      <p:sp>
+        <p:nvSpPr>
+          <p:cNvPr id="10" name="Content Placeholder 9">
+            <a:extLst>
+              <a:ext uri="{FF2B5EF4-FFF2-40B4-BE49-F238E27FC236}">
+                <a16:creationId xmlns:a16="http://schemas.microsoft.com/office/drawing/2014/main" id="{E8CF2DBD-4C17-B9B5-8AF2-79B54F2D5CEB}"/>
+              </a:ext>
+            </a:extLst>
+          </p:cNvPr>
+          <p:cNvSpPr>
+            <a:spLocks noGrp="1"/>
+          </p:cNvSpPr>
+          <p:nvPr>
+            <p:ph sz="quarter" idx="17"/>
+          </p:nvPr>
+        </p:nvSpPr>
+        <p:spPr>
+          <a:xfrm>
+            <a:off x="457200" y="4003675"/>
+            <a:ext cx="4114800" cy="719138"/>
+          </a:xfrm>
+        </p:spPr>
+        <p:txBody>
+          <a:bodyPr/>
+          <a:lstStyle/>
+          <a:p>
+            <a:pPr lvl="0"/>
+            <a:r>
+              <a:rPr lang="en-US"/>
+              <a:t>Click to edit Master text styles</a:t>
+            </a:r>
+          </a:p>
+          <a:p>
+            <a:pPr lvl="1"/>
+            <a:r>
+              <a:rPr lang="en-US"/>
+              <a:t>Second level</a:t>
+            </a:r>
+          </a:p>
+          <a:p>
+            <a:pPr lvl="2"/>
+            <a:r>
+              <a:rPr lang="en-US"/>
+              <a:t>Third level</a:t>
+            </a:r>
+          </a:p>
+          <a:p>
+            <a:pPr lvl="3"/>
+            <a:r>
+              <a:rPr lang="en-US"/>
+              <a:t>Fourth level</a:t>
+            </a:r>
+          </a:p>
+          <a:p>
+            <a:pPr lvl="4"/>
+            <a:r>
+              <a:rPr lang="en-US"/>
+              <a:t>Fifth level</a:t>
+            </a:r>
+          </a:p>
+        </p:txBody>
+      </p:sp>
+      <p:sp>
+        <p:nvSpPr>
+          <p:cNvPr id="12" name="Content Placeholder 11">
+            <a:extLst>
+              <a:ext uri="{FF2B5EF4-FFF2-40B4-BE49-F238E27FC236}">
+                <a16:creationId xmlns:a16="http://schemas.microsoft.com/office/drawing/2014/main" id="{D8651AC3-B3FA-A3FC-F2EC-BEB3639D4472}"/>
+              </a:ext>
+            </a:extLst>
+          </p:cNvPr>
+          <p:cNvSpPr>
+            <a:spLocks noGrp="1"/>
+          </p:cNvSpPr>
+          <p:nvPr>
+            <p:ph sz="quarter" idx="18"/>
+          </p:nvPr>
+        </p:nvSpPr>
+        <p:spPr>
+          <a:xfrm>
+            <a:off x="457200" y="4870450"/>
+            <a:ext cx="4114800" cy="719138"/>
+          </a:xfrm>
+        </p:spPr>
+        <p:txBody>
+          <a:bodyPr/>
+          <a:lstStyle/>
+          <a:p>
+            <a:pPr lvl="0"/>
+            <a:r>
+              <a:rPr lang="en-US"/>
+              <a:t>Click to edit Master text styles</a:t>
+            </a:r>
+          </a:p>
+          <a:p>
+            <a:pPr lvl="1"/>
+            <a:r>
+              <a:rPr lang="en-US"/>
+              <a:t>Second level</a:t>
+            </a:r>
+          </a:p>
+          <a:p>
+            <a:pPr lvl="2"/>
+            <a:r>
+              <a:rPr lang="en-US"/>
+              <a:t>Third level</a:t>
+            </a:r>
+          </a:p>
+          <a:p>
+            <a:pPr lvl="3"/>
+            <a:r>
+              <a:rPr lang="en-US"/>
+              <a:t>Fourth level</a:t>
+            </a:r>
+          </a:p>
+          <a:p>
+            <a:pPr lvl="4"/>
+            <a:r>
+              <a:rPr lang="en-US"/>
+              <a:t>Fifth level</a:t>
+            </a:r>
+          </a:p>
+        </p:txBody>
+      </p:sp>
+      <p:sp>
+        <p:nvSpPr>
+          <p:cNvPr id="14" name="Content Placeholder 13">
+            <a:extLst>
+              <a:ext uri="{FF2B5EF4-FFF2-40B4-BE49-F238E27FC236}">
+                <a16:creationId xmlns:a16="http://schemas.microsoft.com/office/drawing/2014/main" id="{1030E7D0-8005-8C68-34F5-60A670A14767}"/>
+              </a:ext>
+            </a:extLst>
+          </p:cNvPr>
+          <p:cNvSpPr>
+            <a:spLocks noGrp="1"/>
+          </p:cNvSpPr>
+          <p:nvPr>
+            <p:ph sz="quarter" idx="19"/>
+          </p:nvPr>
+        </p:nvSpPr>
+        <p:spPr>
+          <a:xfrm>
+            <a:off x="457200" y="5737225"/>
+            <a:ext cx="4114800" cy="581025"/>
+          </a:xfrm>
+        </p:spPr>
+        <p:txBody>
+          <a:bodyPr/>
+          <a:lstStyle/>
+          <a:p>
+            <a:pPr lvl="0"/>
+            <a:r>
+              <a:rPr lang="en-US"/>
+              <a:t>Click to edit Master text styles</a:t>
+            </a:r>
+          </a:p>
+          <a:p>
+            <a:pPr lvl="1"/>
+            <a:r>
+              <a:rPr lang="en-US"/>
+              <a:t>Second level</a:t>
+            </a:r>
+          </a:p>
+          <a:p>
+            <a:pPr lvl="2"/>
+            <a:r>
+              <a:rPr lang="en-US"/>
+              <a:t>Third level</a:t>
+            </a:r>
+          </a:p>
+          <a:p>
+            <a:pPr lvl="3"/>
+            <a:r>
+              <a:rPr lang="en-US"/>
+              <a:t>Fourth level</a:t>
+            </a:r>
+          </a:p>
+          <a:p>
+            <a:pPr lvl="4"/>
+            <a:r>
+              <a:rPr lang="en-US"/>
+              <a:t>Fifth level</a:t>
+            </a:r>
+          </a:p>
+        </p:txBody>
+      </p:sp>
+      <p:sp>
+        <p:nvSpPr>
+          <p:cNvPr id="16" name="Content Placeholder 15">
+            <a:extLst>
+              <a:ext uri="{FF2B5EF4-FFF2-40B4-BE49-F238E27FC236}">
+                <a16:creationId xmlns:a16="http://schemas.microsoft.com/office/drawing/2014/main" id="{747E61E0-9ECD-5FBD-6E2B-572D6705AC43}"/>
+              </a:ext>
+            </a:extLst>
+          </p:cNvPr>
+          <p:cNvSpPr>
+            <a:spLocks noGrp="1"/>
+          </p:cNvSpPr>
+          <p:nvPr>
+            <p:ph sz="quarter" idx="20"/>
+          </p:nvPr>
+        </p:nvSpPr>
+        <p:spPr>
+          <a:xfrm>
+            <a:off x="4845050" y="2019300"/>
+            <a:ext cx="2825750" cy="1733550"/>
+          </a:xfrm>
+        </p:spPr>
+        <p:txBody>
+          <a:bodyPr/>
+          <a:lstStyle/>
+          <a:p>
+            <a:pPr lvl="0"/>
+            <a:r>
+              <a:rPr lang="en-US"/>
+              <a:t>Click to edit Master text styles</a:t>
+            </a:r>
+          </a:p>
+          <a:p>
+            <a:pPr lvl="1"/>
+            <a:r>
+              <a:rPr lang="en-US"/>
+              <a:t>Second level</a:t>
+            </a:r>
+          </a:p>
+          <a:p>
+            <a:pPr lvl="2"/>
+            <a:r>
+              <a:rPr lang="en-US"/>
+              <a:t>Third level</a:t>
+            </a:r>
+          </a:p>
+          <a:p>
+            <a:pPr lvl="3"/>
+            <a:r>
+              <a:rPr lang="en-US"/>
+              <a:t>Fourth level</a:t>
+            </a:r>
+          </a:p>
+          <a:p>
+            <a:pPr lvl="4"/>
+            <a:r>
+              <a:rPr lang="en-US"/>
+              <a:t>Fifth level</a:t>
+            </a:r>
+          </a:p>
+        </p:txBody>
+      </p:sp>
+    </p:spTree>
+    <p:extLst>
+      <p:ext uri="{BB962C8B-B14F-4D97-AF65-F5344CB8AC3E}">
+        <p14:creationId xmlns:p14="http://schemas.microsoft.com/office/powerpoint/2010/main" val="691830828"/>
+      </p:ext>
+    </p:extLst>
   </p:cSld>
   <p:clrMapOvr>
     <a:masterClrMapping/>
@@ -11748,7 +14022,7 @@
           <p:nvPr userDrawn="1"/>
         </p:nvPicPr>
         <p:blipFill>
-          <a:blip r:embed="rId13"/>
+          <a:blip r:embed="rId14"/>
           <a:stretch>
             <a:fillRect/>
           </a:stretch>
@@ -11778,6 +14052,7 @@
     <p:sldLayoutId id="2147483670" r:id="rId9"/>
     <p:sldLayoutId id="2147483669" r:id="rId10"/>
     <p:sldLayoutId id="2147483655" r:id="rId11"/>
+    <p:sldLayoutId id="2147483680" r:id="rId12"/>
   </p:sldLayoutIdLst>
   <p:hf sldNum="0" hdr="0" ftr="0" dt="0"/>
   <p:txStyles>
@@ -12790,256 +15065,6 @@
           <p:cNvPr id="2" name="Title 1">
             <a:extLst>
               <a:ext uri="{FF2B5EF4-FFF2-40B4-BE49-F238E27FC236}">
-                <a16:creationId xmlns:a16="http://schemas.microsoft.com/office/drawing/2014/main" id="{520AD912-8EF2-4BD8-A87C-20C7322F06AA}"/>
-              </a:ext>
-            </a:extLst>
-          </p:cNvPr>
-          <p:cNvSpPr>
-            <a:spLocks noGrp="1"/>
-          </p:cNvSpPr>
-          <p:nvPr>
-            <p:ph type="title"/>
-          </p:nvPr>
-        </p:nvSpPr>
-        <p:spPr>
-          <a:xfrm>
-            <a:off x="457200" y="170500"/>
-            <a:ext cx="8229600" cy="590349"/>
-          </a:xfrm>
-        </p:spPr>
-        <p:txBody>
-          <a:bodyPr lIns="0" tIns="18000" rIns="0" bIns="18000" anchor="ctr">
-            <a:spAutoFit/>
-          </a:bodyPr>
-          <a:lstStyle/>
-          <a:p>
-            <a:r>
-              <a:rPr lang="en-US" noProof="0" dirty="0"/>
-              <a:t>Learning Outcomes </a:t>
-            </a:r>
-            <a:r>
-              <a:rPr lang="en-US" sz="2800" noProof="0" dirty="0"/>
-              <a:t>(2 of 2)</a:t>
-            </a:r>
-          </a:p>
-        </p:txBody>
-      </p:sp>
-      <p:sp>
-        <p:nvSpPr>
-          <p:cNvPr id="5" name="Content Placeholder 4">
-            <a:extLst>
-              <a:ext uri="{FF2B5EF4-FFF2-40B4-BE49-F238E27FC236}">
-                <a16:creationId xmlns:a16="http://schemas.microsoft.com/office/drawing/2014/main" id="{9D121100-505B-4390-8EAB-8E81ECD541F1}"/>
-              </a:ext>
-            </a:extLst>
-          </p:cNvPr>
-          <p:cNvSpPr>
-            <a:spLocks noGrp="1"/>
-          </p:cNvSpPr>
-          <p:nvPr>
-            <p:ph sz="quarter" idx="13"/>
-          </p:nvPr>
-        </p:nvSpPr>
-        <p:spPr>
-          <a:xfrm>
-            <a:off x="457200" y="965831"/>
-            <a:ext cx="8232775" cy="5145443"/>
-          </a:xfrm>
-        </p:spPr>
-        <p:txBody>
-          <a:bodyPr lIns="0" tIns="18000" rIns="0" bIns="18000" anchor="ctr">
-            <a:spAutoFit/>
-          </a:bodyPr>
-          <a:lstStyle/>
-          <a:p>
-            <a:pPr marL="900000" indent="-900000">
-              <a:spcBef>
-                <a:spcPts val="600"/>
-              </a:spcBef>
-              <a:buNone/>
-            </a:pPr>
-            <a:r>
-              <a:rPr lang="en-US" sz="2400" b="1" noProof="0" dirty="0">
-                <a:solidFill>
-                  <a:srgbClr val="007FA3"/>
-                </a:solidFill>
-              </a:rPr>
-              <a:t>14-6	</a:t>
-            </a:r>
-            <a:r>
-              <a:rPr lang="en-US" sz="2400" noProof="0" dirty="0">
-                <a:solidFill>
-                  <a:schemeClr val="tx1"/>
-                </a:solidFill>
-              </a:rPr>
-              <a:t>List the main components of the cerebellum and specify the functions of each.</a:t>
-            </a:r>
-          </a:p>
-          <a:p>
-            <a:pPr marL="900000" indent="-900000">
-              <a:spcBef>
-                <a:spcPts val="600"/>
-              </a:spcBef>
-              <a:buNone/>
-            </a:pPr>
-            <a:r>
-              <a:rPr lang="en-US" sz="2400" b="1" noProof="0" dirty="0">
-                <a:solidFill>
-                  <a:srgbClr val="007FA3"/>
-                </a:solidFill>
-              </a:rPr>
-              <a:t>14-7	</a:t>
-            </a:r>
-            <a:r>
-              <a:rPr lang="en-US" sz="2400" noProof="0" dirty="0">
-                <a:solidFill>
-                  <a:schemeClr val="tx1"/>
-                </a:solidFill>
-              </a:rPr>
-              <a:t>List the main components of the diencephalon and specify the functions of each.</a:t>
-            </a:r>
-          </a:p>
-          <a:p>
-            <a:pPr marL="900000" indent="-900000">
-              <a:spcBef>
-                <a:spcPts val="600"/>
-              </a:spcBef>
-              <a:buNone/>
-            </a:pPr>
-            <a:r>
-              <a:rPr lang="en-US" sz="2400" b="1" noProof="0" dirty="0">
-                <a:solidFill>
-                  <a:srgbClr val="007FA3"/>
-                </a:solidFill>
-              </a:rPr>
-              <a:t>14-8	</a:t>
-            </a:r>
-            <a:r>
-              <a:rPr lang="en-US" sz="2400" noProof="0" dirty="0">
-                <a:solidFill>
-                  <a:schemeClr val="tx1"/>
-                </a:solidFill>
-              </a:rPr>
-              <a:t>Identify the main components of the limbic system and specify the locations and functions of each.</a:t>
-            </a:r>
-          </a:p>
-          <a:p>
-            <a:pPr marL="900000" indent="-900000">
-              <a:spcBef>
-                <a:spcPts val="600"/>
-              </a:spcBef>
-              <a:buNone/>
-            </a:pPr>
-            <a:r>
-              <a:rPr lang="en-US" sz="2400" b="1" noProof="0" dirty="0">
-                <a:solidFill>
-                  <a:srgbClr val="007FA3"/>
-                </a:solidFill>
-              </a:rPr>
-              <a:t>14-9</a:t>
-            </a:r>
-            <a:r>
-              <a:rPr lang="en-US" sz="2400" noProof="0" dirty="0">
-                <a:solidFill>
-                  <a:schemeClr val="tx1"/>
-                </a:solidFill>
-              </a:rPr>
-              <a:t>	Identify the major anatomical subdivisions and functions of the cerebrum and discuss the origin and significance of the major types of brain waves seen in an electroencephalogram (</a:t>
-            </a:r>
-            <a:r>
-              <a:rPr lang="en-US" sz="2400" spc="-300" noProof="0" dirty="0">
-                <a:solidFill>
-                  <a:schemeClr val="tx1"/>
-                </a:solidFill>
-              </a:rPr>
-              <a:t>E </a:t>
-            </a:r>
-            <a:r>
-              <a:rPr lang="en-US" sz="2400" spc="-300" noProof="0" dirty="0" err="1">
-                <a:solidFill>
-                  <a:schemeClr val="tx1"/>
-                </a:solidFill>
-              </a:rPr>
-              <a:t>E</a:t>
-            </a:r>
-            <a:r>
-              <a:rPr lang="en-US" sz="2400" spc="-300" noProof="0" dirty="0">
-                <a:solidFill>
-                  <a:schemeClr val="tx1"/>
-                </a:solidFill>
-              </a:rPr>
-              <a:t> </a:t>
-            </a:r>
-            <a:r>
-              <a:rPr lang="en-US" sz="2400" noProof="0" dirty="0">
-                <a:solidFill>
-                  <a:schemeClr val="tx1"/>
-                </a:solidFill>
-              </a:rPr>
-              <a:t>G).</a:t>
-            </a:r>
-          </a:p>
-          <a:p>
-            <a:pPr marL="900000" indent="-900000">
-              <a:spcBef>
-                <a:spcPts val="600"/>
-              </a:spcBef>
-              <a:buNone/>
-            </a:pPr>
-            <a:r>
-              <a:rPr lang="en-US" sz="2400" b="1" noProof="0" dirty="0">
-                <a:solidFill>
-                  <a:srgbClr val="007FA3"/>
-                </a:solidFill>
-              </a:rPr>
-              <a:t>14-10	</a:t>
-            </a:r>
-            <a:r>
-              <a:rPr lang="en-US" sz="2400" dirty="0">
-                <a:solidFill>
-                  <a:schemeClr val="tx1"/>
-                </a:solidFill>
-              </a:rPr>
-              <a:t>Describe representative examples of cranial reflexes that produce somatic responses or visceral responses to specific stimuli.</a:t>
-            </a:r>
-          </a:p>
-        </p:txBody>
-      </p:sp>
-    </p:spTree>
-    <p:extLst>
-      <p:ext uri="{BB962C8B-B14F-4D97-AF65-F5344CB8AC3E}">
-        <p14:creationId xmlns:p14="http://schemas.microsoft.com/office/powerpoint/2010/main" val="3388916075"/>
-      </p:ext>
-    </p:extLst>
-  </p:cSld>
-  <p:clrMapOvr>
-    <a:masterClrMapping/>
-  </p:clrMapOvr>
-</p:sld>
-</file>
-
-<file path=ppt/slides/slide4.xml><?xml version="1.0" encoding="utf-8"?>
-<p:sld xmlns:a="http://schemas.openxmlformats.org/drawingml/2006/main" xmlns:r="http://schemas.openxmlformats.org/officeDocument/2006/relationships" xmlns:p="http://schemas.openxmlformats.org/presentationml/2006/main">
-  <p:cSld>
-    <p:spTree>
-      <p:nvGrpSpPr>
-        <p:cNvPr id="1" name=""/>
-        <p:cNvGrpSpPr/>
-        <p:nvPr/>
-      </p:nvGrpSpPr>
-      <p:grpSpPr>
-        <a:xfrm>
-          <a:off x="0" y="0"/>
-          <a:ext cx="0" cy="0"/>
-          <a:chOff x="0" y="0"/>
-          <a:chExt cx="0" cy="0"/>
-        </a:xfrm>
-      </p:grpSpPr>
-      <p:sp>
-        <p:nvSpPr>
-          <p:cNvPr id="2" name="Title 1">
-            <a:extLst>
-              <a:ext uri="{FF2B5EF4-FFF2-40B4-BE49-F238E27FC236}">
                 <a16:creationId xmlns:a16="http://schemas.microsoft.com/office/drawing/2014/main" id="{23245969-C182-4446-B6DE-728EC34D58AF}"/>
               </a:ext>
             </a:extLst>
@@ -13263,218 +15288,7 @@
 </p:sld>
 </file>
 
-<file path=ppt/slides/slide5.xml><?xml version="1.0" encoding="utf-8"?>
-<p:sld xmlns:a="http://schemas.openxmlformats.org/drawingml/2006/main" xmlns:r="http://schemas.openxmlformats.org/officeDocument/2006/relationships" xmlns:p="http://schemas.openxmlformats.org/presentationml/2006/main">
-  <p:cSld>
-    <p:spTree>
-      <p:nvGrpSpPr>
-        <p:cNvPr id="1" name=""/>
-        <p:cNvGrpSpPr/>
-        <p:nvPr/>
-      </p:nvGrpSpPr>
-      <p:grpSpPr>
-        <a:xfrm>
-          <a:off x="0" y="0"/>
-          <a:ext cx="0" cy="0"/>
-          <a:chOff x="0" y="0"/>
-          <a:chExt cx="0" cy="0"/>
-        </a:xfrm>
-      </p:grpSpPr>
-      <p:sp>
-        <p:nvSpPr>
-          <p:cNvPr id="2" name="Title 1">
-            <a:extLst>
-              <a:ext uri="{FF2B5EF4-FFF2-40B4-BE49-F238E27FC236}">
-                <a16:creationId xmlns:a16="http://schemas.microsoft.com/office/drawing/2014/main" id="{23245969-C182-4446-B6DE-728EC34D58AF}"/>
-              </a:ext>
-            </a:extLst>
-          </p:cNvPr>
-          <p:cNvSpPr>
-            <a:spLocks noGrp="1"/>
-          </p:cNvSpPr>
-          <p:nvPr>
-            <p:ph type="title"/>
-          </p:nvPr>
-        </p:nvSpPr>
-        <p:spPr>
-          <a:xfrm>
-            <a:off x="457200" y="160059"/>
-            <a:ext cx="8229600" cy="584504"/>
-          </a:xfrm>
-        </p:spPr>
-        <p:txBody>
-          <a:bodyPr lIns="0" tIns="18000" rIns="0" bIns="18000" anchor="ctr">
-            <a:spAutoFit/>
-          </a:bodyPr>
-          <a:lstStyle/>
-          <a:p>
-            <a:r>
-              <a:rPr lang="en-US" noProof="0" dirty="0"/>
-              <a:t>14</a:t>
-            </a:r>
-            <a:r>
-              <a:rPr lang="en-US" sz="3600" b="1" noProof="0" dirty="0">
-                <a:solidFill>
-                  <a:srgbClr val="007FA3"/>
-                </a:solidFill>
-              </a:rPr>
-              <a:t>-</a:t>
-            </a:r>
-            <a:r>
-              <a:rPr lang="en-US" noProof="0" dirty="0"/>
-              <a:t>1 The Brain </a:t>
-            </a:r>
-            <a:r>
-              <a:rPr lang="en-US" sz="2800" noProof="0" dirty="0"/>
-              <a:t>(1 of 8)</a:t>
-            </a:r>
-          </a:p>
-        </p:txBody>
-      </p:sp>
-      <p:sp>
-        <p:nvSpPr>
-          <p:cNvPr id="5" name="Content Placeholder 4">
-            <a:extLst>
-              <a:ext uri="{FF2B5EF4-FFF2-40B4-BE49-F238E27FC236}">
-                <a16:creationId xmlns:a16="http://schemas.microsoft.com/office/drawing/2014/main" id="{27D11E13-796C-4B0C-9F17-3CA6F920EC63}"/>
-              </a:ext>
-            </a:extLst>
-          </p:cNvPr>
-          <p:cNvSpPr>
-            <a:spLocks noGrp="1"/>
-          </p:cNvSpPr>
-          <p:nvPr>
-            <p:ph sz="quarter" idx="13"/>
-          </p:nvPr>
-        </p:nvSpPr>
-        <p:spPr>
-          <a:xfrm>
-            <a:off x="457200" y="973253"/>
-            <a:ext cx="8229600" cy="1144347"/>
-          </a:xfrm>
-        </p:spPr>
-        <p:txBody>
-          <a:bodyPr lIns="0" tIns="18000" rIns="0" bIns="18000" anchor="ctr">
-            <a:spAutoFit/>
-          </a:bodyPr>
-          <a:lstStyle/>
-          <a:p>
-            <a:pPr marL="0" indent="0">
-              <a:buNone/>
-            </a:pPr>
-            <a:r>
-              <a:rPr lang="en-US" sz="2400" b="1" noProof="0" dirty="0"/>
-              <a:t>Learning Outcome: </a:t>
-            </a:r>
-            <a:r>
-              <a:rPr lang="en-US" sz="2400" noProof="0" dirty="0"/>
-              <a:t>Name the major brain regions, vesicles, and ventricles and describe the locations and functions of each.</a:t>
-            </a:r>
-          </a:p>
-        </p:txBody>
-      </p:sp>
-      <p:sp>
-        <p:nvSpPr>
-          <p:cNvPr id="6" name="Content Placeholder 5">
-            <a:extLst>
-              <a:ext uri="{FF2B5EF4-FFF2-40B4-BE49-F238E27FC236}">
-                <a16:creationId xmlns:a16="http://schemas.microsoft.com/office/drawing/2014/main" id="{A2E21D3B-5D31-4E7C-8CC8-A8C99E8BA789}"/>
-              </a:ext>
-            </a:extLst>
-          </p:cNvPr>
-          <p:cNvSpPr>
-            <a:spLocks noGrp="1"/>
-          </p:cNvSpPr>
-          <p:nvPr>
-            <p:ph sz="quarter" idx="14"/>
-          </p:nvPr>
-        </p:nvSpPr>
-        <p:spPr>
-          <a:xfrm>
-            <a:off x="457200" y="2370905"/>
-            <a:ext cx="8229600" cy="2084459"/>
-          </a:xfrm>
-        </p:spPr>
-        <p:txBody>
-          <a:bodyPr wrap="square" lIns="0" tIns="18000" rIns="0" bIns="18000" anchor="ctr">
-            <a:spAutoFit/>
-          </a:bodyPr>
-          <a:lstStyle/>
-          <a:p>
-            <a:pPr marL="342900" indent="-342900">
-              <a:spcBef>
-                <a:spcPts val="600"/>
-              </a:spcBef>
-            </a:pPr>
-            <a:r>
-              <a:rPr lang="en-US" altLang="en-US" sz="2400" noProof="0" dirty="0">
-                <a:solidFill>
-                  <a:schemeClr val="tx1"/>
-                </a:solidFill>
-              </a:rPr>
-              <a:t>Regions of the brain</a:t>
-            </a:r>
-          </a:p>
-          <a:p>
-            <a:pPr marL="829818" lvl="1" indent="-342900"/>
-            <a:r>
-              <a:rPr lang="en-US" altLang="en-US" sz="2400" noProof="0" dirty="0">
-                <a:solidFill>
-                  <a:schemeClr val="tx1"/>
-                </a:solidFill>
-              </a:rPr>
-              <a:t>Cerebrum</a:t>
-            </a:r>
-          </a:p>
-          <a:p>
-            <a:pPr marL="829818" lvl="1" indent="-342900"/>
-            <a:r>
-              <a:rPr lang="en-US" altLang="en-US" sz="2400" noProof="0" dirty="0">
-                <a:solidFill>
-                  <a:schemeClr val="tx1"/>
-                </a:solidFill>
-              </a:rPr>
-              <a:t>Cerebellum</a:t>
-            </a:r>
-          </a:p>
-          <a:p>
-            <a:pPr marL="829818" lvl="1" indent="-342900"/>
-            <a:r>
-              <a:rPr lang="en-US" altLang="en-US" sz="2400" noProof="0" dirty="0">
-                <a:solidFill>
-                  <a:schemeClr val="tx1"/>
-                </a:solidFill>
-              </a:rPr>
-              <a:t>Diencephalon</a:t>
-            </a:r>
-          </a:p>
-          <a:p>
-            <a:pPr marL="829818" lvl="1" indent="-342900"/>
-            <a:r>
-              <a:rPr lang="en-US" altLang="en-US" sz="2400" noProof="0" dirty="0">
-                <a:solidFill>
-                  <a:schemeClr val="tx1"/>
-                </a:solidFill>
-              </a:rPr>
-              <a:t>Brainstem</a:t>
-            </a:r>
-          </a:p>
-        </p:txBody>
-      </p:sp>
-    </p:spTree>
-    <p:extLst>
-      <p:ext uri="{BB962C8B-B14F-4D97-AF65-F5344CB8AC3E}">
-        <p14:creationId xmlns:p14="http://schemas.microsoft.com/office/powerpoint/2010/main" val="1437332569"/>
-      </p:ext>
-    </p:extLst>
-  </p:cSld>
-  <p:clrMapOvr>
-    <a:masterClrMapping/>
-  </p:clrMapOvr>
-</p:sld>
-</file>
-
-<file path=ppt/slides/slide6.xml><?xml version="1.0" encoding="utf-8"?>
+<file path=ppt/slides/slide4.xml><?xml version="1.0" encoding="utf-8"?>
 <p:sld xmlns:a="http://schemas.openxmlformats.org/drawingml/2006/main" xmlns:r="http://schemas.openxmlformats.org/officeDocument/2006/relationships" xmlns:p="http://schemas.openxmlformats.org/presentationml/2006/main">
   <p:cSld>
     <p:spTree>
@@ -13609,6 +15423,2868 @@
     <p:extLst>
       <p:ext uri="{BB962C8B-B14F-4D97-AF65-F5344CB8AC3E}">
         <p14:creationId xmlns:p14="http://schemas.microsoft.com/office/powerpoint/2010/main" val="1691533453"/>
+      </p:ext>
+    </p:extLst>
+  </p:cSld>
+  <p:clrMapOvr>
+    <a:masterClrMapping/>
+  </p:clrMapOvr>
+</p:sld>
+</file>
+
+<file path=ppt/slides/slide5.xml><?xml version="1.0" encoding="utf-8"?>
+<p:sld xmlns:a="http://schemas.openxmlformats.org/drawingml/2006/main" xmlns:r="http://schemas.openxmlformats.org/officeDocument/2006/relationships" xmlns:p="http://schemas.openxmlformats.org/presentationml/2006/main">
+  <p:cSld>
+    <p:spTree>
+      <p:nvGrpSpPr>
+        <p:cNvPr id="1" name=""/>
+        <p:cNvGrpSpPr/>
+        <p:nvPr/>
+      </p:nvGrpSpPr>
+      <p:grpSpPr>
+        <a:xfrm>
+          <a:off x="0" y="0"/>
+          <a:ext cx="0" cy="0"/>
+          <a:chOff x="0" y="0"/>
+          <a:chExt cx="0" cy="0"/>
+        </a:xfrm>
+      </p:grpSpPr>
+      <p:sp>
+        <p:nvSpPr>
+          <p:cNvPr id="2" name="Title 1">
+            <a:extLst>
+              <a:ext uri="{FF2B5EF4-FFF2-40B4-BE49-F238E27FC236}">
+                <a16:creationId xmlns:a16="http://schemas.microsoft.com/office/drawing/2014/main" id="{31BA2FB0-31A8-132A-567E-797810C0DD63}"/>
+              </a:ext>
+            </a:extLst>
+          </p:cNvPr>
+          <p:cNvSpPr>
+            <a:spLocks noGrp="1"/>
+          </p:cNvSpPr>
+          <p:nvPr>
+            <p:ph type="title"/>
+          </p:nvPr>
+        </p:nvSpPr>
+        <p:spPr>
+          <a:xfrm>
+            <a:off x="457200" y="161400"/>
+            <a:ext cx="8218488" cy="590349"/>
+          </a:xfrm>
+        </p:spPr>
+        <p:txBody>
+          <a:bodyPr wrap="square" lIns="0" tIns="18000" rIns="0" bIns="18000" anchor="ctr">
+            <a:spAutoFit/>
+          </a:bodyPr>
+          <a:lstStyle/>
+          <a:p>
+            <a:r>
+              <a:rPr lang="en-US" noProof="0" dirty="0"/>
+              <a:t>14</a:t>
+            </a:r>
+            <a:r>
+              <a:rPr lang="en-US" sz="3600" b="1" noProof="0" dirty="0">
+                <a:solidFill>
+                  <a:srgbClr val="007FA3"/>
+                </a:solidFill>
+              </a:rPr>
+              <a:t>-</a:t>
+            </a:r>
+            <a:r>
+              <a:rPr lang="en-US" noProof="0" dirty="0"/>
+              <a:t>4 The Pons </a:t>
+            </a:r>
+            <a:r>
+              <a:rPr lang="en-US" sz="2800" noProof="0" dirty="0"/>
+              <a:t>(1 of 2)</a:t>
+            </a:r>
+          </a:p>
+        </p:txBody>
+      </p:sp>
+      <p:sp>
+        <p:nvSpPr>
+          <p:cNvPr id="3" name="Content Placeholder 2">
+            <a:extLst>
+              <a:ext uri="{FF2B5EF4-FFF2-40B4-BE49-F238E27FC236}">
+                <a16:creationId xmlns:a16="http://schemas.microsoft.com/office/drawing/2014/main" id="{131A8015-F211-1BB4-8623-C81278FAEB9E}"/>
+              </a:ext>
+            </a:extLst>
+          </p:cNvPr>
+          <p:cNvSpPr>
+            <a:spLocks noGrp="1"/>
+          </p:cNvSpPr>
+          <p:nvPr>
+            <p:ph sz="quarter" idx="13"/>
+          </p:nvPr>
+        </p:nvSpPr>
+        <p:spPr>
+          <a:xfrm>
+            <a:off x="457200" y="976196"/>
+            <a:ext cx="8229599" cy="775015"/>
+          </a:xfrm>
+        </p:spPr>
+        <p:txBody>
+          <a:bodyPr wrap="square" lIns="0" tIns="18000" rIns="0" bIns="18000" anchor="ctr">
+            <a:spAutoFit/>
+          </a:bodyPr>
+          <a:lstStyle/>
+          <a:p>
+            <a:pPr marL="0" indent="0">
+              <a:spcBef>
+                <a:spcPts val="600"/>
+              </a:spcBef>
+              <a:buNone/>
+            </a:pPr>
+            <a:r>
+              <a:rPr lang="en-US" sz="2400" b="1" noProof="0" dirty="0"/>
+              <a:t>Learning Outcome: </a:t>
+            </a:r>
+            <a:r>
+              <a:rPr lang="en-US" sz="2400" noProof="0" dirty="0"/>
+              <a:t>List the main components of the pons and specify the functions of each.</a:t>
+            </a:r>
+          </a:p>
+        </p:txBody>
+      </p:sp>
+      <p:sp>
+        <p:nvSpPr>
+          <p:cNvPr id="4" name="Content Placeholder 3">
+            <a:extLst>
+              <a:ext uri="{FF2B5EF4-FFF2-40B4-BE49-F238E27FC236}">
+                <a16:creationId xmlns:a16="http://schemas.microsoft.com/office/drawing/2014/main" id="{E54597D1-2315-D4A2-F5A6-BFCFF5F97A12}"/>
+              </a:ext>
+            </a:extLst>
+          </p:cNvPr>
+          <p:cNvSpPr>
+            <a:spLocks noGrp="1"/>
+          </p:cNvSpPr>
+          <p:nvPr>
+            <p:ph sz="quarter" idx="14"/>
+          </p:nvPr>
+        </p:nvSpPr>
+        <p:spPr>
+          <a:xfrm>
+            <a:off x="442559" y="1927149"/>
+            <a:ext cx="8218488" cy="851959"/>
+          </a:xfrm>
+        </p:spPr>
+        <p:txBody>
+          <a:bodyPr wrap="square" lIns="0" tIns="18000" rIns="0" bIns="18000" anchor="ctr">
+            <a:spAutoFit/>
+          </a:bodyPr>
+          <a:lstStyle/>
+          <a:p>
+            <a:pPr marL="342900" indent="-342900">
+              <a:spcBef>
+                <a:spcPts val="600"/>
+              </a:spcBef>
+            </a:pPr>
+            <a:r>
+              <a:rPr lang="en-US" sz="2400" noProof="0" dirty="0"/>
+              <a:t>The </a:t>
+            </a:r>
+            <a:r>
+              <a:rPr lang="en-US" sz="2400" b="1" noProof="0" dirty="0"/>
+              <a:t>pons</a:t>
+            </a:r>
+            <a:r>
+              <a:rPr lang="en-US" sz="2400" noProof="0" dirty="0"/>
+              <a:t> contains:</a:t>
+            </a:r>
+          </a:p>
+          <a:p>
+            <a:pPr marL="829818" lvl="1" indent="-342900"/>
+            <a:r>
+              <a:rPr lang="en-US" sz="2400" noProof="0" dirty="0"/>
+              <a:t>Sensory and motor nuclei of cranial nerves </a:t>
+            </a:r>
+          </a:p>
+        </p:txBody>
+      </p:sp>
+      <p:graphicFrame>
+        <p:nvGraphicFramePr>
+          <p:cNvPr id="6" name="Object 5" descr="Open parenthesis roman five, roman six, roman seven, roman eight close parenthesis">
+            <a:extLst>
+              <a:ext uri="{FF2B5EF4-FFF2-40B4-BE49-F238E27FC236}">
+                <a16:creationId xmlns:a16="http://schemas.microsoft.com/office/drawing/2014/main" id="{8234819A-F0FE-EE4B-9920-37E144B942B3}"/>
+              </a:ext>
+            </a:extLst>
+          </p:cNvPr>
+          <p:cNvGraphicFramePr>
+            <a:graphicFrameLocks noChangeAspect="1"/>
+          </p:cNvGraphicFramePr>
+          <p:nvPr/>
+        </p:nvGraphicFramePr>
+        <p:xfrm>
+          <a:off x="1276898" y="2872821"/>
+          <a:ext cx="1786413" cy="445294"/>
+        </p:xfrm>
+        <a:graphic>
+          <a:graphicData uri="http://schemas.openxmlformats.org/presentationml/2006/ole">
+            <mc:AlternateContent xmlns:mc="http://schemas.openxmlformats.org/markup-compatibility/2006">
+              <mc:Choice xmlns:v="urn:schemas-microsoft-com:vml" Requires="v">
+                <p:oleObj name="Equation" r:id="rId2" imgW="1041120" imgH="253800" progId="Equation.DSMT4">
+                  <p:embed/>
+                </p:oleObj>
+              </mc:Choice>
+              <mc:Fallback>
+                <p:oleObj name="Equation" r:id="rId2" imgW="1041120" imgH="253800" progId="Equation.DSMT4">
+                  <p:embed/>
+                  <p:pic>
+                    <p:nvPicPr>
+                      <p:cNvPr id="6" name="Object 5" descr="Open parenthesis roman five, roman six, roman seven, roman eight close parenthesis">
+                        <a:extLst>
+                          <a:ext uri="{FF2B5EF4-FFF2-40B4-BE49-F238E27FC236}">
+                            <a16:creationId xmlns:a16="http://schemas.microsoft.com/office/drawing/2014/main" id="{8234819A-F0FE-EE4B-9920-37E144B942B3}"/>
+                          </a:ext>
+                        </a:extLst>
+                      </p:cNvPr>
+                      <p:cNvPicPr>
+                        <a:picLocks noChangeAspect="1" noChangeArrowheads="1"/>
+                      </p:cNvPicPr>
+                      <p:nvPr/>
+                    </p:nvPicPr>
+                    <p:blipFill>
+                      <a:blip r:embed="rId3"/>
+                      <a:srcRect/>
+                      <a:stretch>
+                        <a:fillRect/>
+                      </a:stretch>
+                    </p:blipFill>
+                    <p:spPr bwMode="auto">
+                      <a:xfrm>
+                        <a:off x="1276898" y="2872821"/>
+                        <a:ext cx="1786413" cy="445294"/>
+                      </a:xfrm>
+                      <a:prstGeom prst="rect">
+                        <a:avLst/>
+                      </a:prstGeom>
+                      <a:noFill/>
+                      <a:ln>
+                        <a:noFill/>
+                      </a:ln>
+                      <a:extLst>
+                        <a:ext uri="{909E8E84-426E-40DD-AFC4-6F175D3DCCD1}">
+                          <a14:hiddenFill xmlns:a14="http://schemas.microsoft.com/office/drawing/2010/main">
+                            <a:solidFill>
+                              <a:srgbClr val="FFFFFF"/>
+                            </a:solidFill>
+                          </a14:hiddenFill>
+                        </a:ext>
+                        <a:ext uri="{91240B29-F687-4F45-9708-019B960494DF}">
+                          <a14:hiddenLine xmlns:a14="http://schemas.microsoft.com/office/drawing/2010/main" w="9525">
+                            <a:solidFill>
+                              <a:srgbClr val="000000"/>
+                            </a:solidFill>
+                            <a:miter lim="800000"/>
+                            <a:headEnd/>
+                            <a:tailEnd/>
+                          </a14:hiddenLine>
+                        </a:ext>
+                      </a:extLst>
+                    </p:spPr>
+                  </p:pic>
+                </p:oleObj>
+              </mc:Fallback>
+            </mc:AlternateContent>
+          </a:graphicData>
+        </a:graphic>
+      </p:graphicFrame>
+      <p:sp>
+        <p:nvSpPr>
+          <p:cNvPr id="5" name="Content Placeholder 4">
+            <a:extLst>
+              <a:ext uri="{FF2B5EF4-FFF2-40B4-BE49-F238E27FC236}">
+                <a16:creationId xmlns:a16="http://schemas.microsoft.com/office/drawing/2014/main" id="{F0B96754-CC76-64BA-E9EC-7390F63BA5C9}"/>
+              </a:ext>
+            </a:extLst>
+          </p:cNvPr>
+          <p:cNvSpPr>
+            <a:spLocks noGrp="1"/>
+          </p:cNvSpPr>
+          <p:nvPr>
+            <p:ph sz="quarter" idx="15"/>
+          </p:nvPr>
+        </p:nvSpPr>
+        <p:spPr>
+          <a:xfrm>
+            <a:off x="457200" y="3448701"/>
+            <a:ext cx="8229598" cy="818716"/>
+          </a:xfrm>
+        </p:spPr>
+        <p:txBody>
+          <a:bodyPr wrap="square" lIns="0" tIns="18000" rIns="0" bIns="18000" anchor="ctr">
+            <a:spAutoFit/>
+          </a:bodyPr>
+          <a:lstStyle/>
+          <a:p>
+            <a:pPr marL="829818" lvl="1" indent="-342900"/>
+            <a:r>
+              <a:rPr lang="en-US" sz="2400" noProof="0" dirty="0"/>
+              <a:t>Nuclei involved with the control of respiration</a:t>
+            </a:r>
+          </a:p>
+          <a:p>
+            <a:pPr marL="1229868" lvl="2" indent="-342900"/>
+            <a:r>
+              <a:rPr lang="en-US" sz="2400" noProof="0" dirty="0"/>
+              <a:t>Apneustic center and </a:t>
+            </a:r>
+            <a:r>
+              <a:rPr lang="en-US" sz="2400" noProof="0" dirty="0" err="1"/>
+              <a:t>pneumotaxic</a:t>
+            </a:r>
+            <a:r>
+              <a:rPr lang="en-US" sz="2400" noProof="0" dirty="0"/>
+              <a:t> center</a:t>
+            </a:r>
+          </a:p>
+        </p:txBody>
+      </p:sp>
+      <mc:AlternateContent xmlns:mc="http://schemas.openxmlformats.org/markup-compatibility/2006" xmlns:p14="http://schemas.microsoft.com/office/powerpoint/2010/main">
+        <mc:Choice Requires="p14">
+          <p:contentPart p14:bwMode="auto" r:id="rId4">
+            <p14:nvContentPartPr>
+              <p14:cNvPr id="7" name="Ink 6">
+                <a:extLst>
+                  <a:ext uri="{FF2B5EF4-FFF2-40B4-BE49-F238E27FC236}">
+                    <a16:creationId xmlns:a16="http://schemas.microsoft.com/office/drawing/2014/main" id="{6C743C6B-432D-B3C3-D29D-33CA020121A0}"/>
+                  </a:ext>
+                </a:extLst>
+              </p14:cNvPr>
+              <p14:cNvContentPartPr/>
+              <p14:nvPr/>
+            </p14:nvContentPartPr>
+            <p14:xfrm>
+              <a:off x="2182072" y="4266886"/>
+              <a:ext cx="244080" cy="539280"/>
+            </p14:xfrm>
+          </p:contentPart>
+        </mc:Choice>
+        <mc:Fallback xmlns="">
+          <p:pic>
+            <p:nvPicPr>
+              <p:cNvPr id="7" name="Ink 6">
+                <a:extLst>
+                  <a:ext uri="{FF2B5EF4-FFF2-40B4-BE49-F238E27FC236}">
+                    <a16:creationId xmlns:a16="http://schemas.microsoft.com/office/drawing/2014/main" id="{6C743C6B-432D-B3C3-D29D-33CA020121A0}"/>
+                  </a:ext>
+                </a:extLst>
+              </p:cNvPr>
+              <p:cNvPicPr/>
+              <p:nvPr/>
+            </p:nvPicPr>
+            <p:blipFill>
+              <a:blip r:embed="rId5"/>
+              <a:stretch>
+                <a:fillRect/>
+              </a:stretch>
+            </p:blipFill>
+            <p:spPr>
+              <a:xfrm>
+                <a:off x="2164072" y="4249246"/>
+                <a:ext cx="279720" cy="574920"/>
+              </a:xfrm>
+              <a:prstGeom prst="rect">
+                <a:avLst/>
+              </a:prstGeom>
+            </p:spPr>
+          </p:pic>
+        </mc:Fallback>
+      </mc:AlternateContent>
+      <p:grpSp>
+        <p:nvGrpSpPr>
+          <p:cNvPr id="30" name="Group 29">
+            <a:extLst>
+              <a:ext uri="{FF2B5EF4-FFF2-40B4-BE49-F238E27FC236}">
+                <a16:creationId xmlns:a16="http://schemas.microsoft.com/office/drawing/2014/main" id="{68D4E44A-FCF4-2DA3-C1EA-66FB41B3860B}"/>
+              </a:ext>
+            </a:extLst>
+          </p:cNvPr>
+          <p:cNvGrpSpPr/>
+          <p:nvPr/>
+        </p:nvGrpSpPr>
+        <p:grpSpPr>
+          <a:xfrm>
+            <a:off x="1739632" y="4994806"/>
+            <a:ext cx="1983960" cy="1111320"/>
+            <a:chOff x="1739632" y="4994806"/>
+            <a:chExt cx="1983960" cy="1111320"/>
+          </a:xfrm>
+        </p:grpSpPr>
+        <mc:AlternateContent xmlns:mc="http://schemas.openxmlformats.org/markup-compatibility/2006" xmlns:p14="http://schemas.microsoft.com/office/powerpoint/2010/main">
+          <mc:Choice Requires="p14">
+            <p:contentPart p14:bwMode="auto" r:id="rId6">
+              <p14:nvContentPartPr>
+                <p14:cNvPr id="8" name="Ink 7">
+                  <a:extLst>
+                    <a:ext uri="{FF2B5EF4-FFF2-40B4-BE49-F238E27FC236}">
+                      <a16:creationId xmlns:a16="http://schemas.microsoft.com/office/drawing/2014/main" id="{E3005E43-C5B2-9D07-4B68-7947E3F655DC}"/>
+                    </a:ext>
+                  </a:extLst>
+                </p14:cNvPr>
+                <p14:cNvContentPartPr/>
+                <p14:nvPr/>
+              </p14:nvContentPartPr>
+              <p14:xfrm>
+                <a:off x="1739632" y="5191006"/>
+                <a:ext cx="194400" cy="466200"/>
+              </p14:xfrm>
+            </p:contentPart>
+          </mc:Choice>
+          <mc:Fallback xmlns="">
+            <p:pic>
+              <p:nvPicPr>
+                <p:cNvPr id="8" name="Ink 7">
+                  <a:extLst>
+                    <a:ext uri="{FF2B5EF4-FFF2-40B4-BE49-F238E27FC236}">
+                      <a16:creationId xmlns:a16="http://schemas.microsoft.com/office/drawing/2014/main" id="{E3005E43-C5B2-9D07-4B68-7947E3F655DC}"/>
+                    </a:ext>
+                  </a:extLst>
+                </p:cNvPr>
+                <p:cNvPicPr/>
+                <p:nvPr/>
+              </p:nvPicPr>
+              <p:blipFill>
+                <a:blip r:embed="rId7"/>
+                <a:stretch>
+                  <a:fillRect/>
+                </a:stretch>
+              </p:blipFill>
+              <p:spPr>
+                <a:xfrm>
+                  <a:off x="1721632" y="5173366"/>
+                  <a:ext cx="230040" cy="501840"/>
+                </a:xfrm>
+                <a:prstGeom prst="rect">
+                  <a:avLst/>
+                </a:prstGeom>
+              </p:spPr>
+            </p:pic>
+          </mc:Fallback>
+        </mc:AlternateContent>
+        <mc:AlternateContent xmlns:mc="http://schemas.openxmlformats.org/markup-compatibility/2006" xmlns:p14="http://schemas.microsoft.com/office/powerpoint/2010/main">
+          <mc:Choice Requires="p14">
+            <p:contentPart p14:bwMode="auto" r:id="rId8">
+              <p14:nvContentPartPr>
+                <p14:cNvPr id="9" name="Ink 8">
+                  <a:extLst>
+                    <a:ext uri="{FF2B5EF4-FFF2-40B4-BE49-F238E27FC236}">
+                      <a16:creationId xmlns:a16="http://schemas.microsoft.com/office/drawing/2014/main" id="{25770949-F91F-43D6-C547-AAD4FF40B5B3}"/>
+                    </a:ext>
+                  </a:extLst>
+                </p14:cNvPr>
+                <p14:cNvContentPartPr/>
+                <p14:nvPr/>
+              </p14:nvContentPartPr>
+              <p14:xfrm>
+                <a:off x="2019712" y="5187406"/>
+                <a:ext cx="144000" cy="170280"/>
+              </p14:xfrm>
+            </p:contentPart>
+          </mc:Choice>
+          <mc:Fallback xmlns="">
+            <p:pic>
+              <p:nvPicPr>
+                <p:cNvPr id="9" name="Ink 8">
+                  <a:extLst>
+                    <a:ext uri="{FF2B5EF4-FFF2-40B4-BE49-F238E27FC236}">
+                      <a16:creationId xmlns:a16="http://schemas.microsoft.com/office/drawing/2014/main" id="{25770949-F91F-43D6-C547-AAD4FF40B5B3}"/>
+                    </a:ext>
+                  </a:extLst>
+                </p:cNvPr>
+                <p:cNvPicPr/>
+                <p:nvPr/>
+              </p:nvPicPr>
+              <p:blipFill>
+                <a:blip r:embed="rId9"/>
+                <a:stretch>
+                  <a:fillRect/>
+                </a:stretch>
+              </p:blipFill>
+              <p:spPr>
+                <a:xfrm>
+                  <a:off x="2002072" y="5169406"/>
+                  <a:ext cx="179640" cy="205920"/>
+                </a:xfrm>
+                <a:prstGeom prst="rect">
+                  <a:avLst/>
+                </a:prstGeom>
+              </p:spPr>
+            </p:pic>
+          </mc:Fallback>
+        </mc:AlternateContent>
+        <mc:AlternateContent xmlns:mc="http://schemas.openxmlformats.org/markup-compatibility/2006" xmlns:p14="http://schemas.microsoft.com/office/powerpoint/2010/main">
+          <mc:Choice Requires="p14">
+            <p:contentPart p14:bwMode="auto" r:id="rId10">
+              <p14:nvContentPartPr>
+                <p14:cNvPr id="10" name="Ink 9">
+                  <a:extLst>
+                    <a:ext uri="{FF2B5EF4-FFF2-40B4-BE49-F238E27FC236}">
+                      <a16:creationId xmlns:a16="http://schemas.microsoft.com/office/drawing/2014/main" id="{1EBBA7D0-1FAD-A8EE-6C22-106C7A5A118B}"/>
+                    </a:ext>
+                  </a:extLst>
+                </p14:cNvPr>
+                <p14:cNvContentPartPr/>
+                <p14:nvPr/>
+              </p14:nvContentPartPr>
+              <p14:xfrm>
+                <a:off x="2213752" y="4994806"/>
+                <a:ext cx="21960" cy="330480"/>
+              </p14:xfrm>
+            </p:contentPart>
+          </mc:Choice>
+          <mc:Fallback xmlns="">
+            <p:pic>
+              <p:nvPicPr>
+                <p:cNvPr id="10" name="Ink 9">
+                  <a:extLst>
+                    <a:ext uri="{FF2B5EF4-FFF2-40B4-BE49-F238E27FC236}">
+                      <a16:creationId xmlns:a16="http://schemas.microsoft.com/office/drawing/2014/main" id="{1EBBA7D0-1FAD-A8EE-6C22-106C7A5A118B}"/>
+                    </a:ext>
+                  </a:extLst>
+                </p:cNvPr>
+                <p:cNvPicPr/>
+                <p:nvPr/>
+              </p:nvPicPr>
+              <p:blipFill>
+                <a:blip r:embed="rId11"/>
+                <a:stretch>
+                  <a:fillRect/>
+                </a:stretch>
+              </p:blipFill>
+              <p:spPr>
+                <a:xfrm>
+                  <a:off x="2195752" y="4977166"/>
+                  <a:ext cx="57600" cy="366120"/>
+                </a:xfrm>
+                <a:prstGeom prst="rect">
+                  <a:avLst/>
+                </a:prstGeom>
+              </p:spPr>
+            </p:pic>
+          </mc:Fallback>
+        </mc:AlternateContent>
+        <mc:AlternateContent xmlns:mc="http://schemas.openxmlformats.org/markup-compatibility/2006" xmlns:p14="http://schemas.microsoft.com/office/powerpoint/2010/main">
+          <mc:Choice Requires="p14">
+            <p:contentPart p14:bwMode="auto" r:id="rId12">
+              <p14:nvContentPartPr>
+                <p14:cNvPr id="11" name="Ink 10">
+                  <a:extLst>
+                    <a:ext uri="{FF2B5EF4-FFF2-40B4-BE49-F238E27FC236}">
+                      <a16:creationId xmlns:a16="http://schemas.microsoft.com/office/drawing/2014/main" id="{A08E5CAB-C698-9F70-85D7-35D5FA522C5B}"/>
+                    </a:ext>
+                  </a:extLst>
+                </p14:cNvPr>
+                <p14:cNvContentPartPr/>
+                <p14:nvPr/>
+              </p14:nvContentPartPr>
+              <p14:xfrm>
+                <a:off x="2307352" y="5176966"/>
+                <a:ext cx="60840" cy="151920"/>
+              </p14:xfrm>
+            </p:contentPart>
+          </mc:Choice>
+          <mc:Fallback xmlns="">
+            <p:pic>
+              <p:nvPicPr>
+                <p:cNvPr id="11" name="Ink 10">
+                  <a:extLst>
+                    <a:ext uri="{FF2B5EF4-FFF2-40B4-BE49-F238E27FC236}">
+                      <a16:creationId xmlns:a16="http://schemas.microsoft.com/office/drawing/2014/main" id="{A08E5CAB-C698-9F70-85D7-35D5FA522C5B}"/>
+                    </a:ext>
+                  </a:extLst>
+                </p:cNvPr>
+                <p:cNvPicPr/>
+                <p:nvPr/>
+              </p:nvPicPr>
+              <p:blipFill>
+                <a:blip r:embed="rId13"/>
+                <a:stretch>
+                  <a:fillRect/>
+                </a:stretch>
+              </p:blipFill>
+              <p:spPr>
+                <a:xfrm>
+                  <a:off x="2289712" y="5158966"/>
+                  <a:ext cx="96480" cy="187560"/>
+                </a:xfrm>
+                <a:prstGeom prst="rect">
+                  <a:avLst/>
+                </a:prstGeom>
+              </p:spPr>
+            </p:pic>
+          </mc:Fallback>
+        </mc:AlternateContent>
+        <mc:AlternateContent xmlns:mc="http://schemas.openxmlformats.org/markup-compatibility/2006" xmlns:p14="http://schemas.microsoft.com/office/powerpoint/2010/main">
+          <mc:Choice Requires="p14">
+            <p:contentPart p14:bwMode="auto" r:id="rId14">
+              <p14:nvContentPartPr>
+                <p14:cNvPr id="12" name="Ink 11">
+                  <a:extLst>
+                    <a:ext uri="{FF2B5EF4-FFF2-40B4-BE49-F238E27FC236}">
+                      <a16:creationId xmlns:a16="http://schemas.microsoft.com/office/drawing/2014/main" id="{6FB3EA08-4609-935F-519D-ABBAEB78303B}"/>
+                    </a:ext>
+                  </a:extLst>
+                </p14:cNvPr>
+                <p14:cNvContentPartPr/>
+                <p14:nvPr/>
+              </p14:nvContentPartPr>
+              <p14:xfrm>
+                <a:off x="2418952" y="5171926"/>
+                <a:ext cx="97560" cy="159120"/>
+              </p14:xfrm>
+            </p:contentPart>
+          </mc:Choice>
+          <mc:Fallback xmlns="">
+            <p:pic>
+              <p:nvPicPr>
+                <p:cNvPr id="12" name="Ink 11">
+                  <a:extLst>
+                    <a:ext uri="{FF2B5EF4-FFF2-40B4-BE49-F238E27FC236}">
+                      <a16:creationId xmlns:a16="http://schemas.microsoft.com/office/drawing/2014/main" id="{6FB3EA08-4609-935F-519D-ABBAEB78303B}"/>
+                    </a:ext>
+                  </a:extLst>
+                </p:cNvPr>
+                <p:cNvPicPr/>
+                <p:nvPr/>
+              </p:nvPicPr>
+              <p:blipFill>
+                <a:blip r:embed="rId15"/>
+                <a:stretch>
+                  <a:fillRect/>
+                </a:stretch>
+              </p:blipFill>
+              <p:spPr>
+                <a:xfrm>
+                  <a:off x="2401312" y="5153926"/>
+                  <a:ext cx="133200" cy="194760"/>
+                </a:xfrm>
+                <a:prstGeom prst="rect">
+                  <a:avLst/>
+                </a:prstGeom>
+              </p:spPr>
+            </p:pic>
+          </mc:Fallback>
+        </mc:AlternateContent>
+        <mc:AlternateContent xmlns:mc="http://schemas.openxmlformats.org/markup-compatibility/2006" xmlns:p14="http://schemas.microsoft.com/office/powerpoint/2010/main">
+          <mc:Choice Requires="p14">
+            <p:contentPart p14:bwMode="auto" r:id="rId16">
+              <p14:nvContentPartPr>
+                <p14:cNvPr id="13" name="Ink 12">
+                  <a:extLst>
+                    <a:ext uri="{FF2B5EF4-FFF2-40B4-BE49-F238E27FC236}">
+                      <a16:creationId xmlns:a16="http://schemas.microsoft.com/office/drawing/2014/main" id="{E88C87A3-571E-F132-A366-58C28DCF3141}"/>
+                    </a:ext>
+                  </a:extLst>
+                </p14:cNvPr>
+                <p14:cNvContentPartPr/>
+                <p14:nvPr/>
+              </p14:nvContentPartPr>
+              <p14:xfrm>
+                <a:off x="2613352" y="5176606"/>
+                <a:ext cx="111600" cy="383760"/>
+              </p14:xfrm>
+            </p:contentPart>
+          </mc:Choice>
+          <mc:Fallback xmlns="">
+            <p:pic>
+              <p:nvPicPr>
+                <p:cNvPr id="13" name="Ink 12">
+                  <a:extLst>
+                    <a:ext uri="{FF2B5EF4-FFF2-40B4-BE49-F238E27FC236}">
+                      <a16:creationId xmlns:a16="http://schemas.microsoft.com/office/drawing/2014/main" id="{E88C87A3-571E-F132-A366-58C28DCF3141}"/>
+                    </a:ext>
+                  </a:extLst>
+                </p:cNvPr>
+                <p:cNvPicPr/>
+                <p:nvPr/>
+              </p:nvPicPr>
+              <p:blipFill>
+                <a:blip r:embed="rId17"/>
+                <a:stretch>
+                  <a:fillRect/>
+                </a:stretch>
+              </p:blipFill>
+              <p:spPr>
+                <a:xfrm>
+                  <a:off x="2595352" y="5158966"/>
+                  <a:ext cx="147240" cy="419400"/>
+                </a:xfrm>
+                <a:prstGeom prst="rect">
+                  <a:avLst/>
+                </a:prstGeom>
+              </p:spPr>
+            </p:pic>
+          </mc:Fallback>
+        </mc:AlternateContent>
+        <mc:AlternateContent xmlns:mc="http://schemas.openxmlformats.org/markup-compatibility/2006" xmlns:p14="http://schemas.microsoft.com/office/powerpoint/2010/main">
+          <mc:Choice Requires="p14">
+            <p:contentPart p14:bwMode="auto" r:id="rId18">
+              <p14:nvContentPartPr>
+                <p14:cNvPr id="14" name="Ink 13">
+                  <a:extLst>
+                    <a:ext uri="{FF2B5EF4-FFF2-40B4-BE49-F238E27FC236}">
+                      <a16:creationId xmlns:a16="http://schemas.microsoft.com/office/drawing/2014/main" id="{60D4FAC1-8CCE-D11B-BE4C-D37DBB14CBB4}"/>
+                    </a:ext>
+                  </a:extLst>
+                </p14:cNvPr>
+                <p14:cNvContentPartPr/>
+                <p14:nvPr/>
+              </p14:nvContentPartPr>
+              <p14:xfrm>
+                <a:off x="2728192" y="5035486"/>
+                <a:ext cx="125640" cy="238680"/>
+              </p14:xfrm>
+            </p:contentPart>
+          </mc:Choice>
+          <mc:Fallback xmlns="">
+            <p:pic>
+              <p:nvPicPr>
+                <p:cNvPr id="14" name="Ink 13">
+                  <a:extLst>
+                    <a:ext uri="{FF2B5EF4-FFF2-40B4-BE49-F238E27FC236}">
+                      <a16:creationId xmlns:a16="http://schemas.microsoft.com/office/drawing/2014/main" id="{60D4FAC1-8CCE-D11B-BE4C-D37DBB14CBB4}"/>
+                    </a:ext>
+                  </a:extLst>
+                </p:cNvPr>
+                <p:cNvPicPr/>
+                <p:nvPr/>
+              </p:nvPicPr>
+              <p:blipFill>
+                <a:blip r:embed="rId19"/>
+                <a:stretch>
+                  <a:fillRect/>
+                </a:stretch>
+              </p:blipFill>
+              <p:spPr>
+                <a:xfrm>
+                  <a:off x="2710552" y="5017846"/>
+                  <a:ext cx="161280" cy="274320"/>
+                </a:xfrm>
+                <a:prstGeom prst="rect">
+                  <a:avLst/>
+                </a:prstGeom>
+              </p:spPr>
+            </p:pic>
+          </mc:Fallback>
+        </mc:AlternateContent>
+        <mc:AlternateContent xmlns:mc="http://schemas.openxmlformats.org/markup-compatibility/2006" xmlns:p14="http://schemas.microsoft.com/office/powerpoint/2010/main">
+          <mc:Choice Requires="p14">
+            <p:contentPart p14:bwMode="auto" r:id="rId20">
+              <p14:nvContentPartPr>
+                <p14:cNvPr id="15" name="Ink 14">
+                  <a:extLst>
+                    <a:ext uri="{FF2B5EF4-FFF2-40B4-BE49-F238E27FC236}">
+                      <a16:creationId xmlns:a16="http://schemas.microsoft.com/office/drawing/2014/main" id="{6F129451-2C6C-33AA-AEAD-5E69843144C7}"/>
+                    </a:ext>
+                  </a:extLst>
+                </p14:cNvPr>
+                <p14:cNvContentPartPr/>
+                <p14:nvPr/>
+              </p14:nvContentPartPr>
+              <p14:xfrm>
+                <a:off x="2157952" y="5803366"/>
+                <a:ext cx="23400" cy="147600"/>
+              </p14:xfrm>
+            </p:contentPart>
+          </mc:Choice>
+          <mc:Fallback xmlns="">
+            <p:pic>
+              <p:nvPicPr>
+                <p:cNvPr id="15" name="Ink 14">
+                  <a:extLst>
+                    <a:ext uri="{FF2B5EF4-FFF2-40B4-BE49-F238E27FC236}">
+                      <a16:creationId xmlns:a16="http://schemas.microsoft.com/office/drawing/2014/main" id="{6F129451-2C6C-33AA-AEAD-5E69843144C7}"/>
+                    </a:ext>
+                  </a:extLst>
+                </p:cNvPr>
+                <p:cNvPicPr/>
+                <p:nvPr/>
+              </p:nvPicPr>
+              <p:blipFill>
+                <a:blip r:embed="rId21"/>
+                <a:stretch>
+                  <a:fillRect/>
+                </a:stretch>
+              </p:blipFill>
+              <p:spPr>
+                <a:xfrm>
+                  <a:off x="2140312" y="5785366"/>
+                  <a:ext cx="59040" cy="183240"/>
+                </a:xfrm>
+                <a:prstGeom prst="rect">
+                  <a:avLst/>
+                </a:prstGeom>
+              </p:spPr>
+            </p:pic>
+          </mc:Fallback>
+        </mc:AlternateContent>
+        <mc:AlternateContent xmlns:mc="http://schemas.openxmlformats.org/markup-compatibility/2006" xmlns:p14="http://schemas.microsoft.com/office/powerpoint/2010/main">
+          <mc:Choice Requires="p14">
+            <p:contentPart p14:bwMode="auto" r:id="rId22">
+              <p14:nvContentPartPr>
+                <p14:cNvPr id="16" name="Ink 15">
+                  <a:extLst>
+                    <a:ext uri="{FF2B5EF4-FFF2-40B4-BE49-F238E27FC236}">
+                      <a16:creationId xmlns:a16="http://schemas.microsoft.com/office/drawing/2014/main" id="{C6131350-82F7-7A23-E15F-38600024555D}"/>
+                    </a:ext>
+                  </a:extLst>
+                </p14:cNvPr>
+                <p14:cNvContentPartPr/>
+                <p14:nvPr/>
+              </p14:nvContentPartPr>
+              <p14:xfrm>
+                <a:off x="2192152" y="5615446"/>
+                <a:ext cx="14400" cy="57240"/>
+              </p14:xfrm>
+            </p:contentPart>
+          </mc:Choice>
+          <mc:Fallback xmlns="">
+            <p:pic>
+              <p:nvPicPr>
+                <p:cNvPr id="16" name="Ink 15">
+                  <a:extLst>
+                    <a:ext uri="{FF2B5EF4-FFF2-40B4-BE49-F238E27FC236}">
+                      <a16:creationId xmlns:a16="http://schemas.microsoft.com/office/drawing/2014/main" id="{C6131350-82F7-7A23-E15F-38600024555D}"/>
+                    </a:ext>
+                  </a:extLst>
+                </p:cNvPr>
+                <p:cNvPicPr/>
+                <p:nvPr/>
+              </p:nvPicPr>
+              <p:blipFill>
+                <a:blip r:embed="rId23"/>
+                <a:stretch>
+                  <a:fillRect/>
+                </a:stretch>
+              </p:blipFill>
+              <p:spPr>
+                <a:xfrm>
+                  <a:off x="2174512" y="5597806"/>
+                  <a:ext cx="50040" cy="92880"/>
+                </a:xfrm>
+                <a:prstGeom prst="rect">
+                  <a:avLst/>
+                </a:prstGeom>
+              </p:spPr>
+            </p:pic>
+          </mc:Fallback>
+        </mc:AlternateContent>
+        <mc:AlternateContent xmlns:mc="http://schemas.openxmlformats.org/markup-compatibility/2006" xmlns:p14="http://schemas.microsoft.com/office/powerpoint/2010/main">
+          <mc:Choice Requires="p14">
+            <p:contentPart p14:bwMode="auto" r:id="rId24">
+              <p14:nvContentPartPr>
+                <p14:cNvPr id="17" name="Ink 16">
+                  <a:extLst>
+                    <a:ext uri="{FF2B5EF4-FFF2-40B4-BE49-F238E27FC236}">
+                      <a16:creationId xmlns:a16="http://schemas.microsoft.com/office/drawing/2014/main" id="{1BAC6808-41AA-7BE0-EE1F-CE14F778A4BC}"/>
+                    </a:ext>
+                  </a:extLst>
+                </p14:cNvPr>
+                <p14:cNvContentPartPr/>
+                <p14:nvPr/>
+              </p14:nvContentPartPr>
+              <p14:xfrm>
+                <a:off x="2285752" y="5796166"/>
+                <a:ext cx="116280" cy="126720"/>
+              </p14:xfrm>
+            </p:contentPart>
+          </mc:Choice>
+          <mc:Fallback xmlns="">
+            <p:pic>
+              <p:nvPicPr>
+                <p:cNvPr id="17" name="Ink 16">
+                  <a:extLst>
+                    <a:ext uri="{FF2B5EF4-FFF2-40B4-BE49-F238E27FC236}">
+                      <a16:creationId xmlns:a16="http://schemas.microsoft.com/office/drawing/2014/main" id="{1BAC6808-41AA-7BE0-EE1F-CE14F778A4BC}"/>
+                    </a:ext>
+                  </a:extLst>
+                </p:cNvPr>
+                <p:cNvPicPr/>
+                <p:nvPr/>
+              </p:nvPicPr>
+              <p:blipFill>
+                <a:blip r:embed="rId25"/>
+                <a:stretch>
+                  <a:fillRect/>
+                </a:stretch>
+              </p:blipFill>
+              <p:spPr>
+                <a:xfrm>
+                  <a:off x="2267752" y="5778166"/>
+                  <a:ext cx="151920" cy="162360"/>
+                </a:xfrm>
+                <a:prstGeom prst="rect">
+                  <a:avLst/>
+                </a:prstGeom>
+              </p:spPr>
+            </p:pic>
+          </mc:Fallback>
+        </mc:AlternateContent>
+        <mc:AlternateContent xmlns:mc="http://schemas.openxmlformats.org/markup-compatibility/2006" xmlns:p14="http://schemas.microsoft.com/office/powerpoint/2010/main">
+          <mc:Choice Requires="p14">
+            <p:contentPart p14:bwMode="auto" r:id="rId26">
+              <p14:nvContentPartPr>
+                <p14:cNvPr id="18" name="Ink 17">
+                  <a:extLst>
+                    <a:ext uri="{FF2B5EF4-FFF2-40B4-BE49-F238E27FC236}">
+                      <a16:creationId xmlns:a16="http://schemas.microsoft.com/office/drawing/2014/main" id="{E8230C40-445A-A8D2-4C31-C1F72431859A}"/>
+                    </a:ext>
+                  </a:extLst>
+                </p14:cNvPr>
+                <p14:cNvContentPartPr/>
+                <p14:nvPr/>
+              </p14:nvContentPartPr>
+              <p14:xfrm>
+                <a:off x="2462152" y="5759806"/>
+                <a:ext cx="78840" cy="176760"/>
+              </p14:xfrm>
+            </p:contentPart>
+          </mc:Choice>
+          <mc:Fallback xmlns="">
+            <p:pic>
+              <p:nvPicPr>
+                <p:cNvPr id="18" name="Ink 17">
+                  <a:extLst>
+                    <a:ext uri="{FF2B5EF4-FFF2-40B4-BE49-F238E27FC236}">
+                      <a16:creationId xmlns:a16="http://schemas.microsoft.com/office/drawing/2014/main" id="{E8230C40-445A-A8D2-4C31-C1F72431859A}"/>
+                    </a:ext>
+                  </a:extLst>
+                </p:cNvPr>
+                <p:cNvPicPr/>
+                <p:nvPr/>
+              </p:nvPicPr>
+              <p:blipFill>
+                <a:blip r:embed="rId27"/>
+                <a:stretch>
+                  <a:fillRect/>
+                </a:stretch>
+              </p:blipFill>
+              <p:spPr>
+                <a:xfrm>
+                  <a:off x="2444512" y="5741806"/>
+                  <a:ext cx="114480" cy="212400"/>
+                </a:xfrm>
+                <a:prstGeom prst="rect">
+                  <a:avLst/>
+                </a:prstGeom>
+              </p:spPr>
+            </p:pic>
+          </mc:Fallback>
+        </mc:AlternateContent>
+        <mc:AlternateContent xmlns:mc="http://schemas.openxmlformats.org/markup-compatibility/2006" xmlns:p14="http://schemas.microsoft.com/office/powerpoint/2010/main">
+          <mc:Choice Requires="p14">
+            <p:contentPart p14:bwMode="auto" r:id="rId28">
+              <p14:nvContentPartPr>
+                <p14:cNvPr id="19" name="Ink 18">
+                  <a:extLst>
+                    <a:ext uri="{FF2B5EF4-FFF2-40B4-BE49-F238E27FC236}">
+                      <a16:creationId xmlns:a16="http://schemas.microsoft.com/office/drawing/2014/main" id="{67E73A1B-3782-8B0E-1A51-E6D4C7D7855C}"/>
+                    </a:ext>
+                  </a:extLst>
+                </p14:cNvPr>
+                <p14:cNvContentPartPr/>
+                <p14:nvPr/>
+              </p14:nvContentPartPr>
+              <p14:xfrm>
+                <a:off x="2604712" y="5688526"/>
+                <a:ext cx="118080" cy="417600"/>
+              </p14:xfrm>
+            </p:contentPart>
+          </mc:Choice>
+          <mc:Fallback xmlns="">
+            <p:pic>
+              <p:nvPicPr>
+                <p:cNvPr id="19" name="Ink 18">
+                  <a:extLst>
+                    <a:ext uri="{FF2B5EF4-FFF2-40B4-BE49-F238E27FC236}">
+                      <a16:creationId xmlns:a16="http://schemas.microsoft.com/office/drawing/2014/main" id="{67E73A1B-3782-8B0E-1A51-E6D4C7D7855C}"/>
+                    </a:ext>
+                  </a:extLst>
+                </p:cNvPr>
+                <p:cNvPicPr/>
+                <p:nvPr/>
+              </p:nvPicPr>
+              <p:blipFill>
+                <a:blip r:embed="rId29"/>
+                <a:stretch>
+                  <a:fillRect/>
+                </a:stretch>
+              </p:blipFill>
+              <p:spPr>
+                <a:xfrm>
+                  <a:off x="2586712" y="5670526"/>
+                  <a:ext cx="153720" cy="453240"/>
+                </a:xfrm>
+                <a:prstGeom prst="rect">
+                  <a:avLst/>
+                </a:prstGeom>
+              </p:spPr>
+            </p:pic>
+          </mc:Fallback>
+        </mc:AlternateContent>
+        <mc:AlternateContent xmlns:mc="http://schemas.openxmlformats.org/markup-compatibility/2006" xmlns:p14="http://schemas.microsoft.com/office/powerpoint/2010/main">
+          <mc:Choice Requires="p14">
+            <p:contentPart p14:bwMode="auto" r:id="rId30">
+              <p14:nvContentPartPr>
+                <p14:cNvPr id="20" name="Ink 19">
+                  <a:extLst>
+                    <a:ext uri="{FF2B5EF4-FFF2-40B4-BE49-F238E27FC236}">
+                      <a16:creationId xmlns:a16="http://schemas.microsoft.com/office/drawing/2014/main" id="{C0F8AE99-08D5-12C2-94BF-5CEBD6C17A4B}"/>
+                    </a:ext>
+                  </a:extLst>
+                </p14:cNvPr>
+                <p14:cNvContentPartPr/>
+                <p14:nvPr/>
+              </p14:nvContentPartPr>
+              <p14:xfrm>
+                <a:off x="2769952" y="5745046"/>
+                <a:ext cx="12960" cy="129600"/>
+              </p14:xfrm>
+            </p:contentPart>
+          </mc:Choice>
+          <mc:Fallback xmlns="">
+            <p:pic>
+              <p:nvPicPr>
+                <p:cNvPr id="20" name="Ink 19">
+                  <a:extLst>
+                    <a:ext uri="{FF2B5EF4-FFF2-40B4-BE49-F238E27FC236}">
+                      <a16:creationId xmlns:a16="http://schemas.microsoft.com/office/drawing/2014/main" id="{C0F8AE99-08D5-12C2-94BF-5CEBD6C17A4B}"/>
+                    </a:ext>
+                  </a:extLst>
+                </p:cNvPr>
+                <p:cNvPicPr/>
+                <p:nvPr/>
+              </p:nvPicPr>
+              <p:blipFill>
+                <a:blip r:embed="rId31"/>
+                <a:stretch>
+                  <a:fillRect/>
+                </a:stretch>
+              </p:blipFill>
+              <p:spPr>
+                <a:xfrm>
+                  <a:off x="2751952" y="5727046"/>
+                  <a:ext cx="48600" cy="165240"/>
+                </a:xfrm>
+                <a:prstGeom prst="rect">
+                  <a:avLst/>
+                </a:prstGeom>
+              </p:spPr>
+            </p:pic>
+          </mc:Fallback>
+        </mc:AlternateContent>
+        <mc:AlternateContent xmlns:mc="http://schemas.openxmlformats.org/markup-compatibility/2006" xmlns:p14="http://schemas.microsoft.com/office/powerpoint/2010/main">
+          <mc:Choice Requires="p14">
+            <p:contentPart p14:bwMode="auto" r:id="rId32">
+              <p14:nvContentPartPr>
+                <p14:cNvPr id="21" name="Ink 20">
+                  <a:extLst>
+                    <a:ext uri="{FF2B5EF4-FFF2-40B4-BE49-F238E27FC236}">
+                      <a16:creationId xmlns:a16="http://schemas.microsoft.com/office/drawing/2014/main" id="{E278D377-94DE-7B0C-5E26-1C4445134D09}"/>
+                    </a:ext>
+                  </a:extLst>
+                </p14:cNvPr>
+                <p14:cNvContentPartPr/>
+                <p14:nvPr/>
+              </p14:nvContentPartPr>
+              <p14:xfrm>
+                <a:off x="2739712" y="5585926"/>
+                <a:ext cx="32040" cy="72000"/>
+              </p14:xfrm>
+            </p:contentPart>
+          </mc:Choice>
+          <mc:Fallback xmlns="">
+            <p:pic>
+              <p:nvPicPr>
+                <p:cNvPr id="21" name="Ink 20">
+                  <a:extLst>
+                    <a:ext uri="{FF2B5EF4-FFF2-40B4-BE49-F238E27FC236}">
+                      <a16:creationId xmlns:a16="http://schemas.microsoft.com/office/drawing/2014/main" id="{E278D377-94DE-7B0C-5E26-1C4445134D09}"/>
+                    </a:ext>
+                  </a:extLst>
+                </p:cNvPr>
+                <p:cNvPicPr/>
+                <p:nvPr/>
+              </p:nvPicPr>
+              <p:blipFill>
+                <a:blip r:embed="rId33"/>
+                <a:stretch>
+                  <a:fillRect/>
+                </a:stretch>
+              </p:blipFill>
+              <p:spPr>
+                <a:xfrm>
+                  <a:off x="2721712" y="5568286"/>
+                  <a:ext cx="67680" cy="107640"/>
+                </a:xfrm>
+                <a:prstGeom prst="rect">
+                  <a:avLst/>
+                </a:prstGeom>
+              </p:spPr>
+            </p:pic>
+          </mc:Fallback>
+        </mc:AlternateContent>
+        <mc:AlternateContent xmlns:mc="http://schemas.openxmlformats.org/markup-compatibility/2006" xmlns:p14="http://schemas.microsoft.com/office/powerpoint/2010/main">
+          <mc:Choice Requires="p14">
+            <p:contentPart p14:bwMode="auto" r:id="rId34">
+              <p14:nvContentPartPr>
+                <p14:cNvPr id="23" name="Ink 22">
+                  <a:extLst>
+                    <a:ext uri="{FF2B5EF4-FFF2-40B4-BE49-F238E27FC236}">
+                      <a16:creationId xmlns:a16="http://schemas.microsoft.com/office/drawing/2014/main" id="{C64F0476-C809-889D-579A-2E8641AB85D3}"/>
+                    </a:ext>
+                  </a:extLst>
+                </p14:cNvPr>
+                <p14:cNvContentPartPr/>
+                <p14:nvPr/>
+              </p14:nvContentPartPr>
+              <p14:xfrm>
+                <a:off x="2854552" y="5686726"/>
+                <a:ext cx="233640" cy="153360"/>
+              </p14:xfrm>
+            </p:contentPart>
+          </mc:Choice>
+          <mc:Fallback xmlns="">
+            <p:pic>
+              <p:nvPicPr>
+                <p:cNvPr id="23" name="Ink 22">
+                  <a:extLst>
+                    <a:ext uri="{FF2B5EF4-FFF2-40B4-BE49-F238E27FC236}">
+                      <a16:creationId xmlns:a16="http://schemas.microsoft.com/office/drawing/2014/main" id="{C64F0476-C809-889D-579A-2E8641AB85D3}"/>
+                    </a:ext>
+                  </a:extLst>
+                </p:cNvPr>
+                <p:cNvPicPr/>
+                <p:nvPr/>
+              </p:nvPicPr>
+              <p:blipFill>
+                <a:blip r:embed="rId35"/>
+                <a:stretch>
+                  <a:fillRect/>
+                </a:stretch>
+              </p:blipFill>
+              <p:spPr>
+                <a:xfrm>
+                  <a:off x="2836552" y="5669086"/>
+                  <a:ext cx="269280" cy="189000"/>
+                </a:xfrm>
+                <a:prstGeom prst="rect">
+                  <a:avLst/>
+                </a:prstGeom>
+              </p:spPr>
+            </p:pic>
+          </mc:Fallback>
+        </mc:AlternateContent>
+        <mc:AlternateContent xmlns:mc="http://schemas.openxmlformats.org/markup-compatibility/2006" xmlns:p14="http://schemas.microsoft.com/office/powerpoint/2010/main">
+          <mc:Choice Requires="p14">
+            <p:contentPart p14:bwMode="auto" r:id="rId36">
+              <p14:nvContentPartPr>
+                <p14:cNvPr id="24" name="Ink 23">
+                  <a:extLst>
+                    <a:ext uri="{FF2B5EF4-FFF2-40B4-BE49-F238E27FC236}">
+                      <a16:creationId xmlns:a16="http://schemas.microsoft.com/office/drawing/2014/main" id="{62FF17DB-3261-D2F3-A9AD-B686985C0DFF}"/>
+                    </a:ext>
+                  </a:extLst>
+                </p14:cNvPr>
+                <p14:cNvContentPartPr/>
+                <p14:nvPr/>
+              </p14:nvContentPartPr>
+              <p14:xfrm>
+                <a:off x="3149752" y="5542366"/>
+                <a:ext cx="49320" cy="286920"/>
+              </p14:xfrm>
+            </p:contentPart>
+          </mc:Choice>
+          <mc:Fallback xmlns="">
+            <p:pic>
+              <p:nvPicPr>
+                <p:cNvPr id="24" name="Ink 23">
+                  <a:extLst>
+                    <a:ext uri="{FF2B5EF4-FFF2-40B4-BE49-F238E27FC236}">
+                      <a16:creationId xmlns:a16="http://schemas.microsoft.com/office/drawing/2014/main" id="{62FF17DB-3261-D2F3-A9AD-B686985C0DFF}"/>
+                    </a:ext>
+                  </a:extLst>
+                </p:cNvPr>
+                <p:cNvPicPr/>
+                <p:nvPr/>
+              </p:nvPicPr>
+              <p:blipFill>
+                <a:blip r:embed="rId37"/>
+                <a:stretch>
+                  <a:fillRect/>
+                </a:stretch>
+              </p:blipFill>
+              <p:spPr>
+                <a:xfrm>
+                  <a:off x="3132112" y="5524726"/>
+                  <a:ext cx="84960" cy="322560"/>
+                </a:xfrm>
+                <a:prstGeom prst="rect">
+                  <a:avLst/>
+                </a:prstGeom>
+              </p:spPr>
+            </p:pic>
+          </mc:Fallback>
+        </mc:AlternateContent>
+        <mc:AlternateContent xmlns:mc="http://schemas.openxmlformats.org/markup-compatibility/2006" xmlns:p14="http://schemas.microsoft.com/office/powerpoint/2010/main">
+          <mc:Choice Requires="p14">
+            <p:contentPart p14:bwMode="auto" r:id="rId38">
+              <p14:nvContentPartPr>
+                <p14:cNvPr id="25" name="Ink 24">
+                  <a:extLst>
+                    <a:ext uri="{FF2B5EF4-FFF2-40B4-BE49-F238E27FC236}">
+                      <a16:creationId xmlns:a16="http://schemas.microsoft.com/office/drawing/2014/main" id="{A9C8774E-EDDD-2DE1-A2A8-1F44BB26E86C}"/>
+                    </a:ext>
+                  </a:extLst>
+                </p14:cNvPr>
+                <p14:cNvContentPartPr/>
+                <p14:nvPr/>
+              </p14:nvContentPartPr>
+              <p14:xfrm>
+                <a:off x="3107272" y="5678086"/>
+                <a:ext cx="98280" cy="57240"/>
+              </p14:xfrm>
+            </p:contentPart>
+          </mc:Choice>
+          <mc:Fallback xmlns="">
+            <p:pic>
+              <p:nvPicPr>
+                <p:cNvPr id="25" name="Ink 24">
+                  <a:extLst>
+                    <a:ext uri="{FF2B5EF4-FFF2-40B4-BE49-F238E27FC236}">
+                      <a16:creationId xmlns:a16="http://schemas.microsoft.com/office/drawing/2014/main" id="{A9C8774E-EDDD-2DE1-A2A8-1F44BB26E86C}"/>
+                    </a:ext>
+                  </a:extLst>
+                </p:cNvPr>
+                <p:cNvPicPr/>
+                <p:nvPr/>
+              </p:nvPicPr>
+              <p:blipFill>
+                <a:blip r:embed="rId39"/>
+                <a:stretch>
+                  <a:fillRect/>
+                </a:stretch>
+              </p:blipFill>
+              <p:spPr>
+                <a:xfrm>
+                  <a:off x="3089272" y="5660086"/>
+                  <a:ext cx="133920" cy="92880"/>
+                </a:xfrm>
+                <a:prstGeom prst="rect">
+                  <a:avLst/>
+                </a:prstGeom>
+              </p:spPr>
+            </p:pic>
+          </mc:Fallback>
+        </mc:AlternateContent>
+        <mc:AlternateContent xmlns:mc="http://schemas.openxmlformats.org/markup-compatibility/2006" xmlns:p14="http://schemas.microsoft.com/office/powerpoint/2010/main">
+          <mc:Choice Requires="p14">
+            <p:contentPart p14:bwMode="auto" r:id="rId40">
+              <p14:nvContentPartPr>
+                <p14:cNvPr id="26" name="Ink 25">
+                  <a:extLst>
+                    <a:ext uri="{FF2B5EF4-FFF2-40B4-BE49-F238E27FC236}">
+                      <a16:creationId xmlns:a16="http://schemas.microsoft.com/office/drawing/2014/main" id="{607E374B-647C-54BF-B204-9E15045C953A}"/>
+                    </a:ext>
+                  </a:extLst>
+                </p14:cNvPr>
+                <p14:cNvContentPartPr/>
+                <p14:nvPr/>
+              </p14:nvContentPartPr>
+              <p14:xfrm>
+                <a:off x="3254152" y="5672326"/>
+                <a:ext cx="75960" cy="154800"/>
+              </p14:xfrm>
+            </p:contentPart>
+          </mc:Choice>
+          <mc:Fallback xmlns="">
+            <p:pic>
+              <p:nvPicPr>
+                <p:cNvPr id="26" name="Ink 25">
+                  <a:extLst>
+                    <a:ext uri="{FF2B5EF4-FFF2-40B4-BE49-F238E27FC236}">
+                      <a16:creationId xmlns:a16="http://schemas.microsoft.com/office/drawing/2014/main" id="{607E374B-647C-54BF-B204-9E15045C953A}"/>
+                    </a:ext>
+                  </a:extLst>
+                </p:cNvPr>
+                <p:cNvPicPr/>
+                <p:nvPr/>
+              </p:nvPicPr>
+              <p:blipFill>
+                <a:blip r:embed="rId41"/>
+                <a:stretch>
+                  <a:fillRect/>
+                </a:stretch>
+              </p:blipFill>
+              <p:spPr>
+                <a:xfrm>
+                  <a:off x="3236512" y="5654686"/>
+                  <a:ext cx="111600" cy="190440"/>
+                </a:xfrm>
+                <a:prstGeom prst="rect">
+                  <a:avLst/>
+                </a:prstGeom>
+              </p:spPr>
+            </p:pic>
+          </mc:Fallback>
+        </mc:AlternateContent>
+        <mc:AlternateContent xmlns:mc="http://schemas.openxmlformats.org/markup-compatibility/2006" xmlns:p14="http://schemas.microsoft.com/office/powerpoint/2010/main">
+          <mc:Choice Requires="p14">
+            <p:contentPart p14:bwMode="auto" r:id="rId42">
+              <p14:nvContentPartPr>
+                <p14:cNvPr id="27" name="Ink 26">
+                  <a:extLst>
+                    <a:ext uri="{FF2B5EF4-FFF2-40B4-BE49-F238E27FC236}">
+                      <a16:creationId xmlns:a16="http://schemas.microsoft.com/office/drawing/2014/main" id="{4DF302AB-3DE7-7326-EB65-F285ECECEF7A}"/>
+                    </a:ext>
+                  </a:extLst>
+                </p14:cNvPr>
+                <p14:cNvContentPartPr/>
+                <p14:nvPr/>
+              </p14:nvContentPartPr>
+              <p14:xfrm>
+                <a:off x="3294472" y="5557846"/>
+                <a:ext cx="6840" cy="10440"/>
+              </p14:xfrm>
+            </p:contentPart>
+          </mc:Choice>
+          <mc:Fallback xmlns="">
+            <p:pic>
+              <p:nvPicPr>
+                <p:cNvPr id="27" name="Ink 26">
+                  <a:extLst>
+                    <a:ext uri="{FF2B5EF4-FFF2-40B4-BE49-F238E27FC236}">
+                      <a16:creationId xmlns:a16="http://schemas.microsoft.com/office/drawing/2014/main" id="{4DF302AB-3DE7-7326-EB65-F285ECECEF7A}"/>
+                    </a:ext>
+                  </a:extLst>
+                </p:cNvPr>
+                <p:cNvPicPr/>
+                <p:nvPr/>
+              </p:nvPicPr>
+              <p:blipFill>
+                <a:blip r:embed="rId43"/>
+                <a:stretch>
+                  <a:fillRect/>
+                </a:stretch>
+              </p:blipFill>
+              <p:spPr>
+                <a:xfrm>
+                  <a:off x="3276832" y="5539846"/>
+                  <a:ext cx="42480" cy="46080"/>
+                </a:xfrm>
+                <a:prstGeom prst="rect">
+                  <a:avLst/>
+                </a:prstGeom>
+              </p:spPr>
+            </p:pic>
+          </mc:Fallback>
+        </mc:AlternateContent>
+        <mc:AlternateContent xmlns:mc="http://schemas.openxmlformats.org/markup-compatibility/2006" xmlns:p14="http://schemas.microsoft.com/office/powerpoint/2010/main">
+          <mc:Choice Requires="p14">
+            <p:contentPart p14:bwMode="auto" r:id="rId44">
+              <p14:nvContentPartPr>
+                <p14:cNvPr id="28" name="Ink 27">
+                  <a:extLst>
+                    <a:ext uri="{FF2B5EF4-FFF2-40B4-BE49-F238E27FC236}">
+                      <a16:creationId xmlns:a16="http://schemas.microsoft.com/office/drawing/2014/main" id="{909C2177-5C24-55B9-A3EF-E34843470844}"/>
+                    </a:ext>
+                  </a:extLst>
+                </p14:cNvPr>
+                <p14:cNvContentPartPr/>
+                <p14:nvPr/>
+              </p14:nvContentPartPr>
+              <p14:xfrm>
+                <a:off x="3374392" y="5655406"/>
+                <a:ext cx="59040" cy="143640"/>
+              </p14:xfrm>
+            </p:contentPart>
+          </mc:Choice>
+          <mc:Fallback xmlns="">
+            <p:pic>
+              <p:nvPicPr>
+                <p:cNvPr id="28" name="Ink 27">
+                  <a:extLst>
+                    <a:ext uri="{FF2B5EF4-FFF2-40B4-BE49-F238E27FC236}">
+                      <a16:creationId xmlns:a16="http://schemas.microsoft.com/office/drawing/2014/main" id="{909C2177-5C24-55B9-A3EF-E34843470844}"/>
+                    </a:ext>
+                  </a:extLst>
+                </p:cNvPr>
+                <p:cNvPicPr/>
+                <p:nvPr/>
+              </p:nvPicPr>
+              <p:blipFill>
+                <a:blip r:embed="rId45"/>
+                <a:stretch>
+                  <a:fillRect/>
+                </a:stretch>
+              </p:blipFill>
+              <p:spPr>
+                <a:xfrm>
+                  <a:off x="3356752" y="5637406"/>
+                  <a:ext cx="94680" cy="179280"/>
+                </a:xfrm>
+                <a:prstGeom prst="rect">
+                  <a:avLst/>
+                </a:prstGeom>
+              </p:spPr>
+            </p:pic>
+          </mc:Fallback>
+        </mc:AlternateContent>
+        <mc:AlternateContent xmlns:mc="http://schemas.openxmlformats.org/markup-compatibility/2006" xmlns:p14="http://schemas.microsoft.com/office/powerpoint/2010/main">
+          <mc:Choice Requires="p14">
+            <p:contentPart p14:bwMode="auto" r:id="rId46">
+              <p14:nvContentPartPr>
+                <p14:cNvPr id="29" name="Ink 28">
+                  <a:extLst>
+                    <a:ext uri="{FF2B5EF4-FFF2-40B4-BE49-F238E27FC236}">
+                      <a16:creationId xmlns:a16="http://schemas.microsoft.com/office/drawing/2014/main" id="{9E1ABE50-D317-70A7-C042-116C72AC6CF8}"/>
+                    </a:ext>
+                  </a:extLst>
+                </p14:cNvPr>
+                <p14:cNvContentPartPr/>
+                <p14:nvPr/>
+              </p14:nvContentPartPr>
+              <p14:xfrm>
+                <a:off x="3472312" y="5628046"/>
+                <a:ext cx="251280" cy="137880"/>
+              </p14:xfrm>
+            </p:contentPart>
+          </mc:Choice>
+          <mc:Fallback xmlns="">
+            <p:pic>
+              <p:nvPicPr>
+                <p:cNvPr id="29" name="Ink 28">
+                  <a:extLst>
+                    <a:ext uri="{FF2B5EF4-FFF2-40B4-BE49-F238E27FC236}">
+                      <a16:creationId xmlns:a16="http://schemas.microsoft.com/office/drawing/2014/main" id="{9E1ABE50-D317-70A7-C042-116C72AC6CF8}"/>
+                    </a:ext>
+                  </a:extLst>
+                </p:cNvPr>
+                <p:cNvPicPr/>
+                <p:nvPr/>
+              </p:nvPicPr>
+              <p:blipFill>
+                <a:blip r:embed="rId47"/>
+                <a:stretch>
+                  <a:fillRect/>
+                </a:stretch>
+              </p:blipFill>
+              <p:spPr>
+                <a:xfrm>
+                  <a:off x="3454672" y="5610406"/>
+                  <a:ext cx="286920" cy="173520"/>
+                </a:xfrm>
+                <a:prstGeom prst="rect">
+                  <a:avLst/>
+                </a:prstGeom>
+              </p:spPr>
+            </p:pic>
+          </mc:Fallback>
+        </mc:AlternateContent>
+      </p:grpSp>
+      <p:grpSp>
+        <p:nvGrpSpPr>
+          <p:cNvPr id="58" name="Group 57">
+            <a:extLst>
+              <a:ext uri="{FF2B5EF4-FFF2-40B4-BE49-F238E27FC236}">
+                <a16:creationId xmlns:a16="http://schemas.microsoft.com/office/drawing/2014/main" id="{8183B236-DFF9-1827-F65A-115B3736B4D4}"/>
+              </a:ext>
+            </a:extLst>
+          </p:cNvPr>
+          <p:cNvGrpSpPr/>
+          <p:nvPr/>
+        </p:nvGrpSpPr>
+        <p:grpSpPr>
+          <a:xfrm>
+            <a:off x="5649232" y="4356886"/>
+            <a:ext cx="2236680" cy="1208520"/>
+            <a:chOff x="5649232" y="4356886"/>
+            <a:chExt cx="2236680" cy="1208520"/>
+          </a:xfrm>
+        </p:grpSpPr>
+        <mc:AlternateContent xmlns:mc="http://schemas.openxmlformats.org/markup-compatibility/2006" xmlns:p14="http://schemas.microsoft.com/office/powerpoint/2010/main">
+          <mc:Choice Requires="p14">
+            <p:contentPart p14:bwMode="auto" r:id="rId48">
+              <p14:nvContentPartPr>
+                <p14:cNvPr id="31" name="Ink 30">
+                  <a:extLst>
+                    <a:ext uri="{FF2B5EF4-FFF2-40B4-BE49-F238E27FC236}">
+                      <a16:creationId xmlns:a16="http://schemas.microsoft.com/office/drawing/2014/main" id="{6619CB77-CEC2-D33A-D1DF-DC1BB56541AC}"/>
+                    </a:ext>
+                  </a:extLst>
+                </p14:cNvPr>
+                <p14:cNvContentPartPr/>
+                <p14:nvPr/>
+              </p14:nvContentPartPr>
+              <p14:xfrm>
+                <a:off x="5689912" y="4356886"/>
+                <a:ext cx="171720" cy="342720"/>
+              </p14:xfrm>
+            </p:contentPart>
+          </mc:Choice>
+          <mc:Fallback xmlns="">
+            <p:pic>
+              <p:nvPicPr>
+                <p:cNvPr id="31" name="Ink 30">
+                  <a:extLst>
+                    <a:ext uri="{FF2B5EF4-FFF2-40B4-BE49-F238E27FC236}">
+                      <a16:creationId xmlns:a16="http://schemas.microsoft.com/office/drawing/2014/main" id="{6619CB77-CEC2-D33A-D1DF-DC1BB56541AC}"/>
+                    </a:ext>
+                  </a:extLst>
+                </p:cNvPr>
+                <p:cNvPicPr/>
+                <p:nvPr/>
+              </p:nvPicPr>
+              <p:blipFill>
+                <a:blip r:embed="rId49"/>
+                <a:stretch>
+                  <a:fillRect/>
+                </a:stretch>
+              </p:blipFill>
+              <p:spPr>
+                <a:xfrm>
+                  <a:off x="5671912" y="4338886"/>
+                  <a:ext cx="207360" cy="378360"/>
+                </a:xfrm>
+                <a:prstGeom prst="rect">
+                  <a:avLst/>
+                </a:prstGeom>
+              </p:spPr>
+            </p:pic>
+          </mc:Fallback>
+        </mc:AlternateContent>
+        <mc:AlternateContent xmlns:mc="http://schemas.openxmlformats.org/markup-compatibility/2006" xmlns:p14="http://schemas.microsoft.com/office/powerpoint/2010/main">
+          <mc:Choice Requires="p14">
+            <p:contentPart p14:bwMode="auto" r:id="rId50">
+              <p14:nvContentPartPr>
+                <p14:cNvPr id="32" name="Ink 31">
+                  <a:extLst>
+                    <a:ext uri="{FF2B5EF4-FFF2-40B4-BE49-F238E27FC236}">
+                      <a16:creationId xmlns:a16="http://schemas.microsoft.com/office/drawing/2014/main" id="{C0C018AB-2368-9E50-56B1-94CF0CD10ACA}"/>
+                    </a:ext>
+                  </a:extLst>
+                </p14:cNvPr>
+                <p14:cNvContentPartPr/>
+                <p14:nvPr/>
+              </p14:nvContentPartPr>
+              <p14:xfrm>
+                <a:off x="5711152" y="4788166"/>
+                <a:ext cx="28080" cy="299880"/>
+              </p14:xfrm>
+            </p:contentPart>
+          </mc:Choice>
+          <mc:Fallback xmlns="">
+            <p:pic>
+              <p:nvPicPr>
+                <p:cNvPr id="32" name="Ink 31">
+                  <a:extLst>
+                    <a:ext uri="{FF2B5EF4-FFF2-40B4-BE49-F238E27FC236}">
+                      <a16:creationId xmlns:a16="http://schemas.microsoft.com/office/drawing/2014/main" id="{C0C018AB-2368-9E50-56B1-94CF0CD10ACA}"/>
+                    </a:ext>
+                  </a:extLst>
+                </p:cNvPr>
+                <p:cNvPicPr/>
+                <p:nvPr/>
+              </p:nvPicPr>
+              <p:blipFill>
+                <a:blip r:embed="rId51"/>
+                <a:stretch>
+                  <a:fillRect/>
+                </a:stretch>
+              </p:blipFill>
+              <p:spPr>
+                <a:xfrm>
+                  <a:off x="5693152" y="4770526"/>
+                  <a:ext cx="63720" cy="335520"/>
+                </a:xfrm>
+                <a:prstGeom prst="rect">
+                  <a:avLst/>
+                </a:prstGeom>
+              </p:spPr>
+            </p:pic>
+          </mc:Fallback>
+        </mc:AlternateContent>
+        <mc:AlternateContent xmlns:mc="http://schemas.openxmlformats.org/markup-compatibility/2006" xmlns:p14="http://schemas.microsoft.com/office/powerpoint/2010/main">
+          <mc:Choice Requires="p14">
+            <p:contentPart p14:bwMode="auto" r:id="rId52">
+              <p14:nvContentPartPr>
+                <p14:cNvPr id="33" name="Ink 32">
+                  <a:extLst>
+                    <a:ext uri="{FF2B5EF4-FFF2-40B4-BE49-F238E27FC236}">
+                      <a16:creationId xmlns:a16="http://schemas.microsoft.com/office/drawing/2014/main" id="{97095B4F-6B5B-9BE3-368E-97D8A56AD5C9}"/>
+                    </a:ext>
+                  </a:extLst>
+                </p14:cNvPr>
+                <p14:cNvContentPartPr/>
+                <p14:nvPr/>
+              </p14:nvContentPartPr>
+              <p14:xfrm>
+                <a:off x="5649232" y="4976446"/>
+                <a:ext cx="93960" cy="52560"/>
+              </p14:xfrm>
+            </p:contentPart>
+          </mc:Choice>
+          <mc:Fallback xmlns="">
+            <p:pic>
+              <p:nvPicPr>
+                <p:cNvPr id="33" name="Ink 32">
+                  <a:extLst>
+                    <a:ext uri="{FF2B5EF4-FFF2-40B4-BE49-F238E27FC236}">
+                      <a16:creationId xmlns:a16="http://schemas.microsoft.com/office/drawing/2014/main" id="{97095B4F-6B5B-9BE3-368E-97D8A56AD5C9}"/>
+                    </a:ext>
+                  </a:extLst>
+                </p:cNvPr>
+                <p:cNvPicPr/>
+                <p:nvPr/>
+              </p:nvPicPr>
+              <p:blipFill>
+                <a:blip r:embed="rId53"/>
+                <a:stretch>
+                  <a:fillRect/>
+                </a:stretch>
+              </p:blipFill>
+              <p:spPr>
+                <a:xfrm>
+                  <a:off x="5631232" y="4958806"/>
+                  <a:ext cx="129600" cy="88200"/>
+                </a:xfrm>
+                <a:prstGeom prst="rect">
+                  <a:avLst/>
+                </a:prstGeom>
+              </p:spPr>
+            </p:pic>
+          </mc:Fallback>
+        </mc:AlternateContent>
+        <mc:AlternateContent xmlns:mc="http://schemas.openxmlformats.org/markup-compatibility/2006" xmlns:p14="http://schemas.microsoft.com/office/powerpoint/2010/main">
+          <mc:Choice Requires="p14">
+            <p:contentPart p14:bwMode="auto" r:id="rId54">
+              <p14:nvContentPartPr>
+                <p14:cNvPr id="34" name="Ink 33">
+                  <a:extLst>
+                    <a:ext uri="{FF2B5EF4-FFF2-40B4-BE49-F238E27FC236}">
+                      <a16:creationId xmlns:a16="http://schemas.microsoft.com/office/drawing/2014/main" id="{0E81C51F-B89F-6F2B-405A-279060381306}"/>
+                    </a:ext>
+                  </a:extLst>
+                </p14:cNvPr>
+                <p14:cNvContentPartPr/>
+                <p14:nvPr/>
+              </p14:nvContentPartPr>
+              <p14:xfrm>
+                <a:off x="5844712" y="4942246"/>
+                <a:ext cx="87480" cy="105120"/>
+              </p14:xfrm>
+            </p:contentPart>
+          </mc:Choice>
+          <mc:Fallback xmlns="">
+            <p:pic>
+              <p:nvPicPr>
+                <p:cNvPr id="34" name="Ink 33">
+                  <a:extLst>
+                    <a:ext uri="{FF2B5EF4-FFF2-40B4-BE49-F238E27FC236}">
+                      <a16:creationId xmlns:a16="http://schemas.microsoft.com/office/drawing/2014/main" id="{0E81C51F-B89F-6F2B-405A-279060381306}"/>
+                    </a:ext>
+                  </a:extLst>
+                </p:cNvPr>
+                <p:cNvPicPr/>
+                <p:nvPr/>
+              </p:nvPicPr>
+              <p:blipFill>
+                <a:blip r:embed="rId55"/>
+                <a:stretch>
+                  <a:fillRect/>
+                </a:stretch>
+              </p:blipFill>
+              <p:spPr>
+                <a:xfrm>
+                  <a:off x="5827072" y="4924606"/>
+                  <a:ext cx="123120" cy="140760"/>
+                </a:xfrm>
+                <a:prstGeom prst="rect">
+                  <a:avLst/>
+                </a:prstGeom>
+              </p:spPr>
+            </p:pic>
+          </mc:Fallback>
+        </mc:AlternateContent>
+        <mc:AlternateContent xmlns:mc="http://schemas.openxmlformats.org/markup-compatibility/2006" xmlns:p14="http://schemas.microsoft.com/office/powerpoint/2010/main">
+          <mc:Choice Requires="p14">
+            <p:contentPart p14:bwMode="auto" r:id="rId56">
+              <p14:nvContentPartPr>
+                <p14:cNvPr id="35" name="Ink 34">
+                  <a:extLst>
+                    <a:ext uri="{FF2B5EF4-FFF2-40B4-BE49-F238E27FC236}">
+                      <a16:creationId xmlns:a16="http://schemas.microsoft.com/office/drawing/2014/main" id="{5412F1F8-EC7E-9DC5-62FB-DE5F3A0F38C2}"/>
+                    </a:ext>
+                  </a:extLst>
+                </p14:cNvPr>
+                <p14:cNvContentPartPr/>
+                <p14:nvPr/>
+              </p14:nvContentPartPr>
+              <p14:xfrm>
+                <a:off x="5981152" y="4942606"/>
+                <a:ext cx="128880" cy="111240"/>
+              </p14:xfrm>
+            </p:contentPart>
+          </mc:Choice>
+          <mc:Fallback xmlns="">
+            <p:pic>
+              <p:nvPicPr>
+                <p:cNvPr id="35" name="Ink 34">
+                  <a:extLst>
+                    <a:ext uri="{FF2B5EF4-FFF2-40B4-BE49-F238E27FC236}">
+                      <a16:creationId xmlns:a16="http://schemas.microsoft.com/office/drawing/2014/main" id="{5412F1F8-EC7E-9DC5-62FB-DE5F3A0F38C2}"/>
+                    </a:ext>
+                  </a:extLst>
+                </p:cNvPr>
+                <p:cNvPicPr/>
+                <p:nvPr/>
+              </p:nvPicPr>
+              <p:blipFill>
+                <a:blip r:embed="rId57"/>
+                <a:stretch>
+                  <a:fillRect/>
+                </a:stretch>
+              </p:blipFill>
+              <p:spPr>
+                <a:xfrm>
+                  <a:off x="5963152" y="4924606"/>
+                  <a:ext cx="164520" cy="146880"/>
+                </a:xfrm>
+                <a:prstGeom prst="rect">
+                  <a:avLst/>
+                </a:prstGeom>
+              </p:spPr>
+            </p:pic>
+          </mc:Fallback>
+        </mc:AlternateContent>
+        <mc:AlternateContent xmlns:mc="http://schemas.openxmlformats.org/markup-compatibility/2006" xmlns:p14="http://schemas.microsoft.com/office/powerpoint/2010/main">
+          <mc:Choice Requires="p14">
+            <p:contentPart p14:bwMode="auto" r:id="rId58">
+              <p14:nvContentPartPr>
+                <p14:cNvPr id="36" name="Ink 35">
+                  <a:extLst>
+                    <a:ext uri="{FF2B5EF4-FFF2-40B4-BE49-F238E27FC236}">
+                      <a16:creationId xmlns:a16="http://schemas.microsoft.com/office/drawing/2014/main" id="{32AECD0A-C6EF-8896-3EDD-5D47D23A8159}"/>
+                    </a:ext>
+                  </a:extLst>
+                </p14:cNvPr>
+                <p14:cNvContentPartPr/>
+                <p14:nvPr/>
+              </p14:nvContentPartPr>
+              <p14:xfrm>
+                <a:off x="6164032" y="4989766"/>
+                <a:ext cx="175680" cy="71280"/>
+              </p14:xfrm>
+            </p:contentPart>
+          </mc:Choice>
+          <mc:Fallback xmlns="">
+            <p:pic>
+              <p:nvPicPr>
+                <p:cNvPr id="36" name="Ink 35">
+                  <a:extLst>
+                    <a:ext uri="{FF2B5EF4-FFF2-40B4-BE49-F238E27FC236}">
+                      <a16:creationId xmlns:a16="http://schemas.microsoft.com/office/drawing/2014/main" id="{32AECD0A-C6EF-8896-3EDD-5D47D23A8159}"/>
+                    </a:ext>
+                  </a:extLst>
+                </p:cNvPr>
+                <p:cNvPicPr/>
+                <p:nvPr/>
+              </p:nvPicPr>
+              <p:blipFill>
+                <a:blip r:embed="rId59"/>
+                <a:stretch>
+                  <a:fillRect/>
+                </a:stretch>
+              </p:blipFill>
+              <p:spPr>
+                <a:xfrm>
+                  <a:off x="6146032" y="4971766"/>
+                  <a:ext cx="211320" cy="106920"/>
+                </a:xfrm>
+                <a:prstGeom prst="rect">
+                  <a:avLst/>
+                </a:prstGeom>
+              </p:spPr>
+            </p:pic>
+          </mc:Fallback>
+        </mc:AlternateContent>
+        <mc:AlternateContent xmlns:mc="http://schemas.openxmlformats.org/markup-compatibility/2006" xmlns:p14="http://schemas.microsoft.com/office/powerpoint/2010/main">
+          <mc:Choice Requires="p14">
+            <p:contentPart p14:bwMode="auto" r:id="rId60">
+              <p14:nvContentPartPr>
+                <p14:cNvPr id="37" name="Ink 36">
+                  <a:extLst>
+                    <a:ext uri="{FF2B5EF4-FFF2-40B4-BE49-F238E27FC236}">
+                      <a16:creationId xmlns:a16="http://schemas.microsoft.com/office/drawing/2014/main" id="{C4609574-BB38-8A7E-4EEB-FD786EA45D1B}"/>
+                    </a:ext>
+                  </a:extLst>
+                </p14:cNvPr>
+                <p14:cNvContentPartPr/>
+                <p14:nvPr/>
+              </p14:nvContentPartPr>
+              <p14:xfrm>
+                <a:off x="6393352" y="4949446"/>
+                <a:ext cx="20520" cy="87840"/>
+              </p14:xfrm>
+            </p:contentPart>
+          </mc:Choice>
+          <mc:Fallback xmlns="">
+            <p:pic>
+              <p:nvPicPr>
+                <p:cNvPr id="37" name="Ink 36">
+                  <a:extLst>
+                    <a:ext uri="{FF2B5EF4-FFF2-40B4-BE49-F238E27FC236}">
+                      <a16:creationId xmlns:a16="http://schemas.microsoft.com/office/drawing/2014/main" id="{C4609574-BB38-8A7E-4EEB-FD786EA45D1B}"/>
+                    </a:ext>
+                  </a:extLst>
+                </p:cNvPr>
+                <p:cNvPicPr/>
+                <p:nvPr/>
+              </p:nvPicPr>
+              <p:blipFill>
+                <a:blip r:embed="rId61"/>
+                <a:stretch>
+                  <a:fillRect/>
+                </a:stretch>
+              </p:blipFill>
+              <p:spPr>
+                <a:xfrm>
+                  <a:off x="6375712" y="4931446"/>
+                  <a:ext cx="56160" cy="123480"/>
+                </a:xfrm>
+                <a:prstGeom prst="rect">
+                  <a:avLst/>
+                </a:prstGeom>
+              </p:spPr>
+            </p:pic>
+          </mc:Fallback>
+        </mc:AlternateContent>
+        <mc:AlternateContent xmlns:mc="http://schemas.openxmlformats.org/markup-compatibility/2006" xmlns:p14="http://schemas.microsoft.com/office/powerpoint/2010/main">
+          <mc:Choice Requires="p14">
+            <p:contentPart p14:bwMode="auto" r:id="rId62">
+              <p14:nvContentPartPr>
+                <p14:cNvPr id="38" name="Ink 37">
+                  <a:extLst>
+                    <a:ext uri="{FF2B5EF4-FFF2-40B4-BE49-F238E27FC236}">
+                      <a16:creationId xmlns:a16="http://schemas.microsoft.com/office/drawing/2014/main" id="{F4EFD2FB-3C88-E15F-A89F-19D55FDD0487}"/>
+                    </a:ext>
+                  </a:extLst>
+                </p14:cNvPr>
+                <p14:cNvContentPartPr/>
+                <p14:nvPr/>
+              </p14:nvContentPartPr>
+              <p14:xfrm>
+                <a:off x="6461752" y="4867366"/>
+                <a:ext cx="7920" cy="43560"/>
+              </p14:xfrm>
+            </p:contentPart>
+          </mc:Choice>
+          <mc:Fallback xmlns="">
+            <p:pic>
+              <p:nvPicPr>
+                <p:cNvPr id="38" name="Ink 37">
+                  <a:extLst>
+                    <a:ext uri="{FF2B5EF4-FFF2-40B4-BE49-F238E27FC236}">
+                      <a16:creationId xmlns:a16="http://schemas.microsoft.com/office/drawing/2014/main" id="{F4EFD2FB-3C88-E15F-A89F-19D55FDD0487}"/>
+                    </a:ext>
+                  </a:extLst>
+                </p:cNvPr>
+                <p:cNvPicPr/>
+                <p:nvPr/>
+              </p:nvPicPr>
+              <p:blipFill>
+                <a:blip r:embed="rId63"/>
+                <a:stretch>
+                  <a:fillRect/>
+                </a:stretch>
+              </p:blipFill>
+              <p:spPr>
+                <a:xfrm>
+                  <a:off x="6443752" y="4849726"/>
+                  <a:ext cx="43560" cy="79200"/>
+                </a:xfrm>
+                <a:prstGeom prst="rect">
+                  <a:avLst/>
+                </a:prstGeom>
+              </p:spPr>
+            </p:pic>
+          </mc:Fallback>
+        </mc:AlternateContent>
+        <mc:AlternateContent xmlns:mc="http://schemas.openxmlformats.org/markup-compatibility/2006" xmlns:p14="http://schemas.microsoft.com/office/powerpoint/2010/main">
+          <mc:Choice Requires="p14">
+            <p:contentPart p14:bwMode="auto" r:id="rId64">
+              <p14:nvContentPartPr>
+                <p14:cNvPr id="39" name="Ink 38">
+                  <a:extLst>
+                    <a:ext uri="{FF2B5EF4-FFF2-40B4-BE49-F238E27FC236}">
+                      <a16:creationId xmlns:a16="http://schemas.microsoft.com/office/drawing/2014/main" id="{F7E9D031-4C0D-286D-6E01-DB0428D94AE6}"/>
+                    </a:ext>
+                  </a:extLst>
+                </p14:cNvPr>
+                <p14:cNvContentPartPr/>
+                <p14:nvPr/>
+              </p14:nvContentPartPr>
+              <p14:xfrm>
+                <a:off x="6501712" y="4933246"/>
+                <a:ext cx="106560" cy="99360"/>
+              </p14:xfrm>
+            </p:contentPart>
+          </mc:Choice>
+          <mc:Fallback xmlns="">
+            <p:pic>
+              <p:nvPicPr>
+                <p:cNvPr id="39" name="Ink 38">
+                  <a:extLst>
+                    <a:ext uri="{FF2B5EF4-FFF2-40B4-BE49-F238E27FC236}">
+                      <a16:creationId xmlns:a16="http://schemas.microsoft.com/office/drawing/2014/main" id="{F7E9D031-4C0D-286D-6E01-DB0428D94AE6}"/>
+                    </a:ext>
+                  </a:extLst>
+                </p:cNvPr>
+                <p:cNvPicPr/>
+                <p:nvPr/>
+              </p:nvPicPr>
+              <p:blipFill>
+                <a:blip r:embed="rId65"/>
+                <a:stretch>
+                  <a:fillRect/>
+                </a:stretch>
+              </p:blipFill>
+              <p:spPr>
+                <a:xfrm>
+                  <a:off x="6484072" y="4915606"/>
+                  <a:ext cx="142200" cy="135000"/>
+                </a:xfrm>
+                <a:prstGeom prst="rect">
+                  <a:avLst/>
+                </a:prstGeom>
+              </p:spPr>
+            </p:pic>
+          </mc:Fallback>
+        </mc:AlternateContent>
+        <mc:AlternateContent xmlns:mc="http://schemas.openxmlformats.org/markup-compatibility/2006" xmlns:p14="http://schemas.microsoft.com/office/powerpoint/2010/main">
+          <mc:Choice Requires="p14">
+            <p:contentPart p14:bwMode="auto" r:id="rId66">
+              <p14:nvContentPartPr>
+                <p14:cNvPr id="40" name="Ink 39">
+                  <a:extLst>
+                    <a:ext uri="{FF2B5EF4-FFF2-40B4-BE49-F238E27FC236}">
+                      <a16:creationId xmlns:a16="http://schemas.microsoft.com/office/drawing/2014/main" id="{8392A8AC-F5DF-9179-96A3-CEFC1F237312}"/>
+                    </a:ext>
+                  </a:extLst>
+                </p14:cNvPr>
+                <p14:cNvContentPartPr/>
+                <p14:nvPr/>
+              </p14:nvContentPartPr>
+              <p14:xfrm>
+                <a:off x="6644272" y="4937206"/>
+                <a:ext cx="102600" cy="113040"/>
+              </p14:xfrm>
+            </p:contentPart>
+          </mc:Choice>
+          <mc:Fallback xmlns="">
+            <p:pic>
+              <p:nvPicPr>
+                <p:cNvPr id="40" name="Ink 39">
+                  <a:extLst>
+                    <a:ext uri="{FF2B5EF4-FFF2-40B4-BE49-F238E27FC236}">
+                      <a16:creationId xmlns:a16="http://schemas.microsoft.com/office/drawing/2014/main" id="{8392A8AC-F5DF-9179-96A3-CEFC1F237312}"/>
+                    </a:ext>
+                  </a:extLst>
+                </p:cNvPr>
+                <p:cNvPicPr/>
+                <p:nvPr/>
+              </p:nvPicPr>
+              <p:blipFill>
+                <a:blip r:embed="rId67"/>
+                <a:stretch>
+                  <a:fillRect/>
+                </a:stretch>
+              </p:blipFill>
+              <p:spPr>
+                <a:xfrm>
+                  <a:off x="6626632" y="4919206"/>
+                  <a:ext cx="138240" cy="148680"/>
+                </a:xfrm>
+                <a:prstGeom prst="rect">
+                  <a:avLst/>
+                </a:prstGeom>
+              </p:spPr>
+            </p:pic>
+          </mc:Fallback>
+        </mc:AlternateContent>
+        <mc:AlternateContent xmlns:mc="http://schemas.openxmlformats.org/markup-compatibility/2006" xmlns:p14="http://schemas.microsoft.com/office/powerpoint/2010/main">
+          <mc:Choice Requires="p14">
+            <p:contentPart p14:bwMode="auto" r:id="rId68">
+              <p14:nvContentPartPr>
+                <p14:cNvPr id="41" name="Ink 40">
+                  <a:extLst>
+                    <a:ext uri="{FF2B5EF4-FFF2-40B4-BE49-F238E27FC236}">
+                      <a16:creationId xmlns:a16="http://schemas.microsoft.com/office/drawing/2014/main" id="{14C46EC8-4934-1430-DF45-9DC27196FC5E}"/>
+                    </a:ext>
+                  </a:extLst>
+                </p14:cNvPr>
+                <p14:cNvContentPartPr/>
+                <p14:nvPr/>
+              </p14:nvContentPartPr>
+              <p14:xfrm>
+                <a:off x="6863872" y="4670446"/>
+                <a:ext cx="50760" cy="314280"/>
+              </p14:xfrm>
+            </p:contentPart>
+          </mc:Choice>
+          <mc:Fallback xmlns="">
+            <p:pic>
+              <p:nvPicPr>
+                <p:cNvPr id="41" name="Ink 40">
+                  <a:extLst>
+                    <a:ext uri="{FF2B5EF4-FFF2-40B4-BE49-F238E27FC236}">
+                      <a16:creationId xmlns:a16="http://schemas.microsoft.com/office/drawing/2014/main" id="{14C46EC8-4934-1430-DF45-9DC27196FC5E}"/>
+                    </a:ext>
+                  </a:extLst>
+                </p:cNvPr>
+                <p:cNvPicPr/>
+                <p:nvPr/>
+              </p:nvPicPr>
+              <p:blipFill>
+                <a:blip r:embed="rId69"/>
+                <a:stretch>
+                  <a:fillRect/>
+                </a:stretch>
+              </p:blipFill>
+              <p:spPr>
+                <a:xfrm>
+                  <a:off x="6846232" y="4652446"/>
+                  <a:ext cx="86400" cy="349920"/>
+                </a:xfrm>
+                <a:prstGeom prst="rect">
+                  <a:avLst/>
+                </a:prstGeom>
+              </p:spPr>
+            </p:pic>
+          </mc:Fallback>
+        </mc:AlternateContent>
+        <mc:AlternateContent xmlns:mc="http://schemas.openxmlformats.org/markup-compatibility/2006" xmlns:p14="http://schemas.microsoft.com/office/powerpoint/2010/main">
+          <mc:Choice Requires="p14">
+            <p:contentPart p14:bwMode="auto" r:id="rId70">
+              <p14:nvContentPartPr>
+                <p14:cNvPr id="42" name="Ink 41">
+                  <a:extLst>
+                    <a:ext uri="{FF2B5EF4-FFF2-40B4-BE49-F238E27FC236}">
+                      <a16:creationId xmlns:a16="http://schemas.microsoft.com/office/drawing/2014/main" id="{9B7644AD-94FC-0D3B-ADE5-3BBDAAFA47B7}"/>
+                    </a:ext>
+                  </a:extLst>
+                </p14:cNvPr>
+                <p14:cNvContentPartPr/>
+                <p14:nvPr/>
+              </p14:nvContentPartPr>
+              <p14:xfrm>
+                <a:off x="6814912" y="4820926"/>
+                <a:ext cx="285120" cy="120600"/>
+              </p14:xfrm>
+            </p:contentPart>
+          </mc:Choice>
+          <mc:Fallback xmlns="">
+            <p:pic>
+              <p:nvPicPr>
+                <p:cNvPr id="42" name="Ink 41">
+                  <a:extLst>
+                    <a:ext uri="{FF2B5EF4-FFF2-40B4-BE49-F238E27FC236}">
+                      <a16:creationId xmlns:a16="http://schemas.microsoft.com/office/drawing/2014/main" id="{9B7644AD-94FC-0D3B-ADE5-3BBDAAFA47B7}"/>
+                    </a:ext>
+                  </a:extLst>
+                </p:cNvPr>
+                <p:cNvPicPr/>
+                <p:nvPr/>
+              </p:nvPicPr>
+              <p:blipFill>
+                <a:blip r:embed="rId71"/>
+                <a:stretch>
+                  <a:fillRect/>
+                </a:stretch>
+              </p:blipFill>
+              <p:spPr>
+                <a:xfrm>
+                  <a:off x="6797272" y="4803286"/>
+                  <a:ext cx="320760" cy="156240"/>
+                </a:xfrm>
+                <a:prstGeom prst="rect">
+                  <a:avLst/>
+                </a:prstGeom>
+              </p:spPr>
+            </p:pic>
+          </mc:Fallback>
+        </mc:AlternateContent>
+        <mc:AlternateContent xmlns:mc="http://schemas.openxmlformats.org/markup-compatibility/2006" xmlns:p14="http://schemas.microsoft.com/office/powerpoint/2010/main">
+          <mc:Choice Requires="p14">
+            <p:contentPart p14:bwMode="auto" r:id="rId72">
+              <p14:nvContentPartPr>
+                <p14:cNvPr id="43" name="Ink 42">
+                  <a:extLst>
+                    <a:ext uri="{FF2B5EF4-FFF2-40B4-BE49-F238E27FC236}">
+                      <a16:creationId xmlns:a16="http://schemas.microsoft.com/office/drawing/2014/main" id="{7C804858-E7C5-552C-CAB7-B4F96BA54C35}"/>
+                    </a:ext>
+                  </a:extLst>
+                </p14:cNvPr>
+                <p14:cNvContentPartPr/>
+                <p14:nvPr/>
+              </p14:nvContentPartPr>
+              <p14:xfrm>
+                <a:off x="6273112" y="5364526"/>
+                <a:ext cx="14760" cy="165240"/>
+              </p14:xfrm>
+            </p:contentPart>
+          </mc:Choice>
+          <mc:Fallback xmlns="">
+            <p:pic>
+              <p:nvPicPr>
+                <p:cNvPr id="43" name="Ink 42">
+                  <a:extLst>
+                    <a:ext uri="{FF2B5EF4-FFF2-40B4-BE49-F238E27FC236}">
+                      <a16:creationId xmlns:a16="http://schemas.microsoft.com/office/drawing/2014/main" id="{7C804858-E7C5-552C-CAB7-B4F96BA54C35}"/>
+                    </a:ext>
+                  </a:extLst>
+                </p:cNvPr>
+                <p:cNvPicPr/>
+                <p:nvPr/>
+              </p:nvPicPr>
+              <p:blipFill>
+                <a:blip r:embed="rId73"/>
+                <a:stretch>
+                  <a:fillRect/>
+                </a:stretch>
+              </p:blipFill>
+              <p:spPr>
+                <a:xfrm>
+                  <a:off x="6255472" y="5346526"/>
+                  <a:ext cx="50400" cy="200880"/>
+                </a:xfrm>
+                <a:prstGeom prst="rect">
+                  <a:avLst/>
+                </a:prstGeom>
+              </p:spPr>
+            </p:pic>
+          </mc:Fallback>
+        </mc:AlternateContent>
+        <mc:AlternateContent xmlns:mc="http://schemas.openxmlformats.org/markup-compatibility/2006" xmlns:p14="http://schemas.microsoft.com/office/powerpoint/2010/main">
+          <mc:Choice Requires="p14">
+            <p:contentPart p14:bwMode="auto" r:id="rId74">
+              <p14:nvContentPartPr>
+                <p14:cNvPr id="44" name="Ink 43">
+                  <a:extLst>
+                    <a:ext uri="{FF2B5EF4-FFF2-40B4-BE49-F238E27FC236}">
+                      <a16:creationId xmlns:a16="http://schemas.microsoft.com/office/drawing/2014/main" id="{5C329BC6-7298-5745-E1BA-6D2AC02941F8}"/>
+                    </a:ext>
+                  </a:extLst>
+                </p14:cNvPr>
+                <p14:cNvContentPartPr/>
+                <p14:nvPr/>
+              </p14:nvContentPartPr>
+              <p14:xfrm>
+                <a:off x="6327832" y="5238886"/>
+                <a:ext cx="19440" cy="14040"/>
+              </p14:xfrm>
+            </p:contentPart>
+          </mc:Choice>
+          <mc:Fallback xmlns="">
+            <p:pic>
+              <p:nvPicPr>
+                <p:cNvPr id="44" name="Ink 43">
+                  <a:extLst>
+                    <a:ext uri="{FF2B5EF4-FFF2-40B4-BE49-F238E27FC236}">
+                      <a16:creationId xmlns:a16="http://schemas.microsoft.com/office/drawing/2014/main" id="{5C329BC6-7298-5745-E1BA-6D2AC02941F8}"/>
+                    </a:ext>
+                  </a:extLst>
+                </p:cNvPr>
+                <p:cNvPicPr/>
+                <p:nvPr/>
+              </p:nvPicPr>
+              <p:blipFill>
+                <a:blip r:embed="rId75"/>
+                <a:stretch>
+                  <a:fillRect/>
+                </a:stretch>
+              </p:blipFill>
+              <p:spPr>
+                <a:xfrm>
+                  <a:off x="6310192" y="5220886"/>
+                  <a:ext cx="55080" cy="49680"/>
+                </a:xfrm>
+                <a:prstGeom prst="rect">
+                  <a:avLst/>
+                </a:prstGeom>
+              </p:spPr>
+            </p:pic>
+          </mc:Fallback>
+        </mc:AlternateContent>
+        <mc:AlternateContent xmlns:mc="http://schemas.openxmlformats.org/markup-compatibility/2006" xmlns:p14="http://schemas.microsoft.com/office/powerpoint/2010/main">
+          <mc:Choice Requires="p14">
+            <p:contentPart p14:bwMode="auto" r:id="rId76">
+              <p14:nvContentPartPr>
+                <p14:cNvPr id="45" name="Ink 44">
+                  <a:extLst>
+                    <a:ext uri="{FF2B5EF4-FFF2-40B4-BE49-F238E27FC236}">
+                      <a16:creationId xmlns:a16="http://schemas.microsoft.com/office/drawing/2014/main" id="{0B4E2086-9B01-7010-62FC-530FB9145581}"/>
+                    </a:ext>
+                  </a:extLst>
+                </p14:cNvPr>
+                <p14:cNvContentPartPr/>
+                <p14:nvPr/>
+              </p14:nvContentPartPr>
+              <p14:xfrm>
+                <a:off x="6425392" y="5402326"/>
+                <a:ext cx="133920" cy="76320"/>
+              </p14:xfrm>
+            </p:contentPart>
+          </mc:Choice>
+          <mc:Fallback xmlns="">
+            <p:pic>
+              <p:nvPicPr>
+                <p:cNvPr id="45" name="Ink 44">
+                  <a:extLst>
+                    <a:ext uri="{FF2B5EF4-FFF2-40B4-BE49-F238E27FC236}">
+                      <a16:creationId xmlns:a16="http://schemas.microsoft.com/office/drawing/2014/main" id="{0B4E2086-9B01-7010-62FC-530FB9145581}"/>
+                    </a:ext>
+                  </a:extLst>
+                </p:cNvPr>
+                <p:cNvPicPr/>
+                <p:nvPr/>
+              </p:nvPicPr>
+              <p:blipFill>
+                <a:blip r:embed="rId77"/>
+                <a:stretch>
+                  <a:fillRect/>
+                </a:stretch>
+              </p:blipFill>
+              <p:spPr>
+                <a:xfrm>
+                  <a:off x="6407392" y="5384326"/>
+                  <a:ext cx="169560" cy="111960"/>
+                </a:xfrm>
+                <a:prstGeom prst="rect">
+                  <a:avLst/>
+                </a:prstGeom>
+              </p:spPr>
+            </p:pic>
+          </mc:Fallback>
+        </mc:AlternateContent>
+        <mc:AlternateContent xmlns:mc="http://schemas.openxmlformats.org/markup-compatibility/2006" xmlns:p14="http://schemas.microsoft.com/office/powerpoint/2010/main">
+          <mc:Choice Requires="p14">
+            <p:contentPart p14:bwMode="auto" r:id="rId78">
+              <p14:nvContentPartPr>
+                <p14:cNvPr id="46" name="Ink 45">
+                  <a:extLst>
+                    <a:ext uri="{FF2B5EF4-FFF2-40B4-BE49-F238E27FC236}">
+                      <a16:creationId xmlns:a16="http://schemas.microsoft.com/office/drawing/2014/main" id="{4F8378D4-71C4-64C9-307E-068EF8AC252C}"/>
+                    </a:ext>
+                  </a:extLst>
+                </p14:cNvPr>
+                <p14:cNvContentPartPr/>
+                <p14:nvPr/>
+              </p14:nvContentPartPr>
+              <p14:xfrm>
+                <a:off x="6557512" y="5299726"/>
+                <a:ext cx="105840" cy="168480"/>
+              </p14:xfrm>
+            </p:contentPart>
+          </mc:Choice>
+          <mc:Fallback xmlns="">
+            <p:pic>
+              <p:nvPicPr>
+                <p:cNvPr id="46" name="Ink 45">
+                  <a:extLst>
+                    <a:ext uri="{FF2B5EF4-FFF2-40B4-BE49-F238E27FC236}">
+                      <a16:creationId xmlns:a16="http://schemas.microsoft.com/office/drawing/2014/main" id="{4F8378D4-71C4-64C9-307E-068EF8AC252C}"/>
+                    </a:ext>
+                  </a:extLst>
+                </p:cNvPr>
+                <p:cNvPicPr/>
+                <p:nvPr/>
+              </p:nvPicPr>
+              <p:blipFill>
+                <a:blip r:embed="rId79"/>
+                <a:stretch>
+                  <a:fillRect/>
+                </a:stretch>
+              </p:blipFill>
+              <p:spPr>
+                <a:xfrm>
+                  <a:off x="6539512" y="5282086"/>
+                  <a:ext cx="141480" cy="204120"/>
+                </a:xfrm>
+                <a:prstGeom prst="rect">
+                  <a:avLst/>
+                </a:prstGeom>
+              </p:spPr>
+            </p:pic>
+          </mc:Fallback>
+        </mc:AlternateContent>
+        <mc:AlternateContent xmlns:mc="http://schemas.openxmlformats.org/markup-compatibility/2006" xmlns:p14="http://schemas.microsoft.com/office/powerpoint/2010/main">
+          <mc:Choice Requires="p14">
+            <p:contentPart p14:bwMode="auto" r:id="rId80">
+              <p14:nvContentPartPr>
+                <p14:cNvPr id="47" name="Ink 46">
+                  <a:extLst>
+                    <a:ext uri="{FF2B5EF4-FFF2-40B4-BE49-F238E27FC236}">
+                      <a16:creationId xmlns:a16="http://schemas.microsoft.com/office/drawing/2014/main" id="{DCB1C157-9FB9-EA7C-87F8-1408F096522A}"/>
+                    </a:ext>
+                  </a:extLst>
+                </p14:cNvPr>
+                <p14:cNvContentPartPr/>
+                <p14:nvPr/>
+              </p14:nvContentPartPr>
+              <p14:xfrm>
+                <a:off x="6742912" y="5265166"/>
+                <a:ext cx="100800" cy="300240"/>
+              </p14:xfrm>
+            </p:contentPart>
+          </mc:Choice>
+          <mc:Fallback xmlns="">
+            <p:pic>
+              <p:nvPicPr>
+                <p:cNvPr id="47" name="Ink 46">
+                  <a:extLst>
+                    <a:ext uri="{FF2B5EF4-FFF2-40B4-BE49-F238E27FC236}">
+                      <a16:creationId xmlns:a16="http://schemas.microsoft.com/office/drawing/2014/main" id="{DCB1C157-9FB9-EA7C-87F8-1408F096522A}"/>
+                    </a:ext>
+                  </a:extLst>
+                </p:cNvPr>
+                <p:cNvPicPr/>
+                <p:nvPr/>
+              </p:nvPicPr>
+              <p:blipFill>
+                <a:blip r:embed="rId81"/>
+                <a:stretch>
+                  <a:fillRect/>
+                </a:stretch>
+              </p:blipFill>
+              <p:spPr>
+                <a:xfrm>
+                  <a:off x="6725272" y="5247526"/>
+                  <a:ext cx="136440" cy="335880"/>
+                </a:xfrm>
+                <a:prstGeom prst="rect">
+                  <a:avLst/>
+                </a:prstGeom>
+              </p:spPr>
+            </p:pic>
+          </mc:Fallback>
+        </mc:AlternateContent>
+        <mc:AlternateContent xmlns:mc="http://schemas.openxmlformats.org/markup-compatibility/2006" xmlns:p14="http://schemas.microsoft.com/office/powerpoint/2010/main">
+          <mc:Choice Requires="p14">
+            <p:contentPart p14:bwMode="auto" r:id="rId82">
+              <p14:nvContentPartPr>
+                <p14:cNvPr id="48" name="Ink 47">
+                  <a:extLst>
+                    <a:ext uri="{FF2B5EF4-FFF2-40B4-BE49-F238E27FC236}">
+                      <a16:creationId xmlns:a16="http://schemas.microsoft.com/office/drawing/2014/main" id="{BC046D68-916F-7324-4E82-2766F070F524}"/>
+                    </a:ext>
+                  </a:extLst>
+                </p14:cNvPr>
+                <p14:cNvContentPartPr/>
+                <p14:nvPr/>
+              </p14:nvContentPartPr>
+              <p14:xfrm>
+                <a:off x="6906712" y="5284246"/>
+                <a:ext cx="21960" cy="121680"/>
+              </p14:xfrm>
+            </p:contentPart>
+          </mc:Choice>
+          <mc:Fallback xmlns="">
+            <p:pic>
+              <p:nvPicPr>
+                <p:cNvPr id="48" name="Ink 47">
+                  <a:extLst>
+                    <a:ext uri="{FF2B5EF4-FFF2-40B4-BE49-F238E27FC236}">
+                      <a16:creationId xmlns:a16="http://schemas.microsoft.com/office/drawing/2014/main" id="{BC046D68-916F-7324-4E82-2766F070F524}"/>
+                    </a:ext>
+                  </a:extLst>
+                </p:cNvPr>
+                <p:cNvPicPr/>
+                <p:nvPr/>
+              </p:nvPicPr>
+              <p:blipFill>
+                <a:blip r:embed="rId83"/>
+                <a:stretch>
+                  <a:fillRect/>
+                </a:stretch>
+              </p:blipFill>
+              <p:spPr>
+                <a:xfrm>
+                  <a:off x="6889072" y="5266246"/>
+                  <a:ext cx="57600" cy="157320"/>
+                </a:xfrm>
+                <a:prstGeom prst="rect">
+                  <a:avLst/>
+                </a:prstGeom>
+              </p:spPr>
+            </p:pic>
+          </mc:Fallback>
+        </mc:AlternateContent>
+        <mc:AlternateContent xmlns:mc="http://schemas.openxmlformats.org/markup-compatibility/2006" xmlns:p14="http://schemas.microsoft.com/office/powerpoint/2010/main">
+          <mc:Choice Requires="p14">
+            <p:contentPart p14:bwMode="auto" r:id="rId84">
+              <p14:nvContentPartPr>
+                <p14:cNvPr id="49" name="Ink 48">
+                  <a:extLst>
+                    <a:ext uri="{FF2B5EF4-FFF2-40B4-BE49-F238E27FC236}">
+                      <a16:creationId xmlns:a16="http://schemas.microsoft.com/office/drawing/2014/main" id="{4BEAEBE4-26E9-A1FA-8A42-2794D3538FEB}"/>
+                    </a:ext>
+                  </a:extLst>
+                </p14:cNvPr>
+                <p14:cNvContentPartPr/>
+                <p14:nvPr/>
+              </p14:nvContentPartPr>
+              <p14:xfrm>
+                <a:off x="6931912" y="5175166"/>
+                <a:ext cx="64800" cy="30960"/>
+              </p14:xfrm>
+            </p:contentPart>
+          </mc:Choice>
+          <mc:Fallback xmlns="">
+            <p:pic>
+              <p:nvPicPr>
+                <p:cNvPr id="49" name="Ink 48">
+                  <a:extLst>
+                    <a:ext uri="{FF2B5EF4-FFF2-40B4-BE49-F238E27FC236}">
+                      <a16:creationId xmlns:a16="http://schemas.microsoft.com/office/drawing/2014/main" id="{4BEAEBE4-26E9-A1FA-8A42-2794D3538FEB}"/>
+                    </a:ext>
+                  </a:extLst>
+                </p:cNvPr>
+                <p:cNvPicPr/>
+                <p:nvPr/>
+              </p:nvPicPr>
+              <p:blipFill>
+                <a:blip r:embed="rId85"/>
+                <a:stretch>
+                  <a:fillRect/>
+                </a:stretch>
+              </p:blipFill>
+              <p:spPr>
+                <a:xfrm>
+                  <a:off x="6914272" y="5157166"/>
+                  <a:ext cx="100440" cy="66600"/>
+                </a:xfrm>
+                <a:prstGeom prst="rect">
+                  <a:avLst/>
+                </a:prstGeom>
+              </p:spPr>
+            </p:pic>
+          </mc:Fallback>
+        </mc:AlternateContent>
+        <mc:AlternateContent xmlns:mc="http://schemas.openxmlformats.org/markup-compatibility/2006" xmlns:p14="http://schemas.microsoft.com/office/powerpoint/2010/main">
+          <mc:Choice Requires="p14">
+            <p:contentPart p14:bwMode="auto" r:id="rId86">
+              <p14:nvContentPartPr>
+                <p14:cNvPr id="50" name="Ink 49">
+                  <a:extLst>
+                    <a:ext uri="{FF2B5EF4-FFF2-40B4-BE49-F238E27FC236}">
+                      <a16:creationId xmlns:a16="http://schemas.microsoft.com/office/drawing/2014/main" id="{C61FE091-C7E3-3A6F-15E7-3F1361FF8078}"/>
+                    </a:ext>
+                  </a:extLst>
+                </p14:cNvPr>
+                <p14:cNvContentPartPr/>
+                <p14:nvPr/>
+              </p14:nvContentPartPr>
+              <p14:xfrm>
+                <a:off x="7028032" y="5239966"/>
+                <a:ext cx="39600" cy="102240"/>
+              </p14:xfrm>
+            </p:contentPart>
+          </mc:Choice>
+          <mc:Fallback xmlns="">
+            <p:pic>
+              <p:nvPicPr>
+                <p:cNvPr id="50" name="Ink 49">
+                  <a:extLst>
+                    <a:ext uri="{FF2B5EF4-FFF2-40B4-BE49-F238E27FC236}">
+                      <a16:creationId xmlns:a16="http://schemas.microsoft.com/office/drawing/2014/main" id="{C61FE091-C7E3-3A6F-15E7-3F1361FF8078}"/>
+                    </a:ext>
+                  </a:extLst>
+                </p:cNvPr>
+                <p:cNvPicPr/>
+                <p:nvPr/>
+              </p:nvPicPr>
+              <p:blipFill>
+                <a:blip r:embed="rId87"/>
+                <a:stretch>
+                  <a:fillRect/>
+                </a:stretch>
+              </p:blipFill>
+              <p:spPr>
+                <a:xfrm>
+                  <a:off x="7010032" y="5221966"/>
+                  <a:ext cx="75240" cy="137880"/>
+                </a:xfrm>
+                <a:prstGeom prst="rect">
+                  <a:avLst/>
+                </a:prstGeom>
+              </p:spPr>
+            </p:pic>
+          </mc:Fallback>
+        </mc:AlternateContent>
+        <mc:AlternateContent xmlns:mc="http://schemas.openxmlformats.org/markup-compatibility/2006" xmlns:p14="http://schemas.microsoft.com/office/powerpoint/2010/main">
+          <mc:Choice Requires="p14">
+            <p:contentPart p14:bwMode="auto" r:id="rId88">
+              <p14:nvContentPartPr>
+                <p14:cNvPr id="51" name="Ink 50">
+                  <a:extLst>
+                    <a:ext uri="{FF2B5EF4-FFF2-40B4-BE49-F238E27FC236}">
+                      <a16:creationId xmlns:a16="http://schemas.microsoft.com/office/drawing/2014/main" id="{31A3A43D-B439-E7F3-FF73-525364973971}"/>
+                    </a:ext>
+                  </a:extLst>
+                </p14:cNvPr>
+                <p14:cNvContentPartPr/>
+                <p14:nvPr/>
+              </p14:nvContentPartPr>
+              <p14:xfrm>
+                <a:off x="7120192" y="5261566"/>
+                <a:ext cx="93600" cy="84240"/>
+              </p14:xfrm>
+            </p:contentPart>
+          </mc:Choice>
+          <mc:Fallback xmlns="">
+            <p:pic>
+              <p:nvPicPr>
+                <p:cNvPr id="51" name="Ink 50">
+                  <a:extLst>
+                    <a:ext uri="{FF2B5EF4-FFF2-40B4-BE49-F238E27FC236}">
+                      <a16:creationId xmlns:a16="http://schemas.microsoft.com/office/drawing/2014/main" id="{31A3A43D-B439-E7F3-FF73-525364973971}"/>
+                    </a:ext>
+                  </a:extLst>
+                </p:cNvPr>
+                <p:cNvPicPr/>
+                <p:nvPr/>
+              </p:nvPicPr>
+              <p:blipFill>
+                <a:blip r:embed="rId89"/>
+                <a:stretch>
+                  <a:fillRect/>
+                </a:stretch>
+              </p:blipFill>
+              <p:spPr>
+                <a:xfrm>
+                  <a:off x="7102192" y="5243566"/>
+                  <a:ext cx="129240" cy="119880"/>
+                </a:xfrm>
+                <a:prstGeom prst="rect">
+                  <a:avLst/>
+                </a:prstGeom>
+              </p:spPr>
+            </p:pic>
+          </mc:Fallback>
+        </mc:AlternateContent>
+        <mc:AlternateContent xmlns:mc="http://schemas.openxmlformats.org/markup-compatibility/2006" xmlns:p14="http://schemas.microsoft.com/office/powerpoint/2010/main">
+          <mc:Choice Requires="p14">
+            <p:contentPart p14:bwMode="auto" r:id="rId90">
+              <p14:nvContentPartPr>
+                <p14:cNvPr id="52" name="Ink 51">
+                  <a:extLst>
+                    <a:ext uri="{FF2B5EF4-FFF2-40B4-BE49-F238E27FC236}">
+                      <a16:creationId xmlns:a16="http://schemas.microsoft.com/office/drawing/2014/main" id="{1E10E65D-CC3B-230B-8044-B9730F49B1E6}"/>
+                    </a:ext>
+                  </a:extLst>
+                </p14:cNvPr>
+                <p14:cNvContentPartPr/>
+                <p14:nvPr/>
+              </p14:nvContentPartPr>
+              <p14:xfrm>
+                <a:off x="7329352" y="5078686"/>
+                <a:ext cx="49320" cy="224280"/>
+              </p14:xfrm>
+            </p:contentPart>
+          </mc:Choice>
+          <mc:Fallback xmlns="">
+            <p:pic>
+              <p:nvPicPr>
+                <p:cNvPr id="52" name="Ink 51">
+                  <a:extLst>
+                    <a:ext uri="{FF2B5EF4-FFF2-40B4-BE49-F238E27FC236}">
+                      <a16:creationId xmlns:a16="http://schemas.microsoft.com/office/drawing/2014/main" id="{1E10E65D-CC3B-230B-8044-B9730F49B1E6}"/>
+                    </a:ext>
+                  </a:extLst>
+                </p:cNvPr>
+                <p:cNvPicPr/>
+                <p:nvPr/>
+              </p:nvPicPr>
+              <p:blipFill>
+                <a:blip r:embed="rId91"/>
+                <a:stretch>
+                  <a:fillRect/>
+                </a:stretch>
+              </p:blipFill>
+              <p:spPr>
+                <a:xfrm>
+                  <a:off x="7311712" y="5060686"/>
+                  <a:ext cx="84960" cy="259920"/>
+                </a:xfrm>
+                <a:prstGeom prst="rect">
+                  <a:avLst/>
+                </a:prstGeom>
+              </p:spPr>
+            </p:pic>
+          </mc:Fallback>
+        </mc:AlternateContent>
+        <mc:AlternateContent xmlns:mc="http://schemas.openxmlformats.org/markup-compatibility/2006" xmlns:p14="http://schemas.microsoft.com/office/powerpoint/2010/main">
+          <mc:Choice Requires="p14">
+            <p:contentPart p14:bwMode="auto" r:id="rId92">
+              <p14:nvContentPartPr>
+                <p14:cNvPr id="53" name="Ink 52">
+                  <a:extLst>
+                    <a:ext uri="{FF2B5EF4-FFF2-40B4-BE49-F238E27FC236}">
+                      <a16:creationId xmlns:a16="http://schemas.microsoft.com/office/drawing/2014/main" id="{2D70F46C-3C92-A76A-F90B-A1162BD1FFAF}"/>
+                    </a:ext>
+                  </a:extLst>
+                </p14:cNvPr>
+                <p14:cNvContentPartPr/>
+                <p14:nvPr/>
+              </p14:nvContentPartPr>
+              <p14:xfrm>
+                <a:off x="7262392" y="5192086"/>
+                <a:ext cx="122760" cy="96840"/>
+              </p14:xfrm>
+            </p:contentPart>
+          </mc:Choice>
+          <mc:Fallback xmlns="">
+            <p:pic>
+              <p:nvPicPr>
+                <p:cNvPr id="53" name="Ink 52">
+                  <a:extLst>
+                    <a:ext uri="{FF2B5EF4-FFF2-40B4-BE49-F238E27FC236}">
+                      <a16:creationId xmlns:a16="http://schemas.microsoft.com/office/drawing/2014/main" id="{2D70F46C-3C92-A76A-F90B-A1162BD1FFAF}"/>
+                    </a:ext>
+                  </a:extLst>
+                </p:cNvPr>
+                <p:cNvPicPr/>
+                <p:nvPr/>
+              </p:nvPicPr>
+              <p:blipFill>
+                <a:blip r:embed="rId93"/>
+                <a:stretch>
+                  <a:fillRect/>
+                </a:stretch>
+              </p:blipFill>
+              <p:spPr>
+                <a:xfrm>
+                  <a:off x="7244752" y="5174446"/>
+                  <a:ext cx="158400" cy="132480"/>
+                </a:xfrm>
+                <a:prstGeom prst="rect">
+                  <a:avLst/>
+                </a:prstGeom>
+              </p:spPr>
+            </p:pic>
+          </mc:Fallback>
+        </mc:AlternateContent>
+        <mc:AlternateContent xmlns:mc="http://schemas.openxmlformats.org/markup-compatibility/2006" xmlns:p14="http://schemas.microsoft.com/office/powerpoint/2010/main">
+          <mc:Choice Requires="p14">
+            <p:contentPart p14:bwMode="auto" r:id="rId94">
+              <p14:nvContentPartPr>
+                <p14:cNvPr id="54" name="Ink 53">
+                  <a:extLst>
+                    <a:ext uri="{FF2B5EF4-FFF2-40B4-BE49-F238E27FC236}">
+                      <a16:creationId xmlns:a16="http://schemas.microsoft.com/office/drawing/2014/main" id="{7E49C325-BD83-8D26-BA08-31D4C7978D3E}"/>
+                    </a:ext>
+                  </a:extLst>
+                </p14:cNvPr>
+                <p14:cNvContentPartPr/>
+                <p14:nvPr/>
+              </p14:nvContentPartPr>
+              <p14:xfrm>
+                <a:off x="7440232" y="5214766"/>
+                <a:ext cx="19440" cy="85320"/>
+              </p14:xfrm>
+            </p:contentPart>
+          </mc:Choice>
+          <mc:Fallback xmlns="">
+            <p:pic>
+              <p:nvPicPr>
+                <p:cNvPr id="54" name="Ink 53">
+                  <a:extLst>
+                    <a:ext uri="{FF2B5EF4-FFF2-40B4-BE49-F238E27FC236}">
+                      <a16:creationId xmlns:a16="http://schemas.microsoft.com/office/drawing/2014/main" id="{7E49C325-BD83-8D26-BA08-31D4C7978D3E}"/>
+                    </a:ext>
+                  </a:extLst>
+                </p:cNvPr>
+                <p:cNvPicPr/>
+                <p:nvPr/>
+              </p:nvPicPr>
+              <p:blipFill>
+                <a:blip r:embed="rId95"/>
+                <a:stretch>
+                  <a:fillRect/>
+                </a:stretch>
+              </p:blipFill>
+              <p:spPr>
+                <a:xfrm>
+                  <a:off x="7422592" y="5197126"/>
+                  <a:ext cx="55080" cy="120960"/>
+                </a:xfrm>
+                <a:prstGeom prst="rect">
+                  <a:avLst/>
+                </a:prstGeom>
+              </p:spPr>
+            </p:pic>
+          </mc:Fallback>
+        </mc:AlternateContent>
+        <mc:AlternateContent xmlns:mc="http://schemas.openxmlformats.org/markup-compatibility/2006" xmlns:p14="http://schemas.microsoft.com/office/powerpoint/2010/main">
+          <mc:Choice Requires="p14">
+            <p:contentPart p14:bwMode="auto" r:id="rId96">
+              <p14:nvContentPartPr>
+                <p14:cNvPr id="55" name="Ink 54">
+                  <a:extLst>
+                    <a:ext uri="{FF2B5EF4-FFF2-40B4-BE49-F238E27FC236}">
+                      <a16:creationId xmlns:a16="http://schemas.microsoft.com/office/drawing/2014/main" id="{04BE0A51-46B0-E5D3-6941-D83D58DA2C5D}"/>
+                    </a:ext>
+                  </a:extLst>
+                </p14:cNvPr>
+                <p14:cNvContentPartPr/>
+                <p14:nvPr/>
+              </p14:nvContentPartPr>
+              <p14:xfrm>
+                <a:off x="7445272" y="5099206"/>
+                <a:ext cx="24480" cy="23040"/>
+              </p14:xfrm>
+            </p:contentPart>
+          </mc:Choice>
+          <mc:Fallback xmlns="">
+            <p:pic>
+              <p:nvPicPr>
+                <p:cNvPr id="55" name="Ink 54">
+                  <a:extLst>
+                    <a:ext uri="{FF2B5EF4-FFF2-40B4-BE49-F238E27FC236}">
+                      <a16:creationId xmlns:a16="http://schemas.microsoft.com/office/drawing/2014/main" id="{04BE0A51-46B0-E5D3-6941-D83D58DA2C5D}"/>
+                    </a:ext>
+                  </a:extLst>
+                </p:cNvPr>
+                <p:cNvPicPr/>
+                <p:nvPr/>
+              </p:nvPicPr>
+              <p:blipFill>
+                <a:blip r:embed="rId97"/>
+                <a:stretch>
+                  <a:fillRect/>
+                </a:stretch>
+              </p:blipFill>
+              <p:spPr>
+                <a:xfrm>
+                  <a:off x="7427632" y="5081206"/>
+                  <a:ext cx="60120" cy="58680"/>
+                </a:xfrm>
+                <a:prstGeom prst="rect">
+                  <a:avLst/>
+                </a:prstGeom>
+              </p:spPr>
+            </p:pic>
+          </mc:Fallback>
+        </mc:AlternateContent>
+        <mc:AlternateContent xmlns:mc="http://schemas.openxmlformats.org/markup-compatibility/2006" xmlns:p14="http://schemas.microsoft.com/office/powerpoint/2010/main">
+          <mc:Choice Requires="p14">
+            <p:contentPart p14:bwMode="auto" r:id="rId98">
+              <p14:nvContentPartPr>
+                <p14:cNvPr id="56" name="Ink 55">
+                  <a:extLst>
+                    <a:ext uri="{FF2B5EF4-FFF2-40B4-BE49-F238E27FC236}">
+                      <a16:creationId xmlns:a16="http://schemas.microsoft.com/office/drawing/2014/main" id="{84104DA5-23F7-0F5F-2A12-3B6EEA25F66F}"/>
+                    </a:ext>
+                  </a:extLst>
+                </p14:cNvPr>
+                <p14:cNvContentPartPr/>
+                <p14:nvPr/>
+              </p14:nvContentPartPr>
+              <p14:xfrm>
+                <a:off x="7541032" y="5169406"/>
+                <a:ext cx="83880" cy="85680"/>
+              </p14:xfrm>
+            </p:contentPart>
+          </mc:Choice>
+          <mc:Fallback xmlns="">
+            <p:pic>
+              <p:nvPicPr>
+                <p:cNvPr id="56" name="Ink 55">
+                  <a:extLst>
+                    <a:ext uri="{FF2B5EF4-FFF2-40B4-BE49-F238E27FC236}">
+                      <a16:creationId xmlns:a16="http://schemas.microsoft.com/office/drawing/2014/main" id="{84104DA5-23F7-0F5F-2A12-3B6EEA25F66F}"/>
+                    </a:ext>
+                  </a:extLst>
+                </p:cNvPr>
+                <p:cNvPicPr/>
+                <p:nvPr/>
+              </p:nvPicPr>
+              <p:blipFill>
+                <a:blip r:embed="rId99"/>
+                <a:stretch>
+                  <a:fillRect/>
+                </a:stretch>
+              </p:blipFill>
+              <p:spPr>
+                <a:xfrm>
+                  <a:off x="7523392" y="5151766"/>
+                  <a:ext cx="119520" cy="121320"/>
+                </a:xfrm>
+                <a:prstGeom prst="rect">
+                  <a:avLst/>
+                </a:prstGeom>
+              </p:spPr>
+            </p:pic>
+          </mc:Fallback>
+        </mc:AlternateContent>
+        <mc:AlternateContent xmlns:mc="http://schemas.openxmlformats.org/markup-compatibility/2006" xmlns:p14="http://schemas.microsoft.com/office/powerpoint/2010/main">
+          <mc:Choice Requires="p14">
+            <p:contentPart p14:bwMode="auto" r:id="rId100">
+              <p14:nvContentPartPr>
+                <p14:cNvPr id="57" name="Ink 56">
+                  <a:extLst>
+                    <a:ext uri="{FF2B5EF4-FFF2-40B4-BE49-F238E27FC236}">
+                      <a16:creationId xmlns:a16="http://schemas.microsoft.com/office/drawing/2014/main" id="{3F9D0DDB-E9D9-4E5B-5F4E-DC9815CF136F}"/>
+                    </a:ext>
+                  </a:extLst>
+                </p14:cNvPr>
+                <p14:cNvContentPartPr/>
+                <p14:nvPr/>
+              </p14:nvContentPartPr>
+              <p14:xfrm>
+                <a:off x="7655872" y="5119366"/>
+                <a:ext cx="230040" cy="127080"/>
+              </p14:xfrm>
+            </p:contentPart>
+          </mc:Choice>
+          <mc:Fallback xmlns="">
+            <p:pic>
+              <p:nvPicPr>
+                <p:cNvPr id="57" name="Ink 56">
+                  <a:extLst>
+                    <a:ext uri="{FF2B5EF4-FFF2-40B4-BE49-F238E27FC236}">
+                      <a16:creationId xmlns:a16="http://schemas.microsoft.com/office/drawing/2014/main" id="{3F9D0DDB-E9D9-4E5B-5F4E-DC9815CF136F}"/>
+                    </a:ext>
+                  </a:extLst>
+                </p:cNvPr>
+                <p:cNvPicPr/>
+                <p:nvPr/>
+              </p:nvPicPr>
+              <p:blipFill>
+                <a:blip r:embed="rId101"/>
+                <a:stretch>
+                  <a:fillRect/>
+                </a:stretch>
+              </p:blipFill>
+              <p:spPr>
+                <a:xfrm>
+                  <a:off x="7638232" y="5101726"/>
+                  <a:ext cx="265680" cy="162720"/>
+                </a:xfrm>
+                <a:prstGeom prst="rect">
+                  <a:avLst/>
+                </a:prstGeom>
+              </p:spPr>
+            </p:pic>
+          </mc:Fallback>
+        </mc:AlternateContent>
+      </p:grpSp>
+    </p:spTree>
+    <p:extLst>
+      <p:ext uri="{BB962C8B-B14F-4D97-AF65-F5344CB8AC3E}">
+        <p14:creationId xmlns:p14="http://schemas.microsoft.com/office/powerpoint/2010/main" val="726214766"/>
       </p:ext>
     </p:extLst>
   </p:cSld>
